--- a/skills/overview-deck/assets/skeletons/integration.pptx
+++ b/skills/overview-deck/assets/skeletons/integration.pptx
@@ -8,7 +8,7 @@
   <p:sldIdLst>
     <p:sldId id="256" r:id="rId8"/>
   </p:sldIdLst>
-  <p:sldSz cx="9144000" cy="5143500" type="screen4x3"/>
+  <p:sldSz cx="12191695" cy="6858000" type="screen4x3"/>
   <p:notesSz cx="6858000" cy="9144000"/>
   <p:defaultTextStyle>
     <a:defPPr>
@@ -759,8 +759,8 @@
         </p:nvSpPr>
         <p:spPr>
           <a:xfrm>
-            <a:off x="342900" y="4767263"/>
-            <a:ext cx="1600200" cy="273844"/>
+            <a:off x="457189" y="6356192"/>
+            <a:ext cx="2133547" cy="365116"/>
           </a:xfrm>
           <a:prstGeom prst="rect">
             <a:avLst/>
@@ -771,7 +771,7 @@
           </a:ln>
         </p:spPr>
         <p:txBody>
-          <a:bodyPr anchorCtr="0" anchor="ctr" bIns="45700" lIns="91425" spcFirstLastPara="1" rIns="91425" wrap="square" tIns="45700">
+          <a:bodyPr anchorCtr="0" anchor="ctr" bIns="60932" lIns="121897" spcFirstLastPara="1" rIns="121897" wrap="square" tIns="60932">
             <a:noAutofit/>
           </a:bodyPr>
           <a:lstStyle>
@@ -788,7 +788,7 @@
               <a:buClr>
                 <a:srgbClr val="888888"/>
               </a:buClr>
-              <a:buSzPts val="1800"/>
+              <a:buSzPts val="2400"/>
               <a:buNone/>
               <a:defRPr/>
             </a:lvl1pPr>
@@ -805,7 +805,7 @@
               <a:buClr>
                 <a:schemeClr val="accent2"/>
               </a:buClr>
-              <a:buSzPts val="1800"/>
+              <a:buSzPts val="2400"/>
               <a:buNone/>
               <a:defRPr/>
             </a:lvl2pPr>
@@ -822,7 +822,7 @@
               <a:buClr>
                 <a:schemeClr val="accent2"/>
               </a:buClr>
-              <a:buSzPts val="1800"/>
+              <a:buSzPts val="2400"/>
               <a:buNone/>
               <a:defRPr/>
             </a:lvl3pPr>
@@ -839,7 +839,7 @@
               <a:buClr>
                 <a:schemeClr val="accent2"/>
               </a:buClr>
-              <a:buSzPts val="1800"/>
+              <a:buSzPts val="2400"/>
               <a:buNone/>
               <a:defRPr/>
             </a:lvl4pPr>
@@ -856,7 +856,7 @@
               <a:buClr>
                 <a:schemeClr val="accent2"/>
               </a:buClr>
-              <a:buSzPts val="1800"/>
+              <a:buSzPts val="2400"/>
               <a:buNone/>
               <a:defRPr/>
             </a:lvl5pPr>
@@ -873,7 +873,7 @@
               <a:buClr>
                 <a:schemeClr val="accent2"/>
               </a:buClr>
-              <a:buSzPts val="1800"/>
+              <a:buSzPts val="2400"/>
               <a:buNone/>
               <a:defRPr/>
             </a:lvl6pPr>
@@ -890,7 +890,7 @@
               <a:buClr>
                 <a:schemeClr val="accent2"/>
               </a:buClr>
-              <a:buSzPts val="1800"/>
+              <a:buSzPts val="2400"/>
               <a:buNone/>
               <a:defRPr/>
             </a:lvl7pPr>
@@ -907,7 +907,7 @@
               <a:buClr>
                 <a:schemeClr val="accent2"/>
               </a:buClr>
-              <a:buSzPts val="1800"/>
+              <a:buSzPts val="2400"/>
               <a:buNone/>
               <a:defRPr/>
             </a:lvl8pPr>
@@ -924,7 +924,7 @@
               <a:buClr>
                 <a:schemeClr val="accent2"/>
               </a:buClr>
-              <a:buSzPts val="1800"/>
+              <a:buSzPts val="2400"/>
               <a:buNone/>
               <a:defRPr/>
             </a:lvl9pPr>
@@ -942,8 +942,8 @@
         </p:nvSpPr>
         <p:spPr>
           <a:xfrm>
-            <a:off x="2343150" y="4767263"/>
-            <a:ext cx="2171700" cy="273844"/>
+            <a:off x="3124122" y="6356192"/>
+            <a:ext cx="2895528" cy="365116"/>
           </a:xfrm>
           <a:prstGeom prst="rect">
             <a:avLst/>
@@ -954,7 +954,7 @@
           </a:ln>
         </p:spPr>
         <p:txBody>
-          <a:bodyPr anchorCtr="0" anchor="ctr" bIns="45700" lIns="91425" spcFirstLastPara="1" rIns="91425" wrap="square" tIns="45700">
+          <a:bodyPr anchorCtr="0" anchor="ctr" bIns="60932" lIns="121897" spcFirstLastPara="1" rIns="121897" wrap="square" tIns="60932">
             <a:noAutofit/>
           </a:bodyPr>
           <a:lstStyle>
@@ -971,7 +971,7 @@
               <a:buClr>
                 <a:srgbClr val="888888"/>
               </a:buClr>
-              <a:buSzPts val="1800"/>
+              <a:buSzPts val="2400"/>
               <a:buNone/>
               <a:defRPr/>
             </a:lvl1pPr>
@@ -988,7 +988,7 @@
               <a:buClr>
                 <a:schemeClr val="accent2"/>
               </a:buClr>
-              <a:buSzPts val="1800"/>
+              <a:buSzPts val="2400"/>
               <a:buNone/>
               <a:defRPr/>
             </a:lvl2pPr>
@@ -1005,7 +1005,7 @@
               <a:buClr>
                 <a:schemeClr val="accent2"/>
               </a:buClr>
-              <a:buSzPts val="1800"/>
+              <a:buSzPts val="2400"/>
               <a:buNone/>
               <a:defRPr/>
             </a:lvl3pPr>
@@ -1022,7 +1022,7 @@
               <a:buClr>
                 <a:schemeClr val="accent2"/>
               </a:buClr>
-              <a:buSzPts val="1800"/>
+              <a:buSzPts val="2400"/>
               <a:buNone/>
               <a:defRPr/>
             </a:lvl4pPr>
@@ -1039,7 +1039,7 @@
               <a:buClr>
                 <a:schemeClr val="accent2"/>
               </a:buClr>
-              <a:buSzPts val="1800"/>
+              <a:buSzPts val="2400"/>
               <a:buNone/>
               <a:defRPr/>
             </a:lvl5pPr>
@@ -1056,7 +1056,7 @@
               <a:buClr>
                 <a:schemeClr val="accent2"/>
               </a:buClr>
-              <a:buSzPts val="1800"/>
+              <a:buSzPts val="2400"/>
               <a:buNone/>
               <a:defRPr/>
             </a:lvl6pPr>
@@ -1073,7 +1073,7 @@
               <a:buClr>
                 <a:schemeClr val="accent2"/>
               </a:buClr>
-              <a:buSzPts val="1800"/>
+              <a:buSzPts val="2400"/>
               <a:buNone/>
               <a:defRPr/>
             </a:lvl7pPr>
@@ -1090,7 +1090,7 @@
               <a:buClr>
                 <a:schemeClr val="accent2"/>
               </a:buClr>
-              <a:buSzPts val="1800"/>
+              <a:buSzPts val="2400"/>
               <a:buNone/>
               <a:defRPr/>
             </a:lvl8pPr>
@@ -1107,7 +1107,7 @@
               <a:buClr>
                 <a:schemeClr val="accent2"/>
               </a:buClr>
-              <a:buSzPts val="1800"/>
+              <a:buSzPts val="2400"/>
               <a:buNone/>
               <a:defRPr/>
             </a:lvl9pPr>
@@ -1125,8 +1125,8 @@
         </p:nvSpPr>
         <p:spPr>
           <a:xfrm>
-            <a:off x="4914900" y="4767263"/>
-            <a:ext cx="1600200" cy="273844"/>
+            <a:off x="6553036" y="6356192"/>
+            <a:ext cx="2133547" cy="365116"/>
           </a:xfrm>
           <a:prstGeom prst="rect">
             <a:avLst/>
@@ -1137,7 +1137,7 @@
           </a:ln>
         </p:spPr>
         <p:txBody>
-          <a:bodyPr anchorCtr="0" anchor="ctr" bIns="45700" lIns="91425" spcFirstLastPara="1" rIns="91425" wrap="square" tIns="45700">
+          <a:bodyPr anchorCtr="0" anchor="ctr" bIns="60932" lIns="121897" spcFirstLastPara="1" rIns="121897" wrap="square" tIns="60932">
             <a:noAutofit/>
           </a:bodyPr>
           <a:lstStyle>
@@ -1154,7 +1154,7 @@
               <a:buClr>
                 <a:srgbClr val="888888"/>
               </a:buClr>
-              <a:buSzPts val="900"/>
+              <a:buSzPts val="1200"/>
               <a:buFont typeface="Calibri"/>
               <a:buNone/>
               <a:defRPr/>
@@ -1172,7 +1172,7 @@
               <a:buClr>
                 <a:srgbClr val="888888"/>
               </a:buClr>
-              <a:buSzPts val="900"/>
+              <a:buSzPts val="1200"/>
               <a:buFont typeface="Calibri"/>
               <a:buNone/>
               <a:defRPr/>
@@ -1190,7 +1190,7 @@
               <a:buClr>
                 <a:srgbClr val="888888"/>
               </a:buClr>
-              <a:buSzPts val="900"/>
+              <a:buSzPts val="1200"/>
               <a:buFont typeface="Calibri"/>
               <a:buNone/>
               <a:defRPr/>
@@ -1208,7 +1208,7 @@
               <a:buClr>
                 <a:srgbClr val="888888"/>
               </a:buClr>
-              <a:buSzPts val="900"/>
+              <a:buSzPts val="1200"/>
               <a:buFont typeface="Calibri"/>
               <a:buNone/>
               <a:defRPr/>
@@ -1226,7 +1226,7 @@
               <a:buClr>
                 <a:srgbClr val="888888"/>
               </a:buClr>
-              <a:buSzPts val="900"/>
+              <a:buSzPts val="1200"/>
               <a:buFont typeface="Calibri"/>
               <a:buNone/>
               <a:defRPr/>
@@ -1244,7 +1244,7 @@
               <a:buClr>
                 <a:srgbClr val="888888"/>
               </a:buClr>
-              <a:buSzPts val="900"/>
+              <a:buSzPts val="1200"/>
               <a:buFont typeface="Calibri"/>
               <a:buNone/>
               <a:defRPr/>
@@ -1262,7 +1262,7 @@
               <a:buClr>
                 <a:srgbClr val="888888"/>
               </a:buClr>
-              <a:buSzPts val="900"/>
+              <a:buSzPts val="1200"/>
               <a:buFont typeface="Calibri"/>
               <a:buNone/>
               <a:defRPr/>
@@ -1280,7 +1280,7 @@
               <a:buClr>
                 <a:srgbClr val="888888"/>
               </a:buClr>
-              <a:buSzPts val="900"/>
+              <a:buSzPts val="1200"/>
               <a:buFont typeface="Calibri"/>
               <a:buNone/>
               <a:defRPr/>
@@ -1298,7 +1298,7 @@
               <a:buClr>
                 <a:srgbClr val="888888"/>
               </a:buClr>
-              <a:buSzPts val="900"/>
+              <a:buSzPts val="1200"/>
               <a:buFont typeface="Calibri"/>
               <a:buNone/>
               <a:defRPr/>
@@ -1357,8 +1357,8 @@
         </p:nvSpPr>
         <p:spPr>
           <a:xfrm>
-            <a:off x="1344216" y="3600450"/>
-            <a:ext cx="4114800" cy="425054"/>
+            <a:off x="1792243" y="4800480"/>
+            <a:ext cx="5486263" cy="566724"/>
           </a:xfrm>
           <a:prstGeom prst="rect">
             <a:avLst/>
@@ -1369,7 +1369,7 @@
           </a:ln>
         </p:spPr>
         <p:txBody>
-          <a:bodyPr anchorCtr="0" anchor="b" bIns="45700" lIns="91425" spcFirstLastPara="1" rIns="91425" wrap="square" tIns="45700">
+          <a:bodyPr anchorCtr="0" anchor="b" bIns="60932" lIns="121897" spcFirstLastPara="1" rIns="121897" wrap="square" tIns="60932">
             <a:normAutofit/>
           </a:bodyPr>
           <a:lstStyle>
@@ -1383,10 +1383,10 @@
               <a:buClr>
                 <a:schemeClr val="dk1"/>
               </a:buClr>
-              <a:buSzPts val="1500"/>
+              <a:buSzPts val="2000"/>
               <a:buFont typeface="Calibri"/>
               <a:buNone/>
-              <a:defRPr b="1" sz="1500"/>
+              <a:defRPr b="1" sz="2000"/>
             </a:lvl1pPr>
             <a:lvl2pPr lvl="1">
               <a:spcBef>
@@ -1395,7 +1395,7 @@
               <a:spcAft>
                 <a:spcPts val="0"/>
               </a:spcAft>
-              <a:buSzPts val="1400"/>
+              <a:buSzPts val="1867"/>
               <a:buNone/>
               <a:defRPr/>
             </a:lvl2pPr>
@@ -1406,7 +1406,7 @@
               <a:spcAft>
                 <a:spcPts val="0"/>
               </a:spcAft>
-              <a:buSzPts val="1400"/>
+              <a:buSzPts val="1867"/>
               <a:buNone/>
               <a:defRPr/>
             </a:lvl3pPr>
@@ -1417,7 +1417,7 @@
               <a:spcAft>
                 <a:spcPts val="0"/>
               </a:spcAft>
-              <a:buSzPts val="1400"/>
+              <a:buSzPts val="1867"/>
               <a:buNone/>
               <a:defRPr/>
             </a:lvl4pPr>
@@ -1428,7 +1428,7 @@
               <a:spcAft>
                 <a:spcPts val="0"/>
               </a:spcAft>
-              <a:buSzPts val="1400"/>
+              <a:buSzPts val="1867"/>
               <a:buNone/>
               <a:defRPr/>
             </a:lvl5pPr>
@@ -1439,7 +1439,7 @@
               <a:spcAft>
                 <a:spcPts val="0"/>
               </a:spcAft>
-              <a:buSzPts val="1400"/>
+              <a:buSzPts val="1867"/>
               <a:buNone/>
               <a:defRPr/>
             </a:lvl6pPr>
@@ -1450,7 +1450,7 @@
               <a:spcAft>
                 <a:spcPts val="0"/>
               </a:spcAft>
-              <a:buSzPts val="1400"/>
+              <a:buSzPts val="1867"/>
               <a:buNone/>
               <a:defRPr/>
             </a:lvl7pPr>
@@ -1461,7 +1461,7 @@
               <a:spcAft>
                 <a:spcPts val="0"/>
               </a:spcAft>
-              <a:buSzPts val="1400"/>
+              <a:buSzPts val="1867"/>
               <a:buNone/>
               <a:defRPr/>
             </a:lvl8pPr>
@@ -1472,7 +1472,7 @@
               <a:spcAft>
                 <a:spcPts val="0"/>
               </a:spcAft>
-              <a:buSzPts val="1400"/>
+              <a:buSzPts val="1867"/>
               <a:buNone/>
               <a:defRPr/>
             </a:lvl9pPr>
@@ -1490,8 +1490,8 @@
         </p:nvSpPr>
         <p:spPr>
           <a:xfrm>
-            <a:off x="1344216" y="459581"/>
-            <a:ext cx="4114800" cy="3086100"/>
+            <a:off x="1792243" y="612759"/>
+            <a:ext cx="5486263" cy="4114697"/>
           </a:xfrm>
           <a:prstGeom prst="rect">
             <a:avLst/>
@@ -1512,8 +1512,8 @@
         </p:nvSpPr>
         <p:spPr>
           <a:xfrm>
-            <a:off x="1344216" y="4025503"/>
-            <a:ext cx="4114800" cy="603647"/>
+            <a:off x="1792243" y="5367203"/>
+            <a:ext cx="5486263" cy="804843"/>
           </a:xfrm>
           <a:prstGeom prst="rect">
             <a:avLst/>
@@ -1524,13 +1524,13 @@
           </a:ln>
         </p:spPr>
         <p:txBody>
-          <a:bodyPr anchorCtr="0" anchor="t" bIns="45700" lIns="91425" spcFirstLastPara="1" rIns="91425" wrap="square" tIns="45700">
+          <a:bodyPr anchorCtr="0" anchor="t" bIns="60932" lIns="121897" spcFirstLastPara="1" rIns="121897" wrap="square" tIns="60932">
             <a:normAutofit/>
           </a:bodyPr>
           <a:lstStyle>
             <a:lvl1pPr indent="-228600" lvl="0" marL="457200" algn="l">
               <a:spcBef>
-                <a:spcPts val="210"/>
+                <a:spcPts val="280"/>
               </a:spcBef>
               <a:spcAft>
                 <a:spcPts val="0"/>
@@ -1538,13 +1538,13 @@
               <a:buClr>
                 <a:schemeClr val="dk1"/>
               </a:buClr>
-              <a:buSzPts val="1050"/>
-              <a:buNone/>
-              <a:defRPr sz="1050"/>
+              <a:buSzPts val="1400"/>
+              <a:buNone/>
+              <a:defRPr sz="1400"/>
             </a:lvl1pPr>
             <a:lvl2pPr indent="-228600" lvl="1" marL="914400" algn="l">
               <a:spcBef>
-                <a:spcPts val="180"/>
+                <a:spcPts val="240"/>
               </a:spcBef>
               <a:spcAft>
                 <a:spcPts val="0"/>
@@ -1552,13 +1552,13 @@
               <a:buClr>
                 <a:schemeClr val="dk1"/>
               </a:buClr>
-              <a:buSzPts val="900"/>
-              <a:buNone/>
-              <a:defRPr sz="900"/>
+              <a:buSzPts val="1200"/>
+              <a:buNone/>
+              <a:defRPr sz="1200"/>
             </a:lvl2pPr>
             <a:lvl3pPr indent="-228600" lvl="2" marL="1371600" algn="l">
               <a:spcBef>
-                <a:spcPts val="150"/>
+                <a:spcPts val="200"/>
               </a:spcBef>
               <a:spcAft>
                 <a:spcPts val="0"/>
@@ -1566,13 +1566,13 @@
               <a:buClr>
                 <a:schemeClr val="dk1"/>
               </a:buClr>
-              <a:buSzPts val="750"/>
-              <a:buNone/>
-              <a:defRPr sz="750"/>
+              <a:buSzPts val="1000"/>
+              <a:buNone/>
+              <a:defRPr sz="1000"/>
             </a:lvl3pPr>
             <a:lvl4pPr indent="-228600" lvl="3" marL="1828800" algn="l">
               <a:spcBef>
-                <a:spcPts val="135"/>
+                <a:spcPts val="180"/>
               </a:spcBef>
               <a:spcAft>
                 <a:spcPts val="0"/>
@@ -1580,13 +1580,13 @@
               <a:buClr>
                 <a:schemeClr val="dk1"/>
               </a:buClr>
-              <a:buSzPts val="675"/>
-              <a:buNone/>
-              <a:defRPr sz="675"/>
+              <a:buSzPts val="900"/>
+              <a:buNone/>
+              <a:defRPr sz="900"/>
             </a:lvl4pPr>
             <a:lvl5pPr indent="-228600" lvl="4" marL="2286000" algn="l">
               <a:spcBef>
-                <a:spcPts val="135"/>
+                <a:spcPts val="180"/>
               </a:spcBef>
               <a:spcAft>
                 <a:spcPts val="0"/>
@@ -1594,13 +1594,13 @@
               <a:buClr>
                 <a:schemeClr val="dk1"/>
               </a:buClr>
-              <a:buSzPts val="675"/>
-              <a:buNone/>
-              <a:defRPr sz="675"/>
+              <a:buSzPts val="900"/>
+              <a:buNone/>
+              <a:defRPr sz="900"/>
             </a:lvl5pPr>
             <a:lvl6pPr indent="-228600" lvl="5" marL="2743200" algn="l">
               <a:spcBef>
-                <a:spcPts val="135"/>
+                <a:spcPts val="180"/>
               </a:spcBef>
               <a:spcAft>
                 <a:spcPts val="0"/>
@@ -1608,13 +1608,13 @@
               <a:buClr>
                 <a:schemeClr val="dk1"/>
               </a:buClr>
-              <a:buSzPts val="675"/>
-              <a:buNone/>
-              <a:defRPr sz="675"/>
+              <a:buSzPts val="900"/>
+              <a:buNone/>
+              <a:defRPr sz="900"/>
             </a:lvl6pPr>
             <a:lvl7pPr indent="-228600" lvl="6" marL="3200400" algn="l">
               <a:spcBef>
-                <a:spcPts val="135"/>
+                <a:spcPts val="180"/>
               </a:spcBef>
               <a:spcAft>
                 <a:spcPts val="0"/>
@@ -1622,13 +1622,13 @@
               <a:buClr>
                 <a:schemeClr val="dk1"/>
               </a:buClr>
-              <a:buSzPts val="675"/>
-              <a:buNone/>
-              <a:defRPr sz="675"/>
+              <a:buSzPts val="900"/>
+              <a:buNone/>
+              <a:defRPr sz="900"/>
             </a:lvl7pPr>
             <a:lvl8pPr indent="-228600" lvl="7" marL="3657600" algn="l">
               <a:spcBef>
-                <a:spcPts val="135"/>
+                <a:spcPts val="180"/>
               </a:spcBef>
               <a:spcAft>
                 <a:spcPts val="0"/>
@@ -1636,13 +1636,13 @@
               <a:buClr>
                 <a:schemeClr val="dk1"/>
               </a:buClr>
-              <a:buSzPts val="675"/>
-              <a:buNone/>
-              <a:defRPr sz="675"/>
+              <a:buSzPts val="900"/>
+              <a:buNone/>
+              <a:defRPr sz="900"/>
             </a:lvl8pPr>
             <a:lvl9pPr indent="-228600" lvl="8" marL="4114800" algn="l">
               <a:spcBef>
-                <a:spcPts val="135"/>
+                <a:spcPts val="180"/>
               </a:spcBef>
               <a:spcAft>
                 <a:spcPts val="0"/>
@@ -1650,9 +1650,9 @@
               <a:buClr>
                 <a:schemeClr val="dk1"/>
               </a:buClr>
-              <a:buSzPts val="675"/>
-              <a:buNone/>
-              <a:defRPr sz="675"/>
+              <a:buSzPts val="900"/>
+              <a:buNone/>
+              <a:defRPr sz="900"/>
             </a:lvl9pPr>
           </a:lstStyle>
           <a:p/>
@@ -1668,8 +1668,8 @@
         </p:nvSpPr>
         <p:spPr>
           <a:xfrm>
-            <a:off x="342900" y="4767263"/>
-            <a:ext cx="1600200" cy="273844"/>
+            <a:off x="457189" y="6356192"/>
+            <a:ext cx="2133547" cy="365116"/>
           </a:xfrm>
           <a:prstGeom prst="rect">
             <a:avLst/>
@@ -1680,7 +1680,7 @@
           </a:ln>
         </p:spPr>
         <p:txBody>
-          <a:bodyPr anchorCtr="0" anchor="ctr" bIns="45700" lIns="91425" spcFirstLastPara="1" rIns="91425" wrap="square" tIns="45700">
+          <a:bodyPr anchorCtr="0" anchor="ctr" bIns="60932" lIns="121897" spcFirstLastPara="1" rIns="121897" wrap="square" tIns="60932">
             <a:noAutofit/>
           </a:bodyPr>
           <a:lstStyle>
@@ -1697,7 +1697,7 @@
               <a:buClr>
                 <a:srgbClr val="888888"/>
               </a:buClr>
-              <a:buSzPts val="1800"/>
+              <a:buSzPts val="2400"/>
               <a:buNone/>
               <a:defRPr/>
             </a:lvl1pPr>
@@ -1714,7 +1714,7 @@
               <a:buClr>
                 <a:schemeClr val="accent2"/>
               </a:buClr>
-              <a:buSzPts val="1800"/>
+              <a:buSzPts val="2400"/>
               <a:buNone/>
               <a:defRPr/>
             </a:lvl2pPr>
@@ -1731,7 +1731,7 @@
               <a:buClr>
                 <a:schemeClr val="accent2"/>
               </a:buClr>
-              <a:buSzPts val="1800"/>
+              <a:buSzPts val="2400"/>
               <a:buNone/>
               <a:defRPr/>
             </a:lvl3pPr>
@@ -1748,7 +1748,7 @@
               <a:buClr>
                 <a:schemeClr val="accent2"/>
               </a:buClr>
-              <a:buSzPts val="1800"/>
+              <a:buSzPts val="2400"/>
               <a:buNone/>
               <a:defRPr/>
             </a:lvl4pPr>
@@ -1765,7 +1765,7 @@
               <a:buClr>
                 <a:schemeClr val="accent2"/>
               </a:buClr>
-              <a:buSzPts val="1800"/>
+              <a:buSzPts val="2400"/>
               <a:buNone/>
               <a:defRPr/>
             </a:lvl5pPr>
@@ -1782,7 +1782,7 @@
               <a:buClr>
                 <a:schemeClr val="accent2"/>
               </a:buClr>
-              <a:buSzPts val="1800"/>
+              <a:buSzPts val="2400"/>
               <a:buNone/>
               <a:defRPr/>
             </a:lvl6pPr>
@@ -1799,7 +1799,7 @@
               <a:buClr>
                 <a:schemeClr val="accent2"/>
               </a:buClr>
-              <a:buSzPts val="1800"/>
+              <a:buSzPts val="2400"/>
               <a:buNone/>
               <a:defRPr/>
             </a:lvl7pPr>
@@ -1816,7 +1816,7 @@
               <a:buClr>
                 <a:schemeClr val="accent2"/>
               </a:buClr>
-              <a:buSzPts val="1800"/>
+              <a:buSzPts val="2400"/>
               <a:buNone/>
               <a:defRPr/>
             </a:lvl8pPr>
@@ -1833,7 +1833,7 @@
               <a:buClr>
                 <a:schemeClr val="accent2"/>
               </a:buClr>
-              <a:buSzPts val="1800"/>
+              <a:buSzPts val="2400"/>
               <a:buNone/>
               <a:defRPr/>
             </a:lvl9pPr>
@@ -1851,8 +1851,8 @@
         </p:nvSpPr>
         <p:spPr>
           <a:xfrm>
-            <a:off x="2343150" y="4767263"/>
-            <a:ext cx="2171700" cy="273844"/>
+            <a:off x="3124122" y="6356192"/>
+            <a:ext cx="2895528" cy="365116"/>
           </a:xfrm>
           <a:prstGeom prst="rect">
             <a:avLst/>
@@ -1863,7 +1863,7 @@
           </a:ln>
         </p:spPr>
         <p:txBody>
-          <a:bodyPr anchorCtr="0" anchor="ctr" bIns="45700" lIns="91425" spcFirstLastPara="1" rIns="91425" wrap="square" tIns="45700">
+          <a:bodyPr anchorCtr="0" anchor="ctr" bIns="60932" lIns="121897" spcFirstLastPara="1" rIns="121897" wrap="square" tIns="60932">
             <a:noAutofit/>
           </a:bodyPr>
           <a:lstStyle>
@@ -1880,7 +1880,7 @@
               <a:buClr>
                 <a:srgbClr val="888888"/>
               </a:buClr>
-              <a:buSzPts val="1800"/>
+              <a:buSzPts val="2400"/>
               <a:buNone/>
               <a:defRPr/>
             </a:lvl1pPr>
@@ -1897,7 +1897,7 @@
               <a:buClr>
                 <a:schemeClr val="accent2"/>
               </a:buClr>
-              <a:buSzPts val="1800"/>
+              <a:buSzPts val="2400"/>
               <a:buNone/>
               <a:defRPr/>
             </a:lvl2pPr>
@@ -1914,7 +1914,7 @@
               <a:buClr>
                 <a:schemeClr val="accent2"/>
               </a:buClr>
-              <a:buSzPts val="1800"/>
+              <a:buSzPts val="2400"/>
               <a:buNone/>
               <a:defRPr/>
             </a:lvl3pPr>
@@ -1931,7 +1931,7 @@
               <a:buClr>
                 <a:schemeClr val="accent2"/>
               </a:buClr>
-              <a:buSzPts val="1800"/>
+              <a:buSzPts val="2400"/>
               <a:buNone/>
               <a:defRPr/>
             </a:lvl4pPr>
@@ -1948,7 +1948,7 @@
               <a:buClr>
                 <a:schemeClr val="accent2"/>
               </a:buClr>
-              <a:buSzPts val="1800"/>
+              <a:buSzPts val="2400"/>
               <a:buNone/>
               <a:defRPr/>
             </a:lvl5pPr>
@@ -1965,7 +1965,7 @@
               <a:buClr>
                 <a:schemeClr val="accent2"/>
               </a:buClr>
-              <a:buSzPts val="1800"/>
+              <a:buSzPts val="2400"/>
               <a:buNone/>
               <a:defRPr/>
             </a:lvl6pPr>
@@ -1982,7 +1982,7 @@
               <a:buClr>
                 <a:schemeClr val="accent2"/>
               </a:buClr>
-              <a:buSzPts val="1800"/>
+              <a:buSzPts val="2400"/>
               <a:buNone/>
               <a:defRPr/>
             </a:lvl7pPr>
@@ -1999,7 +1999,7 @@
               <a:buClr>
                 <a:schemeClr val="accent2"/>
               </a:buClr>
-              <a:buSzPts val="1800"/>
+              <a:buSzPts val="2400"/>
               <a:buNone/>
               <a:defRPr/>
             </a:lvl8pPr>
@@ -2016,7 +2016,7 @@
               <a:buClr>
                 <a:schemeClr val="accent2"/>
               </a:buClr>
-              <a:buSzPts val="1800"/>
+              <a:buSzPts val="2400"/>
               <a:buNone/>
               <a:defRPr/>
             </a:lvl9pPr>
@@ -2034,8 +2034,8 @@
         </p:nvSpPr>
         <p:spPr>
           <a:xfrm>
-            <a:off x="4914900" y="4767263"/>
-            <a:ext cx="1600200" cy="273844"/>
+            <a:off x="6553036" y="6356192"/>
+            <a:ext cx="2133547" cy="365116"/>
           </a:xfrm>
           <a:prstGeom prst="rect">
             <a:avLst/>
@@ -2046,7 +2046,7 @@
           </a:ln>
         </p:spPr>
         <p:txBody>
-          <a:bodyPr anchorCtr="0" anchor="ctr" bIns="45700" lIns="91425" spcFirstLastPara="1" rIns="91425" wrap="square" tIns="45700">
+          <a:bodyPr anchorCtr="0" anchor="ctr" bIns="60932" lIns="121897" spcFirstLastPara="1" rIns="121897" wrap="square" tIns="60932">
             <a:noAutofit/>
           </a:bodyPr>
           <a:lstStyle>
@@ -2063,7 +2063,7 @@
               <a:buClr>
                 <a:srgbClr val="888888"/>
               </a:buClr>
-              <a:buSzPts val="900"/>
+              <a:buSzPts val="1200"/>
               <a:buFont typeface="Calibri"/>
               <a:buNone/>
               <a:defRPr/>
@@ -2081,7 +2081,7 @@
               <a:buClr>
                 <a:srgbClr val="888888"/>
               </a:buClr>
-              <a:buSzPts val="900"/>
+              <a:buSzPts val="1200"/>
               <a:buFont typeface="Calibri"/>
               <a:buNone/>
               <a:defRPr/>
@@ -2099,7 +2099,7 @@
               <a:buClr>
                 <a:srgbClr val="888888"/>
               </a:buClr>
-              <a:buSzPts val="900"/>
+              <a:buSzPts val="1200"/>
               <a:buFont typeface="Calibri"/>
               <a:buNone/>
               <a:defRPr/>
@@ -2117,7 +2117,7 @@
               <a:buClr>
                 <a:srgbClr val="888888"/>
               </a:buClr>
-              <a:buSzPts val="900"/>
+              <a:buSzPts val="1200"/>
               <a:buFont typeface="Calibri"/>
               <a:buNone/>
               <a:defRPr/>
@@ -2135,7 +2135,7 @@
               <a:buClr>
                 <a:srgbClr val="888888"/>
               </a:buClr>
-              <a:buSzPts val="900"/>
+              <a:buSzPts val="1200"/>
               <a:buFont typeface="Calibri"/>
               <a:buNone/>
               <a:defRPr/>
@@ -2153,7 +2153,7 @@
               <a:buClr>
                 <a:srgbClr val="888888"/>
               </a:buClr>
-              <a:buSzPts val="900"/>
+              <a:buSzPts val="1200"/>
               <a:buFont typeface="Calibri"/>
               <a:buNone/>
               <a:defRPr/>
@@ -2171,7 +2171,7 @@
               <a:buClr>
                 <a:srgbClr val="888888"/>
               </a:buClr>
-              <a:buSzPts val="900"/>
+              <a:buSzPts val="1200"/>
               <a:buFont typeface="Calibri"/>
               <a:buNone/>
               <a:defRPr/>
@@ -2189,7 +2189,7 @@
               <a:buClr>
                 <a:srgbClr val="888888"/>
               </a:buClr>
-              <a:buSzPts val="900"/>
+              <a:buSzPts val="1200"/>
               <a:buFont typeface="Calibri"/>
               <a:buNone/>
               <a:defRPr/>
@@ -2207,7 +2207,7 @@
               <a:buClr>
                 <a:srgbClr val="888888"/>
               </a:buClr>
-              <a:buSzPts val="900"/>
+              <a:buSzPts val="1200"/>
               <a:buFont typeface="Calibri"/>
               <a:buNone/>
               <a:defRPr/>
@@ -2266,8 +2266,8 @@
         </p:nvSpPr>
         <p:spPr>
           <a:xfrm>
-            <a:off x="342900" y="205978"/>
-            <a:ext cx="6172200" cy="857250"/>
+            <a:off x="457189" y="274630"/>
+            <a:ext cx="8229394" cy="1142971"/>
           </a:xfrm>
           <a:prstGeom prst="rect">
             <a:avLst/>
@@ -2278,7 +2278,7 @@
           </a:ln>
         </p:spPr>
         <p:txBody>
-          <a:bodyPr anchorCtr="0" anchor="ctr" bIns="45700" lIns="91425" spcFirstLastPara="1" rIns="91425" wrap="square" tIns="45700">
+          <a:bodyPr anchorCtr="0" anchor="ctr" bIns="60932" lIns="121897" spcFirstLastPara="1" rIns="121897" wrap="square" tIns="60932">
             <a:normAutofit/>
           </a:bodyPr>
           <a:lstStyle>
@@ -2292,7 +2292,7 @@
               <a:buClr>
                 <a:schemeClr val="dk1"/>
               </a:buClr>
-              <a:buSzPts val="1800"/>
+              <a:buSzPts val="2400"/>
               <a:buNone/>
               <a:defRPr/>
             </a:lvl1pPr>
@@ -2303,7 +2303,7 @@
               <a:spcAft>
                 <a:spcPts val="0"/>
               </a:spcAft>
-              <a:buSzPts val="1400"/>
+              <a:buSzPts val="1867"/>
               <a:buNone/>
               <a:defRPr/>
             </a:lvl2pPr>
@@ -2314,7 +2314,7 @@
               <a:spcAft>
                 <a:spcPts val="0"/>
               </a:spcAft>
-              <a:buSzPts val="1400"/>
+              <a:buSzPts val="1867"/>
               <a:buNone/>
               <a:defRPr/>
             </a:lvl3pPr>
@@ -2325,7 +2325,7 @@
               <a:spcAft>
                 <a:spcPts val="0"/>
               </a:spcAft>
-              <a:buSzPts val="1400"/>
+              <a:buSzPts val="1867"/>
               <a:buNone/>
               <a:defRPr/>
             </a:lvl4pPr>
@@ -2336,7 +2336,7 @@
               <a:spcAft>
                 <a:spcPts val="0"/>
               </a:spcAft>
-              <a:buSzPts val="1400"/>
+              <a:buSzPts val="1867"/>
               <a:buNone/>
               <a:defRPr/>
             </a:lvl5pPr>
@@ -2347,7 +2347,7 @@
               <a:spcAft>
                 <a:spcPts val="0"/>
               </a:spcAft>
-              <a:buSzPts val="1400"/>
+              <a:buSzPts val="1867"/>
               <a:buNone/>
               <a:defRPr/>
             </a:lvl6pPr>
@@ -2358,7 +2358,7 @@
               <a:spcAft>
                 <a:spcPts val="0"/>
               </a:spcAft>
-              <a:buSzPts val="1400"/>
+              <a:buSzPts val="1867"/>
               <a:buNone/>
               <a:defRPr/>
             </a:lvl7pPr>
@@ -2369,7 +2369,7 @@
               <a:spcAft>
                 <a:spcPts val="0"/>
               </a:spcAft>
-              <a:buSzPts val="1400"/>
+              <a:buSzPts val="1867"/>
               <a:buNone/>
               <a:defRPr/>
             </a:lvl8pPr>
@@ -2380,7 +2380,7 @@
               <a:spcAft>
                 <a:spcPts val="0"/>
               </a:spcAft>
-              <a:buSzPts val="1400"/>
+              <a:buSzPts val="1867"/>
               <a:buNone/>
               <a:defRPr/>
             </a:lvl9pPr>
@@ -2398,8 +2398,8 @@
         </p:nvSpPr>
         <p:spPr>
           <a:xfrm rot="5400000">
-            <a:off x="1731764" y="-188713"/>
-            <a:ext cx="3394472" cy="6172200"/>
+            <a:off x="2308961" y="-251611"/>
+            <a:ext cx="4525849" cy="8229394"/>
           </a:xfrm>
           <a:prstGeom prst="rect">
             <a:avLst/>
@@ -2410,13 +2410,13 @@
           </a:ln>
         </p:spPr>
         <p:txBody>
-          <a:bodyPr anchorCtr="0" anchor="t" bIns="45700" lIns="91425" spcFirstLastPara="1" rIns="91425" wrap="square" tIns="45700">
+          <a:bodyPr anchorCtr="0" anchor="t" bIns="60932" lIns="121897" spcFirstLastPara="1" rIns="121897" wrap="square" tIns="60932">
             <a:normAutofit/>
           </a:bodyPr>
           <a:lstStyle>
             <a:lvl1pPr indent="-342900" lvl="0" marL="457200" algn="l">
               <a:spcBef>
-                <a:spcPts val="360"/>
+                <a:spcPts val="480"/>
               </a:spcBef>
               <a:spcAft>
                 <a:spcPts val="0"/>
@@ -2424,13 +2424,13 @@
               <a:buClr>
                 <a:schemeClr val="dk1"/>
               </a:buClr>
-              <a:buSzPts val="1800"/>
+              <a:buSzPts val="2400"/>
               <a:buChar char="•"/>
               <a:defRPr/>
             </a:lvl1pPr>
             <a:lvl2pPr indent="-342900" lvl="1" marL="914400" algn="l">
               <a:spcBef>
-                <a:spcPts val="360"/>
+                <a:spcPts val="480"/>
               </a:spcBef>
               <a:spcAft>
                 <a:spcPts val="0"/>
@@ -2438,13 +2438,13 @@
               <a:buClr>
                 <a:schemeClr val="dk1"/>
               </a:buClr>
-              <a:buSzPts val="1800"/>
+              <a:buSzPts val="2400"/>
               <a:buChar char="–"/>
               <a:defRPr/>
             </a:lvl2pPr>
             <a:lvl3pPr indent="-342900" lvl="2" marL="1371600" algn="l">
               <a:spcBef>
-                <a:spcPts val="360"/>
+                <a:spcPts val="480"/>
               </a:spcBef>
               <a:spcAft>
                 <a:spcPts val="0"/>
@@ -2452,13 +2452,13 @@
               <a:buClr>
                 <a:schemeClr val="dk1"/>
               </a:buClr>
-              <a:buSzPts val="1800"/>
+              <a:buSzPts val="2400"/>
               <a:buChar char="•"/>
               <a:defRPr/>
             </a:lvl3pPr>
             <a:lvl4pPr indent="-342900" lvl="3" marL="1828800" algn="l">
               <a:spcBef>
-                <a:spcPts val="360"/>
+                <a:spcPts val="480"/>
               </a:spcBef>
               <a:spcAft>
                 <a:spcPts val="0"/>
@@ -2466,13 +2466,13 @@
               <a:buClr>
                 <a:schemeClr val="dk1"/>
               </a:buClr>
-              <a:buSzPts val="1800"/>
+              <a:buSzPts val="2400"/>
               <a:buChar char="–"/>
               <a:defRPr/>
             </a:lvl4pPr>
             <a:lvl5pPr indent="-342900" lvl="4" marL="2286000" algn="l">
               <a:spcBef>
-                <a:spcPts val="360"/>
+                <a:spcPts val="480"/>
               </a:spcBef>
               <a:spcAft>
                 <a:spcPts val="0"/>
@@ -2480,13 +2480,13 @@
               <a:buClr>
                 <a:schemeClr val="dk1"/>
               </a:buClr>
-              <a:buSzPts val="1800"/>
+              <a:buSzPts val="2400"/>
               <a:buChar char="»"/>
               <a:defRPr/>
             </a:lvl5pPr>
             <a:lvl6pPr indent="-342900" lvl="5" marL="2743200" algn="l">
               <a:spcBef>
-                <a:spcPts val="360"/>
+                <a:spcPts val="480"/>
               </a:spcBef>
               <a:spcAft>
                 <a:spcPts val="0"/>
@@ -2494,13 +2494,13 @@
               <a:buClr>
                 <a:schemeClr val="dk1"/>
               </a:buClr>
-              <a:buSzPts val="1800"/>
+              <a:buSzPts val="2400"/>
               <a:buChar char="•"/>
               <a:defRPr/>
             </a:lvl6pPr>
             <a:lvl7pPr indent="-342900" lvl="6" marL="3200400" algn="l">
               <a:spcBef>
-                <a:spcPts val="360"/>
+                <a:spcPts val="480"/>
               </a:spcBef>
               <a:spcAft>
                 <a:spcPts val="0"/>
@@ -2508,13 +2508,13 @@
               <a:buClr>
                 <a:schemeClr val="dk1"/>
               </a:buClr>
-              <a:buSzPts val="1800"/>
+              <a:buSzPts val="2400"/>
               <a:buChar char="•"/>
               <a:defRPr/>
             </a:lvl7pPr>
             <a:lvl8pPr indent="-342900" lvl="7" marL="3657600" algn="l">
               <a:spcBef>
-                <a:spcPts val="360"/>
+                <a:spcPts val="480"/>
               </a:spcBef>
               <a:spcAft>
                 <a:spcPts val="0"/>
@@ -2522,13 +2522,13 @@
               <a:buClr>
                 <a:schemeClr val="dk1"/>
               </a:buClr>
-              <a:buSzPts val="1800"/>
+              <a:buSzPts val="2400"/>
               <a:buChar char="•"/>
               <a:defRPr/>
             </a:lvl8pPr>
             <a:lvl9pPr indent="-342900" lvl="8" marL="4114800" algn="l">
               <a:spcBef>
-                <a:spcPts val="360"/>
+                <a:spcPts val="480"/>
               </a:spcBef>
               <a:spcAft>
                 <a:spcPts val="0"/>
@@ -2536,7 +2536,7 @@
               <a:buClr>
                 <a:schemeClr val="dk1"/>
               </a:buClr>
-              <a:buSzPts val="1800"/>
+              <a:buSzPts val="2400"/>
               <a:buChar char="•"/>
               <a:defRPr/>
             </a:lvl9pPr>
@@ -2554,8 +2554,8 @@
         </p:nvSpPr>
         <p:spPr>
           <a:xfrm>
-            <a:off x="342900" y="4767263"/>
-            <a:ext cx="1600200" cy="273844"/>
+            <a:off x="457189" y="6356192"/>
+            <a:ext cx="2133547" cy="365116"/>
           </a:xfrm>
           <a:prstGeom prst="rect">
             <a:avLst/>
@@ -2566,7 +2566,7 @@
           </a:ln>
         </p:spPr>
         <p:txBody>
-          <a:bodyPr anchorCtr="0" anchor="ctr" bIns="45700" lIns="91425" spcFirstLastPara="1" rIns="91425" wrap="square" tIns="45700">
+          <a:bodyPr anchorCtr="0" anchor="ctr" bIns="60932" lIns="121897" spcFirstLastPara="1" rIns="121897" wrap="square" tIns="60932">
             <a:noAutofit/>
           </a:bodyPr>
           <a:lstStyle>
@@ -2583,7 +2583,7 @@
               <a:buClr>
                 <a:srgbClr val="888888"/>
               </a:buClr>
-              <a:buSzPts val="1800"/>
+              <a:buSzPts val="2400"/>
               <a:buNone/>
               <a:defRPr/>
             </a:lvl1pPr>
@@ -2600,7 +2600,7 @@
               <a:buClr>
                 <a:schemeClr val="accent2"/>
               </a:buClr>
-              <a:buSzPts val="1800"/>
+              <a:buSzPts val="2400"/>
               <a:buNone/>
               <a:defRPr/>
             </a:lvl2pPr>
@@ -2617,7 +2617,7 @@
               <a:buClr>
                 <a:schemeClr val="accent2"/>
               </a:buClr>
-              <a:buSzPts val="1800"/>
+              <a:buSzPts val="2400"/>
               <a:buNone/>
               <a:defRPr/>
             </a:lvl3pPr>
@@ -2634,7 +2634,7 @@
               <a:buClr>
                 <a:schemeClr val="accent2"/>
               </a:buClr>
-              <a:buSzPts val="1800"/>
+              <a:buSzPts val="2400"/>
               <a:buNone/>
               <a:defRPr/>
             </a:lvl4pPr>
@@ -2651,7 +2651,7 @@
               <a:buClr>
                 <a:schemeClr val="accent2"/>
               </a:buClr>
-              <a:buSzPts val="1800"/>
+              <a:buSzPts val="2400"/>
               <a:buNone/>
               <a:defRPr/>
             </a:lvl5pPr>
@@ -2668,7 +2668,7 @@
               <a:buClr>
                 <a:schemeClr val="accent2"/>
               </a:buClr>
-              <a:buSzPts val="1800"/>
+              <a:buSzPts val="2400"/>
               <a:buNone/>
               <a:defRPr/>
             </a:lvl6pPr>
@@ -2685,7 +2685,7 @@
               <a:buClr>
                 <a:schemeClr val="accent2"/>
               </a:buClr>
-              <a:buSzPts val="1800"/>
+              <a:buSzPts val="2400"/>
               <a:buNone/>
               <a:defRPr/>
             </a:lvl7pPr>
@@ -2702,7 +2702,7 @@
               <a:buClr>
                 <a:schemeClr val="accent2"/>
               </a:buClr>
-              <a:buSzPts val="1800"/>
+              <a:buSzPts val="2400"/>
               <a:buNone/>
               <a:defRPr/>
             </a:lvl8pPr>
@@ -2719,7 +2719,7 @@
               <a:buClr>
                 <a:schemeClr val="accent2"/>
               </a:buClr>
-              <a:buSzPts val="1800"/>
+              <a:buSzPts val="2400"/>
               <a:buNone/>
               <a:defRPr/>
             </a:lvl9pPr>
@@ -2737,8 +2737,8 @@
         </p:nvSpPr>
         <p:spPr>
           <a:xfrm>
-            <a:off x="2343150" y="4767263"/>
-            <a:ext cx="2171700" cy="273844"/>
+            <a:off x="3124122" y="6356192"/>
+            <a:ext cx="2895528" cy="365116"/>
           </a:xfrm>
           <a:prstGeom prst="rect">
             <a:avLst/>
@@ -2749,7 +2749,7 @@
           </a:ln>
         </p:spPr>
         <p:txBody>
-          <a:bodyPr anchorCtr="0" anchor="ctr" bIns="45700" lIns="91425" spcFirstLastPara="1" rIns="91425" wrap="square" tIns="45700">
+          <a:bodyPr anchorCtr="0" anchor="ctr" bIns="60932" lIns="121897" spcFirstLastPara="1" rIns="121897" wrap="square" tIns="60932">
             <a:noAutofit/>
           </a:bodyPr>
           <a:lstStyle>
@@ -2766,7 +2766,7 @@
               <a:buClr>
                 <a:srgbClr val="888888"/>
               </a:buClr>
-              <a:buSzPts val="1800"/>
+              <a:buSzPts val="2400"/>
               <a:buNone/>
               <a:defRPr/>
             </a:lvl1pPr>
@@ -2783,7 +2783,7 @@
               <a:buClr>
                 <a:schemeClr val="accent2"/>
               </a:buClr>
-              <a:buSzPts val="1800"/>
+              <a:buSzPts val="2400"/>
               <a:buNone/>
               <a:defRPr/>
             </a:lvl2pPr>
@@ -2800,7 +2800,7 @@
               <a:buClr>
                 <a:schemeClr val="accent2"/>
               </a:buClr>
-              <a:buSzPts val="1800"/>
+              <a:buSzPts val="2400"/>
               <a:buNone/>
               <a:defRPr/>
             </a:lvl3pPr>
@@ -2817,7 +2817,7 @@
               <a:buClr>
                 <a:schemeClr val="accent2"/>
               </a:buClr>
-              <a:buSzPts val="1800"/>
+              <a:buSzPts val="2400"/>
               <a:buNone/>
               <a:defRPr/>
             </a:lvl4pPr>
@@ -2834,7 +2834,7 @@
               <a:buClr>
                 <a:schemeClr val="accent2"/>
               </a:buClr>
-              <a:buSzPts val="1800"/>
+              <a:buSzPts val="2400"/>
               <a:buNone/>
               <a:defRPr/>
             </a:lvl5pPr>
@@ -2851,7 +2851,7 @@
               <a:buClr>
                 <a:schemeClr val="accent2"/>
               </a:buClr>
-              <a:buSzPts val="1800"/>
+              <a:buSzPts val="2400"/>
               <a:buNone/>
               <a:defRPr/>
             </a:lvl6pPr>
@@ -2868,7 +2868,7 @@
               <a:buClr>
                 <a:schemeClr val="accent2"/>
               </a:buClr>
-              <a:buSzPts val="1800"/>
+              <a:buSzPts val="2400"/>
               <a:buNone/>
               <a:defRPr/>
             </a:lvl7pPr>
@@ -2885,7 +2885,7 @@
               <a:buClr>
                 <a:schemeClr val="accent2"/>
               </a:buClr>
-              <a:buSzPts val="1800"/>
+              <a:buSzPts val="2400"/>
               <a:buNone/>
               <a:defRPr/>
             </a:lvl8pPr>
@@ -2902,7 +2902,7 @@
               <a:buClr>
                 <a:schemeClr val="accent2"/>
               </a:buClr>
-              <a:buSzPts val="1800"/>
+              <a:buSzPts val="2400"/>
               <a:buNone/>
               <a:defRPr/>
             </a:lvl9pPr>
@@ -2920,8 +2920,8 @@
         </p:nvSpPr>
         <p:spPr>
           <a:xfrm>
-            <a:off x="4914900" y="4767263"/>
-            <a:ext cx="1600200" cy="273844"/>
+            <a:off x="6553036" y="6356192"/>
+            <a:ext cx="2133547" cy="365116"/>
           </a:xfrm>
           <a:prstGeom prst="rect">
             <a:avLst/>
@@ -2932,7 +2932,7 @@
           </a:ln>
         </p:spPr>
         <p:txBody>
-          <a:bodyPr anchorCtr="0" anchor="ctr" bIns="45700" lIns="91425" spcFirstLastPara="1" rIns="91425" wrap="square" tIns="45700">
+          <a:bodyPr anchorCtr="0" anchor="ctr" bIns="60932" lIns="121897" spcFirstLastPara="1" rIns="121897" wrap="square" tIns="60932">
             <a:noAutofit/>
           </a:bodyPr>
           <a:lstStyle>
@@ -2949,7 +2949,7 @@
               <a:buClr>
                 <a:srgbClr val="888888"/>
               </a:buClr>
-              <a:buSzPts val="900"/>
+              <a:buSzPts val="1200"/>
               <a:buFont typeface="Calibri"/>
               <a:buNone/>
               <a:defRPr/>
@@ -2967,7 +2967,7 @@
               <a:buClr>
                 <a:srgbClr val="888888"/>
               </a:buClr>
-              <a:buSzPts val="900"/>
+              <a:buSzPts val="1200"/>
               <a:buFont typeface="Calibri"/>
               <a:buNone/>
               <a:defRPr/>
@@ -2985,7 +2985,7 @@
               <a:buClr>
                 <a:srgbClr val="888888"/>
               </a:buClr>
-              <a:buSzPts val="900"/>
+              <a:buSzPts val="1200"/>
               <a:buFont typeface="Calibri"/>
               <a:buNone/>
               <a:defRPr/>
@@ -3003,7 +3003,7 @@
               <a:buClr>
                 <a:srgbClr val="888888"/>
               </a:buClr>
-              <a:buSzPts val="900"/>
+              <a:buSzPts val="1200"/>
               <a:buFont typeface="Calibri"/>
               <a:buNone/>
               <a:defRPr/>
@@ -3021,7 +3021,7 @@
               <a:buClr>
                 <a:srgbClr val="888888"/>
               </a:buClr>
-              <a:buSzPts val="900"/>
+              <a:buSzPts val="1200"/>
               <a:buFont typeface="Calibri"/>
               <a:buNone/>
               <a:defRPr/>
@@ -3039,7 +3039,7 @@
               <a:buClr>
                 <a:srgbClr val="888888"/>
               </a:buClr>
-              <a:buSzPts val="900"/>
+              <a:buSzPts val="1200"/>
               <a:buFont typeface="Calibri"/>
               <a:buNone/>
               <a:defRPr/>
@@ -3057,7 +3057,7 @@
               <a:buClr>
                 <a:srgbClr val="888888"/>
               </a:buClr>
-              <a:buSzPts val="900"/>
+              <a:buSzPts val="1200"/>
               <a:buFont typeface="Calibri"/>
               <a:buNone/>
               <a:defRPr/>
@@ -3075,7 +3075,7 @@
               <a:buClr>
                 <a:srgbClr val="888888"/>
               </a:buClr>
-              <a:buSzPts val="900"/>
+              <a:buSzPts val="1200"/>
               <a:buFont typeface="Calibri"/>
               <a:buNone/>
               <a:defRPr/>
@@ -3093,7 +3093,7 @@
               <a:buClr>
                 <a:srgbClr val="888888"/>
               </a:buClr>
-              <a:buSzPts val="900"/>
+              <a:buSzPts val="1200"/>
               <a:buFont typeface="Calibri"/>
               <a:buNone/>
               <a:defRPr/>
@@ -3152,8 +3152,8 @@
         </p:nvSpPr>
         <p:spPr>
           <a:xfrm rot="5400000">
-            <a:off x="3549253" y="1628776"/>
-            <a:ext cx="4388644" cy="1543050"/>
+            <a:off x="4732219" y="2171647"/>
+            <a:ext cx="5851379" cy="2057349"/>
           </a:xfrm>
           <a:prstGeom prst="rect">
             <a:avLst/>
@@ -3164,7 +3164,7 @@
           </a:ln>
         </p:spPr>
         <p:txBody>
-          <a:bodyPr anchorCtr="0" anchor="ctr" bIns="45700" lIns="91425" spcFirstLastPara="1" rIns="91425" wrap="square" tIns="45700">
+          <a:bodyPr anchorCtr="0" anchor="ctr" bIns="60932" lIns="121897" spcFirstLastPara="1" rIns="121897" wrap="square" tIns="60932">
             <a:normAutofit/>
           </a:bodyPr>
           <a:lstStyle>
@@ -3178,7 +3178,7 @@
               <a:buClr>
                 <a:schemeClr val="dk1"/>
               </a:buClr>
-              <a:buSzPts val="1800"/>
+              <a:buSzPts val="2400"/>
               <a:buNone/>
               <a:defRPr/>
             </a:lvl1pPr>
@@ -3189,7 +3189,7 @@
               <a:spcAft>
                 <a:spcPts val="0"/>
               </a:spcAft>
-              <a:buSzPts val="1400"/>
+              <a:buSzPts val="1867"/>
               <a:buNone/>
               <a:defRPr/>
             </a:lvl2pPr>
@@ -3200,7 +3200,7 @@
               <a:spcAft>
                 <a:spcPts val="0"/>
               </a:spcAft>
-              <a:buSzPts val="1400"/>
+              <a:buSzPts val="1867"/>
               <a:buNone/>
               <a:defRPr/>
             </a:lvl3pPr>
@@ -3211,7 +3211,7 @@
               <a:spcAft>
                 <a:spcPts val="0"/>
               </a:spcAft>
-              <a:buSzPts val="1400"/>
+              <a:buSzPts val="1867"/>
               <a:buNone/>
               <a:defRPr/>
             </a:lvl4pPr>
@@ -3222,7 +3222,7 @@
               <a:spcAft>
                 <a:spcPts val="0"/>
               </a:spcAft>
-              <a:buSzPts val="1400"/>
+              <a:buSzPts val="1867"/>
               <a:buNone/>
               <a:defRPr/>
             </a:lvl5pPr>
@@ -3233,7 +3233,7 @@
               <a:spcAft>
                 <a:spcPts val="0"/>
               </a:spcAft>
-              <a:buSzPts val="1400"/>
+              <a:buSzPts val="1867"/>
               <a:buNone/>
               <a:defRPr/>
             </a:lvl6pPr>
@@ -3244,7 +3244,7 @@
               <a:spcAft>
                 <a:spcPts val="0"/>
               </a:spcAft>
-              <a:buSzPts val="1400"/>
+              <a:buSzPts val="1867"/>
               <a:buNone/>
               <a:defRPr/>
             </a:lvl7pPr>
@@ -3255,7 +3255,7 @@
               <a:spcAft>
                 <a:spcPts val="0"/>
               </a:spcAft>
-              <a:buSzPts val="1400"/>
+              <a:buSzPts val="1867"/>
               <a:buNone/>
               <a:defRPr/>
             </a:lvl8pPr>
@@ -3266,7 +3266,7 @@
               <a:spcAft>
                 <a:spcPts val="0"/>
               </a:spcAft>
-              <a:buSzPts val="1400"/>
+              <a:buSzPts val="1867"/>
               <a:buNone/>
               <a:defRPr/>
             </a:lvl9pPr>
@@ -3284,8 +3284,8 @@
         </p:nvSpPr>
         <p:spPr>
           <a:xfrm rot="5400000">
-            <a:off x="406003" y="142876"/>
-            <a:ext cx="4388644" cy="4514850"/>
+            <a:off x="541324" y="190497"/>
+            <a:ext cx="5851379" cy="6019649"/>
           </a:xfrm>
           <a:prstGeom prst="rect">
             <a:avLst/>
@@ -3296,13 +3296,13 @@
           </a:ln>
         </p:spPr>
         <p:txBody>
-          <a:bodyPr anchorCtr="0" anchor="t" bIns="45700" lIns="91425" spcFirstLastPara="1" rIns="91425" wrap="square" tIns="45700">
+          <a:bodyPr anchorCtr="0" anchor="t" bIns="60932" lIns="121897" spcFirstLastPara="1" rIns="121897" wrap="square" tIns="60932">
             <a:normAutofit/>
           </a:bodyPr>
           <a:lstStyle>
             <a:lvl1pPr indent="-342900" lvl="0" marL="457200" algn="l">
               <a:spcBef>
-                <a:spcPts val="360"/>
+                <a:spcPts val="480"/>
               </a:spcBef>
               <a:spcAft>
                 <a:spcPts val="0"/>
@@ -3310,13 +3310,13 @@
               <a:buClr>
                 <a:schemeClr val="dk1"/>
               </a:buClr>
-              <a:buSzPts val="1800"/>
+              <a:buSzPts val="2400"/>
               <a:buChar char="•"/>
               <a:defRPr/>
             </a:lvl1pPr>
             <a:lvl2pPr indent="-342900" lvl="1" marL="914400" algn="l">
               <a:spcBef>
-                <a:spcPts val="360"/>
+                <a:spcPts val="480"/>
               </a:spcBef>
               <a:spcAft>
                 <a:spcPts val="0"/>
@@ -3324,13 +3324,13 @@
               <a:buClr>
                 <a:schemeClr val="dk1"/>
               </a:buClr>
-              <a:buSzPts val="1800"/>
+              <a:buSzPts val="2400"/>
               <a:buChar char="–"/>
               <a:defRPr/>
             </a:lvl2pPr>
             <a:lvl3pPr indent="-342900" lvl="2" marL="1371600" algn="l">
               <a:spcBef>
-                <a:spcPts val="360"/>
+                <a:spcPts val="480"/>
               </a:spcBef>
               <a:spcAft>
                 <a:spcPts val="0"/>
@@ -3338,13 +3338,13 @@
               <a:buClr>
                 <a:schemeClr val="dk1"/>
               </a:buClr>
-              <a:buSzPts val="1800"/>
+              <a:buSzPts val="2400"/>
               <a:buChar char="•"/>
               <a:defRPr/>
             </a:lvl3pPr>
             <a:lvl4pPr indent="-342900" lvl="3" marL="1828800" algn="l">
               <a:spcBef>
-                <a:spcPts val="360"/>
+                <a:spcPts val="480"/>
               </a:spcBef>
               <a:spcAft>
                 <a:spcPts val="0"/>
@@ -3352,13 +3352,13 @@
               <a:buClr>
                 <a:schemeClr val="dk1"/>
               </a:buClr>
-              <a:buSzPts val="1800"/>
+              <a:buSzPts val="2400"/>
               <a:buChar char="–"/>
               <a:defRPr/>
             </a:lvl4pPr>
             <a:lvl5pPr indent="-342900" lvl="4" marL="2286000" algn="l">
               <a:spcBef>
-                <a:spcPts val="360"/>
+                <a:spcPts val="480"/>
               </a:spcBef>
               <a:spcAft>
                 <a:spcPts val="0"/>
@@ -3366,13 +3366,13 @@
               <a:buClr>
                 <a:schemeClr val="dk1"/>
               </a:buClr>
-              <a:buSzPts val="1800"/>
+              <a:buSzPts val="2400"/>
               <a:buChar char="»"/>
               <a:defRPr/>
             </a:lvl5pPr>
             <a:lvl6pPr indent="-342900" lvl="5" marL="2743200" algn="l">
               <a:spcBef>
-                <a:spcPts val="360"/>
+                <a:spcPts val="480"/>
               </a:spcBef>
               <a:spcAft>
                 <a:spcPts val="0"/>
@@ -3380,13 +3380,13 @@
               <a:buClr>
                 <a:schemeClr val="dk1"/>
               </a:buClr>
-              <a:buSzPts val="1800"/>
+              <a:buSzPts val="2400"/>
               <a:buChar char="•"/>
               <a:defRPr/>
             </a:lvl6pPr>
             <a:lvl7pPr indent="-342900" lvl="6" marL="3200400" algn="l">
               <a:spcBef>
-                <a:spcPts val="360"/>
+                <a:spcPts val="480"/>
               </a:spcBef>
               <a:spcAft>
                 <a:spcPts val="0"/>
@@ -3394,13 +3394,13 @@
               <a:buClr>
                 <a:schemeClr val="dk1"/>
               </a:buClr>
-              <a:buSzPts val="1800"/>
+              <a:buSzPts val="2400"/>
               <a:buChar char="•"/>
               <a:defRPr/>
             </a:lvl7pPr>
             <a:lvl8pPr indent="-342900" lvl="7" marL="3657600" algn="l">
               <a:spcBef>
-                <a:spcPts val="360"/>
+                <a:spcPts val="480"/>
               </a:spcBef>
               <a:spcAft>
                 <a:spcPts val="0"/>
@@ -3408,13 +3408,13 @@
               <a:buClr>
                 <a:schemeClr val="dk1"/>
               </a:buClr>
-              <a:buSzPts val="1800"/>
+              <a:buSzPts val="2400"/>
               <a:buChar char="•"/>
               <a:defRPr/>
             </a:lvl8pPr>
             <a:lvl9pPr indent="-342900" lvl="8" marL="4114800" algn="l">
               <a:spcBef>
-                <a:spcPts val="360"/>
+                <a:spcPts val="480"/>
               </a:spcBef>
               <a:spcAft>
                 <a:spcPts val="0"/>
@@ -3422,7 +3422,7 @@
               <a:buClr>
                 <a:schemeClr val="dk1"/>
               </a:buClr>
-              <a:buSzPts val="1800"/>
+              <a:buSzPts val="2400"/>
               <a:buChar char="•"/>
               <a:defRPr/>
             </a:lvl9pPr>
@@ -3440,8 +3440,8 @@
         </p:nvSpPr>
         <p:spPr>
           <a:xfrm>
-            <a:off x="342900" y="4767263"/>
-            <a:ext cx="1600200" cy="273844"/>
+            <a:off x="457189" y="6356192"/>
+            <a:ext cx="2133547" cy="365116"/>
           </a:xfrm>
           <a:prstGeom prst="rect">
             <a:avLst/>
@@ -3452,7 +3452,7 @@
           </a:ln>
         </p:spPr>
         <p:txBody>
-          <a:bodyPr anchorCtr="0" anchor="ctr" bIns="45700" lIns="91425" spcFirstLastPara="1" rIns="91425" wrap="square" tIns="45700">
+          <a:bodyPr anchorCtr="0" anchor="ctr" bIns="60932" lIns="121897" spcFirstLastPara="1" rIns="121897" wrap="square" tIns="60932">
             <a:noAutofit/>
           </a:bodyPr>
           <a:lstStyle>
@@ -3469,7 +3469,7 @@
               <a:buClr>
                 <a:srgbClr val="888888"/>
               </a:buClr>
-              <a:buSzPts val="1800"/>
+              <a:buSzPts val="2400"/>
               <a:buNone/>
               <a:defRPr/>
             </a:lvl1pPr>
@@ -3486,7 +3486,7 @@
               <a:buClr>
                 <a:schemeClr val="accent2"/>
               </a:buClr>
-              <a:buSzPts val="1800"/>
+              <a:buSzPts val="2400"/>
               <a:buNone/>
               <a:defRPr/>
             </a:lvl2pPr>
@@ -3503,7 +3503,7 @@
               <a:buClr>
                 <a:schemeClr val="accent2"/>
               </a:buClr>
-              <a:buSzPts val="1800"/>
+              <a:buSzPts val="2400"/>
               <a:buNone/>
               <a:defRPr/>
             </a:lvl3pPr>
@@ -3520,7 +3520,7 @@
               <a:buClr>
                 <a:schemeClr val="accent2"/>
               </a:buClr>
-              <a:buSzPts val="1800"/>
+              <a:buSzPts val="2400"/>
               <a:buNone/>
               <a:defRPr/>
             </a:lvl4pPr>
@@ -3537,7 +3537,7 @@
               <a:buClr>
                 <a:schemeClr val="accent2"/>
               </a:buClr>
-              <a:buSzPts val="1800"/>
+              <a:buSzPts val="2400"/>
               <a:buNone/>
               <a:defRPr/>
             </a:lvl5pPr>
@@ -3554,7 +3554,7 @@
               <a:buClr>
                 <a:schemeClr val="accent2"/>
               </a:buClr>
-              <a:buSzPts val="1800"/>
+              <a:buSzPts val="2400"/>
               <a:buNone/>
               <a:defRPr/>
             </a:lvl6pPr>
@@ -3571,7 +3571,7 @@
               <a:buClr>
                 <a:schemeClr val="accent2"/>
               </a:buClr>
-              <a:buSzPts val="1800"/>
+              <a:buSzPts val="2400"/>
               <a:buNone/>
               <a:defRPr/>
             </a:lvl7pPr>
@@ -3588,7 +3588,7 @@
               <a:buClr>
                 <a:schemeClr val="accent2"/>
               </a:buClr>
-              <a:buSzPts val="1800"/>
+              <a:buSzPts val="2400"/>
               <a:buNone/>
               <a:defRPr/>
             </a:lvl8pPr>
@@ -3605,7 +3605,7 @@
               <a:buClr>
                 <a:schemeClr val="accent2"/>
               </a:buClr>
-              <a:buSzPts val="1800"/>
+              <a:buSzPts val="2400"/>
               <a:buNone/>
               <a:defRPr/>
             </a:lvl9pPr>
@@ -3623,8 +3623,8 @@
         </p:nvSpPr>
         <p:spPr>
           <a:xfrm>
-            <a:off x="2343150" y="4767263"/>
-            <a:ext cx="2171700" cy="273844"/>
+            <a:off x="3124122" y="6356192"/>
+            <a:ext cx="2895528" cy="365116"/>
           </a:xfrm>
           <a:prstGeom prst="rect">
             <a:avLst/>
@@ -3635,7 +3635,7 @@
           </a:ln>
         </p:spPr>
         <p:txBody>
-          <a:bodyPr anchorCtr="0" anchor="ctr" bIns="45700" lIns="91425" spcFirstLastPara="1" rIns="91425" wrap="square" tIns="45700">
+          <a:bodyPr anchorCtr="0" anchor="ctr" bIns="60932" lIns="121897" spcFirstLastPara="1" rIns="121897" wrap="square" tIns="60932">
             <a:noAutofit/>
           </a:bodyPr>
           <a:lstStyle>
@@ -3652,7 +3652,7 @@
               <a:buClr>
                 <a:srgbClr val="888888"/>
               </a:buClr>
-              <a:buSzPts val="1800"/>
+              <a:buSzPts val="2400"/>
               <a:buNone/>
               <a:defRPr/>
             </a:lvl1pPr>
@@ -3669,7 +3669,7 @@
               <a:buClr>
                 <a:schemeClr val="accent2"/>
               </a:buClr>
-              <a:buSzPts val="1800"/>
+              <a:buSzPts val="2400"/>
               <a:buNone/>
               <a:defRPr/>
             </a:lvl2pPr>
@@ -3686,7 +3686,7 @@
               <a:buClr>
                 <a:schemeClr val="accent2"/>
               </a:buClr>
-              <a:buSzPts val="1800"/>
+              <a:buSzPts val="2400"/>
               <a:buNone/>
               <a:defRPr/>
             </a:lvl3pPr>
@@ -3703,7 +3703,7 @@
               <a:buClr>
                 <a:schemeClr val="accent2"/>
               </a:buClr>
-              <a:buSzPts val="1800"/>
+              <a:buSzPts val="2400"/>
               <a:buNone/>
               <a:defRPr/>
             </a:lvl4pPr>
@@ -3720,7 +3720,7 @@
               <a:buClr>
                 <a:schemeClr val="accent2"/>
               </a:buClr>
-              <a:buSzPts val="1800"/>
+              <a:buSzPts val="2400"/>
               <a:buNone/>
               <a:defRPr/>
             </a:lvl5pPr>
@@ -3737,7 +3737,7 @@
               <a:buClr>
                 <a:schemeClr val="accent2"/>
               </a:buClr>
-              <a:buSzPts val="1800"/>
+              <a:buSzPts val="2400"/>
               <a:buNone/>
               <a:defRPr/>
             </a:lvl6pPr>
@@ -3754,7 +3754,7 @@
               <a:buClr>
                 <a:schemeClr val="accent2"/>
               </a:buClr>
-              <a:buSzPts val="1800"/>
+              <a:buSzPts val="2400"/>
               <a:buNone/>
               <a:defRPr/>
             </a:lvl7pPr>
@@ -3771,7 +3771,7 @@
               <a:buClr>
                 <a:schemeClr val="accent2"/>
               </a:buClr>
-              <a:buSzPts val="1800"/>
+              <a:buSzPts val="2400"/>
               <a:buNone/>
               <a:defRPr/>
             </a:lvl8pPr>
@@ -3788,7 +3788,7 @@
               <a:buClr>
                 <a:schemeClr val="accent2"/>
               </a:buClr>
-              <a:buSzPts val="1800"/>
+              <a:buSzPts val="2400"/>
               <a:buNone/>
               <a:defRPr/>
             </a:lvl9pPr>
@@ -3806,8 +3806,8 @@
         </p:nvSpPr>
         <p:spPr>
           <a:xfrm>
-            <a:off x="4914900" y="4767263"/>
-            <a:ext cx="1600200" cy="273844"/>
+            <a:off x="6553036" y="6356192"/>
+            <a:ext cx="2133547" cy="365116"/>
           </a:xfrm>
           <a:prstGeom prst="rect">
             <a:avLst/>
@@ -3818,7 +3818,7 @@
           </a:ln>
         </p:spPr>
         <p:txBody>
-          <a:bodyPr anchorCtr="0" anchor="ctr" bIns="45700" lIns="91425" spcFirstLastPara="1" rIns="91425" wrap="square" tIns="45700">
+          <a:bodyPr anchorCtr="0" anchor="ctr" bIns="60932" lIns="121897" spcFirstLastPara="1" rIns="121897" wrap="square" tIns="60932">
             <a:noAutofit/>
           </a:bodyPr>
           <a:lstStyle>
@@ -3835,7 +3835,7 @@
               <a:buClr>
                 <a:srgbClr val="888888"/>
               </a:buClr>
-              <a:buSzPts val="900"/>
+              <a:buSzPts val="1200"/>
               <a:buFont typeface="Calibri"/>
               <a:buNone/>
               <a:defRPr/>
@@ -3853,7 +3853,7 @@
               <a:buClr>
                 <a:srgbClr val="888888"/>
               </a:buClr>
-              <a:buSzPts val="900"/>
+              <a:buSzPts val="1200"/>
               <a:buFont typeface="Calibri"/>
               <a:buNone/>
               <a:defRPr/>
@@ -3871,7 +3871,7 @@
               <a:buClr>
                 <a:srgbClr val="888888"/>
               </a:buClr>
-              <a:buSzPts val="900"/>
+              <a:buSzPts val="1200"/>
               <a:buFont typeface="Calibri"/>
               <a:buNone/>
               <a:defRPr/>
@@ -3889,7 +3889,7 @@
               <a:buClr>
                 <a:srgbClr val="888888"/>
               </a:buClr>
-              <a:buSzPts val="900"/>
+              <a:buSzPts val="1200"/>
               <a:buFont typeface="Calibri"/>
               <a:buNone/>
               <a:defRPr/>
@@ -3907,7 +3907,7 @@
               <a:buClr>
                 <a:srgbClr val="888888"/>
               </a:buClr>
-              <a:buSzPts val="900"/>
+              <a:buSzPts val="1200"/>
               <a:buFont typeface="Calibri"/>
               <a:buNone/>
               <a:defRPr/>
@@ -3925,7 +3925,7 @@
               <a:buClr>
                 <a:srgbClr val="888888"/>
               </a:buClr>
-              <a:buSzPts val="900"/>
+              <a:buSzPts val="1200"/>
               <a:buFont typeface="Calibri"/>
               <a:buNone/>
               <a:defRPr/>
@@ -3943,7 +3943,7 @@
               <a:buClr>
                 <a:srgbClr val="888888"/>
               </a:buClr>
-              <a:buSzPts val="900"/>
+              <a:buSzPts val="1200"/>
               <a:buFont typeface="Calibri"/>
               <a:buNone/>
               <a:defRPr/>
@@ -3961,7 +3961,7 @@
               <a:buClr>
                 <a:srgbClr val="888888"/>
               </a:buClr>
-              <a:buSzPts val="900"/>
+              <a:buSzPts val="1200"/>
               <a:buFont typeface="Calibri"/>
               <a:buNone/>
               <a:defRPr/>
@@ -3979,7 +3979,7 @@
               <a:buClr>
                 <a:srgbClr val="888888"/>
               </a:buClr>
-              <a:buSzPts val="900"/>
+              <a:buSzPts val="1200"/>
               <a:buFont typeface="Calibri"/>
               <a:buNone/>
               <a:defRPr/>
@@ -4038,8 +4038,8 @@
         </p:nvSpPr>
         <p:spPr>
           <a:xfrm>
-            <a:off x="514350" y="1597819"/>
-            <a:ext cx="5829300" cy="1102519"/>
+            <a:off x="685783" y="2130372"/>
+            <a:ext cx="7772206" cy="1469989"/>
           </a:xfrm>
           <a:prstGeom prst="rect">
             <a:avLst/>
@@ -4050,7 +4050,7 @@
           </a:ln>
         </p:spPr>
         <p:txBody>
-          <a:bodyPr anchorCtr="0" anchor="ctr" bIns="45700" lIns="91425" spcFirstLastPara="1" rIns="91425" wrap="square" tIns="45700">
+          <a:bodyPr anchorCtr="0" anchor="ctr" bIns="60932" lIns="121897" spcFirstLastPara="1" rIns="121897" wrap="square" tIns="60932">
             <a:normAutofit/>
           </a:bodyPr>
           <a:lstStyle>
@@ -4064,7 +4064,7 @@
               <a:buClr>
                 <a:schemeClr val="dk1"/>
               </a:buClr>
-              <a:buSzPts val="1800"/>
+              <a:buSzPts val="2400"/>
               <a:buNone/>
               <a:defRPr/>
             </a:lvl1pPr>
@@ -4075,7 +4075,7 @@
               <a:spcAft>
                 <a:spcPts val="0"/>
               </a:spcAft>
-              <a:buSzPts val="1400"/>
+              <a:buSzPts val="1867"/>
               <a:buNone/>
               <a:defRPr/>
             </a:lvl2pPr>
@@ -4086,7 +4086,7 @@
               <a:spcAft>
                 <a:spcPts val="0"/>
               </a:spcAft>
-              <a:buSzPts val="1400"/>
+              <a:buSzPts val="1867"/>
               <a:buNone/>
               <a:defRPr/>
             </a:lvl3pPr>
@@ -4097,7 +4097,7 @@
               <a:spcAft>
                 <a:spcPts val="0"/>
               </a:spcAft>
-              <a:buSzPts val="1400"/>
+              <a:buSzPts val="1867"/>
               <a:buNone/>
               <a:defRPr/>
             </a:lvl4pPr>
@@ -4108,7 +4108,7 @@
               <a:spcAft>
                 <a:spcPts val="0"/>
               </a:spcAft>
-              <a:buSzPts val="1400"/>
+              <a:buSzPts val="1867"/>
               <a:buNone/>
               <a:defRPr/>
             </a:lvl5pPr>
@@ -4119,7 +4119,7 @@
               <a:spcAft>
                 <a:spcPts val="0"/>
               </a:spcAft>
-              <a:buSzPts val="1400"/>
+              <a:buSzPts val="1867"/>
               <a:buNone/>
               <a:defRPr/>
             </a:lvl6pPr>
@@ -4130,7 +4130,7 @@
               <a:spcAft>
                 <a:spcPts val="0"/>
               </a:spcAft>
-              <a:buSzPts val="1400"/>
+              <a:buSzPts val="1867"/>
               <a:buNone/>
               <a:defRPr/>
             </a:lvl7pPr>
@@ -4141,7 +4141,7 @@
               <a:spcAft>
                 <a:spcPts val="0"/>
               </a:spcAft>
-              <a:buSzPts val="1400"/>
+              <a:buSzPts val="1867"/>
               <a:buNone/>
               <a:defRPr/>
             </a:lvl8pPr>
@@ -4152,7 +4152,7 @@
               <a:spcAft>
                 <a:spcPts val="0"/>
               </a:spcAft>
-              <a:buSzPts val="1400"/>
+              <a:buSzPts val="1867"/>
               <a:buNone/>
               <a:defRPr/>
             </a:lvl9pPr>
@@ -4170,8 +4170,8 @@
         </p:nvSpPr>
         <p:spPr>
           <a:xfrm>
-            <a:off x="1028700" y="2914650"/>
-            <a:ext cx="4800600" cy="1314450"/>
+            <a:off x="1371566" y="3886103"/>
+            <a:ext cx="6400640" cy="1752556"/>
           </a:xfrm>
           <a:prstGeom prst="rect">
             <a:avLst/>
@@ -4182,13 +4182,13 @@
           </a:ln>
         </p:spPr>
         <p:txBody>
-          <a:bodyPr anchorCtr="0" anchor="t" bIns="45700" lIns="91425" spcFirstLastPara="1" rIns="91425" wrap="square" tIns="45700">
+          <a:bodyPr anchorCtr="0" anchor="t" bIns="60932" lIns="121897" spcFirstLastPara="1" rIns="121897" wrap="square" tIns="60932">
             <a:normAutofit/>
           </a:bodyPr>
           <a:lstStyle>
             <a:lvl1pPr lvl="0" algn="ctr">
               <a:spcBef>
-                <a:spcPts val="480"/>
+                <a:spcPts val="640"/>
               </a:spcBef>
               <a:spcAft>
                 <a:spcPts val="0"/>
@@ -4196,7 +4196,7 @@
               <a:buClr>
                 <a:srgbClr val="888888"/>
               </a:buClr>
-              <a:buSzPts val="2400"/>
+              <a:buSzPts val="3200"/>
               <a:buNone/>
               <a:defRPr>
                 <a:solidFill>
@@ -4206,7 +4206,7 @@
             </a:lvl1pPr>
             <a:lvl2pPr lvl="1" algn="ctr">
               <a:spcBef>
-                <a:spcPts val="420"/>
+                <a:spcPts val="560"/>
               </a:spcBef>
               <a:spcAft>
                 <a:spcPts val="0"/>
@@ -4214,7 +4214,7 @@
               <a:buClr>
                 <a:srgbClr val="888888"/>
               </a:buClr>
-              <a:buSzPts val="2100"/>
+              <a:buSzPts val="2800"/>
               <a:buNone/>
               <a:defRPr>
                 <a:solidFill>
@@ -4224,7 +4224,7 @@
             </a:lvl2pPr>
             <a:lvl3pPr lvl="2" algn="ctr">
               <a:spcBef>
-                <a:spcPts val="360"/>
+                <a:spcPts val="480"/>
               </a:spcBef>
               <a:spcAft>
                 <a:spcPts val="0"/>
@@ -4232,7 +4232,7 @@
               <a:buClr>
                 <a:srgbClr val="888888"/>
               </a:buClr>
-              <a:buSzPts val="1800"/>
+              <a:buSzPts val="2400"/>
               <a:buNone/>
               <a:defRPr>
                 <a:solidFill>
@@ -4242,7 +4242,7 @@
             </a:lvl3pPr>
             <a:lvl4pPr lvl="3" algn="ctr">
               <a:spcBef>
-                <a:spcPts val="300"/>
+                <a:spcPts val="400"/>
               </a:spcBef>
               <a:spcAft>
                 <a:spcPts val="0"/>
@@ -4250,7 +4250,7 @@
               <a:buClr>
                 <a:srgbClr val="888888"/>
               </a:buClr>
-              <a:buSzPts val="1500"/>
+              <a:buSzPts val="2000"/>
               <a:buNone/>
               <a:defRPr>
                 <a:solidFill>
@@ -4260,7 +4260,7 @@
             </a:lvl4pPr>
             <a:lvl5pPr lvl="4" algn="ctr">
               <a:spcBef>
-                <a:spcPts val="300"/>
+                <a:spcPts val="400"/>
               </a:spcBef>
               <a:spcAft>
                 <a:spcPts val="0"/>
@@ -4268,7 +4268,7 @@
               <a:buClr>
                 <a:srgbClr val="888888"/>
               </a:buClr>
-              <a:buSzPts val="1500"/>
+              <a:buSzPts val="2000"/>
               <a:buNone/>
               <a:defRPr>
                 <a:solidFill>
@@ -4278,7 +4278,7 @@
             </a:lvl5pPr>
             <a:lvl6pPr lvl="5" algn="ctr">
               <a:spcBef>
-                <a:spcPts val="300"/>
+                <a:spcPts val="400"/>
               </a:spcBef>
               <a:spcAft>
                 <a:spcPts val="0"/>
@@ -4286,7 +4286,7 @@
               <a:buClr>
                 <a:srgbClr val="888888"/>
               </a:buClr>
-              <a:buSzPts val="1500"/>
+              <a:buSzPts val="2000"/>
               <a:buNone/>
               <a:defRPr>
                 <a:solidFill>
@@ -4296,7 +4296,7 @@
             </a:lvl6pPr>
             <a:lvl7pPr lvl="6" algn="ctr">
               <a:spcBef>
-                <a:spcPts val="300"/>
+                <a:spcPts val="400"/>
               </a:spcBef>
               <a:spcAft>
                 <a:spcPts val="0"/>
@@ -4304,7 +4304,7 @@
               <a:buClr>
                 <a:srgbClr val="888888"/>
               </a:buClr>
-              <a:buSzPts val="1500"/>
+              <a:buSzPts val="2000"/>
               <a:buNone/>
               <a:defRPr>
                 <a:solidFill>
@@ -4314,7 +4314,7 @@
             </a:lvl7pPr>
             <a:lvl8pPr lvl="7" algn="ctr">
               <a:spcBef>
-                <a:spcPts val="300"/>
+                <a:spcPts val="400"/>
               </a:spcBef>
               <a:spcAft>
                 <a:spcPts val="0"/>
@@ -4322,7 +4322,7 @@
               <a:buClr>
                 <a:srgbClr val="888888"/>
               </a:buClr>
-              <a:buSzPts val="1500"/>
+              <a:buSzPts val="2000"/>
               <a:buNone/>
               <a:defRPr>
                 <a:solidFill>
@@ -4332,7 +4332,7 @@
             </a:lvl8pPr>
             <a:lvl9pPr lvl="8" algn="ctr">
               <a:spcBef>
-                <a:spcPts val="300"/>
+                <a:spcPts val="400"/>
               </a:spcBef>
               <a:spcAft>
                 <a:spcPts val="0"/>
@@ -4340,7 +4340,7 @@
               <a:buClr>
                 <a:srgbClr val="888888"/>
               </a:buClr>
-              <a:buSzPts val="1500"/>
+              <a:buSzPts val="2000"/>
               <a:buNone/>
               <a:defRPr>
                 <a:solidFill>
@@ -4362,8 +4362,8 @@
         </p:nvSpPr>
         <p:spPr>
           <a:xfrm>
-            <a:off x="342900" y="4767263"/>
-            <a:ext cx="1600200" cy="273844"/>
+            <a:off x="457189" y="6356192"/>
+            <a:ext cx="2133547" cy="365116"/>
           </a:xfrm>
           <a:prstGeom prst="rect">
             <a:avLst/>
@@ -4374,7 +4374,7 @@
           </a:ln>
         </p:spPr>
         <p:txBody>
-          <a:bodyPr anchorCtr="0" anchor="ctr" bIns="45700" lIns="91425" spcFirstLastPara="1" rIns="91425" wrap="square" tIns="45700">
+          <a:bodyPr anchorCtr="0" anchor="ctr" bIns="60932" lIns="121897" spcFirstLastPara="1" rIns="121897" wrap="square" tIns="60932">
             <a:noAutofit/>
           </a:bodyPr>
           <a:lstStyle>
@@ -4391,7 +4391,7 @@
               <a:buClr>
                 <a:srgbClr val="888888"/>
               </a:buClr>
-              <a:buSzPts val="1800"/>
+              <a:buSzPts val="2400"/>
               <a:buNone/>
               <a:defRPr/>
             </a:lvl1pPr>
@@ -4408,7 +4408,7 @@
               <a:buClr>
                 <a:schemeClr val="accent2"/>
               </a:buClr>
-              <a:buSzPts val="1800"/>
+              <a:buSzPts val="2400"/>
               <a:buNone/>
               <a:defRPr/>
             </a:lvl2pPr>
@@ -4425,7 +4425,7 @@
               <a:buClr>
                 <a:schemeClr val="accent2"/>
               </a:buClr>
-              <a:buSzPts val="1800"/>
+              <a:buSzPts val="2400"/>
               <a:buNone/>
               <a:defRPr/>
             </a:lvl3pPr>
@@ -4442,7 +4442,7 @@
               <a:buClr>
                 <a:schemeClr val="accent2"/>
               </a:buClr>
-              <a:buSzPts val="1800"/>
+              <a:buSzPts val="2400"/>
               <a:buNone/>
               <a:defRPr/>
             </a:lvl4pPr>
@@ -4459,7 +4459,7 @@
               <a:buClr>
                 <a:schemeClr val="accent2"/>
               </a:buClr>
-              <a:buSzPts val="1800"/>
+              <a:buSzPts val="2400"/>
               <a:buNone/>
               <a:defRPr/>
             </a:lvl5pPr>
@@ -4476,7 +4476,7 @@
               <a:buClr>
                 <a:schemeClr val="accent2"/>
               </a:buClr>
-              <a:buSzPts val="1800"/>
+              <a:buSzPts val="2400"/>
               <a:buNone/>
               <a:defRPr/>
             </a:lvl6pPr>
@@ -4493,7 +4493,7 @@
               <a:buClr>
                 <a:schemeClr val="accent2"/>
               </a:buClr>
-              <a:buSzPts val="1800"/>
+              <a:buSzPts val="2400"/>
               <a:buNone/>
               <a:defRPr/>
             </a:lvl7pPr>
@@ -4510,7 +4510,7 @@
               <a:buClr>
                 <a:schemeClr val="accent2"/>
               </a:buClr>
-              <a:buSzPts val="1800"/>
+              <a:buSzPts val="2400"/>
               <a:buNone/>
               <a:defRPr/>
             </a:lvl8pPr>
@@ -4527,7 +4527,7 @@
               <a:buClr>
                 <a:schemeClr val="accent2"/>
               </a:buClr>
-              <a:buSzPts val="1800"/>
+              <a:buSzPts val="2400"/>
               <a:buNone/>
               <a:defRPr/>
             </a:lvl9pPr>
@@ -4545,8 +4545,8 @@
         </p:nvSpPr>
         <p:spPr>
           <a:xfrm>
-            <a:off x="2343150" y="4767263"/>
-            <a:ext cx="2171700" cy="273844"/>
+            <a:off x="3124122" y="6356192"/>
+            <a:ext cx="2895528" cy="365116"/>
           </a:xfrm>
           <a:prstGeom prst="rect">
             <a:avLst/>
@@ -4557,7 +4557,7 @@
           </a:ln>
         </p:spPr>
         <p:txBody>
-          <a:bodyPr anchorCtr="0" anchor="ctr" bIns="45700" lIns="91425" spcFirstLastPara="1" rIns="91425" wrap="square" tIns="45700">
+          <a:bodyPr anchorCtr="0" anchor="ctr" bIns="60932" lIns="121897" spcFirstLastPara="1" rIns="121897" wrap="square" tIns="60932">
             <a:noAutofit/>
           </a:bodyPr>
           <a:lstStyle>
@@ -4574,7 +4574,7 @@
               <a:buClr>
                 <a:srgbClr val="888888"/>
               </a:buClr>
-              <a:buSzPts val="1800"/>
+              <a:buSzPts val="2400"/>
               <a:buNone/>
               <a:defRPr/>
             </a:lvl1pPr>
@@ -4591,7 +4591,7 @@
               <a:buClr>
                 <a:schemeClr val="accent2"/>
               </a:buClr>
-              <a:buSzPts val="1800"/>
+              <a:buSzPts val="2400"/>
               <a:buNone/>
               <a:defRPr/>
             </a:lvl2pPr>
@@ -4608,7 +4608,7 @@
               <a:buClr>
                 <a:schemeClr val="accent2"/>
               </a:buClr>
-              <a:buSzPts val="1800"/>
+              <a:buSzPts val="2400"/>
               <a:buNone/>
               <a:defRPr/>
             </a:lvl3pPr>
@@ -4625,7 +4625,7 @@
               <a:buClr>
                 <a:schemeClr val="accent2"/>
               </a:buClr>
-              <a:buSzPts val="1800"/>
+              <a:buSzPts val="2400"/>
               <a:buNone/>
               <a:defRPr/>
             </a:lvl4pPr>
@@ -4642,7 +4642,7 @@
               <a:buClr>
                 <a:schemeClr val="accent2"/>
               </a:buClr>
-              <a:buSzPts val="1800"/>
+              <a:buSzPts val="2400"/>
               <a:buNone/>
               <a:defRPr/>
             </a:lvl5pPr>
@@ -4659,7 +4659,7 @@
               <a:buClr>
                 <a:schemeClr val="accent2"/>
               </a:buClr>
-              <a:buSzPts val="1800"/>
+              <a:buSzPts val="2400"/>
               <a:buNone/>
               <a:defRPr/>
             </a:lvl6pPr>
@@ -4676,7 +4676,7 @@
               <a:buClr>
                 <a:schemeClr val="accent2"/>
               </a:buClr>
-              <a:buSzPts val="1800"/>
+              <a:buSzPts val="2400"/>
               <a:buNone/>
               <a:defRPr/>
             </a:lvl7pPr>
@@ -4693,7 +4693,7 @@
               <a:buClr>
                 <a:schemeClr val="accent2"/>
               </a:buClr>
-              <a:buSzPts val="1800"/>
+              <a:buSzPts val="2400"/>
               <a:buNone/>
               <a:defRPr/>
             </a:lvl8pPr>
@@ -4710,7 +4710,7 @@
               <a:buClr>
                 <a:schemeClr val="accent2"/>
               </a:buClr>
-              <a:buSzPts val="1800"/>
+              <a:buSzPts val="2400"/>
               <a:buNone/>
               <a:defRPr/>
             </a:lvl9pPr>
@@ -4728,8 +4728,8 @@
         </p:nvSpPr>
         <p:spPr>
           <a:xfrm>
-            <a:off x="4914900" y="4767263"/>
-            <a:ext cx="1600200" cy="273844"/>
+            <a:off x="6553036" y="6356192"/>
+            <a:ext cx="2133547" cy="365116"/>
           </a:xfrm>
           <a:prstGeom prst="rect">
             <a:avLst/>
@@ -4740,7 +4740,7 @@
           </a:ln>
         </p:spPr>
         <p:txBody>
-          <a:bodyPr anchorCtr="0" anchor="ctr" bIns="45700" lIns="91425" spcFirstLastPara="1" rIns="91425" wrap="square" tIns="45700">
+          <a:bodyPr anchorCtr="0" anchor="ctr" bIns="60932" lIns="121897" spcFirstLastPara="1" rIns="121897" wrap="square" tIns="60932">
             <a:noAutofit/>
           </a:bodyPr>
           <a:lstStyle>
@@ -4757,7 +4757,7 @@
               <a:buClr>
                 <a:srgbClr val="888888"/>
               </a:buClr>
-              <a:buSzPts val="900"/>
+              <a:buSzPts val="1200"/>
               <a:buFont typeface="Calibri"/>
               <a:buNone/>
               <a:defRPr/>
@@ -4775,7 +4775,7 @@
               <a:buClr>
                 <a:srgbClr val="888888"/>
               </a:buClr>
-              <a:buSzPts val="900"/>
+              <a:buSzPts val="1200"/>
               <a:buFont typeface="Calibri"/>
               <a:buNone/>
               <a:defRPr/>
@@ -4793,7 +4793,7 @@
               <a:buClr>
                 <a:srgbClr val="888888"/>
               </a:buClr>
-              <a:buSzPts val="900"/>
+              <a:buSzPts val="1200"/>
               <a:buFont typeface="Calibri"/>
               <a:buNone/>
               <a:defRPr/>
@@ -4811,7 +4811,7 @@
               <a:buClr>
                 <a:srgbClr val="888888"/>
               </a:buClr>
-              <a:buSzPts val="900"/>
+              <a:buSzPts val="1200"/>
               <a:buFont typeface="Calibri"/>
               <a:buNone/>
               <a:defRPr/>
@@ -4829,7 +4829,7 @@
               <a:buClr>
                 <a:srgbClr val="888888"/>
               </a:buClr>
-              <a:buSzPts val="900"/>
+              <a:buSzPts val="1200"/>
               <a:buFont typeface="Calibri"/>
               <a:buNone/>
               <a:defRPr/>
@@ -4847,7 +4847,7 @@
               <a:buClr>
                 <a:srgbClr val="888888"/>
               </a:buClr>
-              <a:buSzPts val="900"/>
+              <a:buSzPts val="1200"/>
               <a:buFont typeface="Calibri"/>
               <a:buNone/>
               <a:defRPr/>
@@ -4865,7 +4865,7 @@
               <a:buClr>
                 <a:srgbClr val="888888"/>
               </a:buClr>
-              <a:buSzPts val="900"/>
+              <a:buSzPts val="1200"/>
               <a:buFont typeface="Calibri"/>
               <a:buNone/>
               <a:defRPr/>
@@ -4883,7 +4883,7 @@
               <a:buClr>
                 <a:srgbClr val="888888"/>
               </a:buClr>
-              <a:buSzPts val="900"/>
+              <a:buSzPts val="1200"/>
               <a:buFont typeface="Calibri"/>
               <a:buNone/>
               <a:defRPr/>
@@ -4901,7 +4901,7 @@
               <a:buClr>
                 <a:srgbClr val="888888"/>
               </a:buClr>
-              <a:buSzPts val="900"/>
+              <a:buSzPts val="1200"/>
               <a:buFont typeface="Calibri"/>
               <a:buNone/>
               <a:defRPr/>
@@ -4960,8 +4960,8 @@
         </p:nvSpPr>
         <p:spPr>
           <a:xfrm>
-            <a:off x="342900" y="205978"/>
-            <a:ext cx="6172200" cy="857250"/>
+            <a:off x="457189" y="274630"/>
+            <a:ext cx="8229394" cy="1142971"/>
           </a:xfrm>
           <a:prstGeom prst="rect">
             <a:avLst/>
@@ -4972,7 +4972,7 @@
           </a:ln>
         </p:spPr>
         <p:txBody>
-          <a:bodyPr anchorCtr="0" anchor="ctr" bIns="45700" lIns="91425" spcFirstLastPara="1" rIns="91425" wrap="square" tIns="45700">
+          <a:bodyPr anchorCtr="0" anchor="ctr" bIns="60932" lIns="121897" spcFirstLastPara="1" rIns="121897" wrap="square" tIns="60932">
             <a:normAutofit/>
           </a:bodyPr>
           <a:lstStyle>
@@ -4986,7 +4986,7 @@
               <a:buClr>
                 <a:schemeClr val="dk1"/>
               </a:buClr>
-              <a:buSzPts val="1800"/>
+              <a:buSzPts val="2400"/>
               <a:buNone/>
               <a:defRPr/>
             </a:lvl1pPr>
@@ -4997,7 +4997,7 @@
               <a:spcAft>
                 <a:spcPts val="0"/>
               </a:spcAft>
-              <a:buSzPts val="1400"/>
+              <a:buSzPts val="1867"/>
               <a:buNone/>
               <a:defRPr/>
             </a:lvl2pPr>
@@ -5008,7 +5008,7 @@
               <a:spcAft>
                 <a:spcPts val="0"/>
               </a:spcAft>
-              <a:buSzPts val="1400"/>
+              <a:buSzPts val="1867"/>
               <a:buNone/>
               <a:defRPr/>
             </a:lvl3pPr>
@@ -5019,7 +5019,7 @@
               <a:spcAft>
                 <a:spcPts val="0"/>
               </a:spcAft>
-              <a:buSzPts val="1400"/>
+              <a:buSzPts val="1867"/>
               <a:buNone/>
               <a:defRPr/>
             </a:lvl4pPr>
@@ -5030,7 +5030,7 @@
               <a:spcAft>
                 <a:spcPts val="0"/>
               </a:spcAft>
-              <a:buSzPts val="1400"/>
+              <a:buSzPts val="1867"/>
               <a:buNone/>
               <a:defRPr/>
             </a:lvl5pPr>
@@ -5041,7 +5041,7 @@
               <a:spcAft>
                 <a:spcPts val="0"/>
               </a:spcAft>
-              <a:buSzPts val="1400"/>
+              <a:buSzPts val="1867"/>
               <a:buNone/>
               <a:defRPr/>
             </a:lvl6pPr>
@@ -5052,7 +5052,7 @@
               <a:spcAft>
                 <a:spcPts val="0"/>
               </a:spcAft>
-              <a:buSzPts val="1400"/>
+              <a:buSzPts val="1867"/>
               <a:buNone/>
               <a:defRPr/>
             </a:lvl7pPr>
@@ -5063,7 +5063,7 @@
               <a:spcAft>
                 <a:spcPts val="0"/>
               </a:spcAft>
-              <a:buSzPts val="1400"/>
+              <a:buSzPts val="1867"/>
               <a:buNone/>
               <a:defRPr/>
             </a:lvl8pPr>
@@ -5074,7 +5074,7 @@
               <a:spcAft>
                 <a:spcPts val="0"/>
               </a:spcAft>
-              <a:buSzPts val="1400"/>
+              <a:buSzPts val="1867"/>
               <a:buNone/>
               <a:defRPr/>
             </a:lvl9pPr>
@@ -5092,8 +5092,8 @@
         </p:nvSpPr>
         <p:spPr>
           <a:xfrm>
-            <a:off x="342900" y="1200151"/>
-            <a:ext cx="6172200" cy="3394472"/>
+            <a:off x="457189" y="1600161"/>
+            <a:ext cx="8229394" cy="4525849"/>
           </a:xfrm>
           <a:prstGeom prst="rect">
             <a:avLst/>
@@ -5104,13 +5104,13 @@
           </a:ln>
         </p:spPr>
         <p:txBody>
-          <a:bodyPr anchorCtr="0" anchor="t" bIns="45700" lIns="91425" spcFirstLastPara="1" rIns="91425" wrap="square" tIns="45700">
+          <a:bodyPr anchorCtr="0" anchor="t" bIns="60932" lIns="121897" spcFirstLastPara="1" rIns="121897" wrap="square" tIns="60932">
             <a:normAutofit/>
           </a:bodyPr>
           <a:lstStyle>
             <a:lvl1pPr indent="-342900" lvl="0" marL="457200" algn="l">
               <a:spcBef>
-                <a:spcPts val="360"/>
+                <a:spcPts val="480"/>
               </a:spcBef>
               <a:spcAft>
                 <a:spcPts val="0"/>
@@ -5118,13 +5118,13 @@
               <a:buClr>
                 <a:schemeClr val="dk1"/>
               </a:buClr>
-              <a:buSzPts val="1800"/>
+              <a:buSzPts val="2400"/>
               <a:buChar char="•"/>
               <a:defRPr/>
             </a:lvl1pPr>
             <a:lvl2pPr indent="-342900" lvl="1" marL="914400" algn="l">
               <a:spcBef>
-                <a:spcPts val="360"/>
+                <a:spcPts val="480"/>
               </a:spcBef>
               <a:spcAft>
                 <a:spcPts val="0"/>
@@ -5132,13 +5132,13 @@
               <a:buClr>
                 <a:schemeClr val="dk1"/>
               </a:buClr>
-              <a:buSzPts val="1800"/>
+              <a:buSzPts val="2400"/>
               <a:buChar char="–"/>
               <a:defRPr/>
             </a:lvl2pPr>
             <a:lvl3pPr indent="-342900" lvl="2" marL="1371600" algn="l">
               <a:spcBef>
-                <a:spcPts val="360"/>
+                <a:spcPts val="480"/>
               </a:spcBef>
               <a:spcAft>
                 <a:spcPts val="0"/>
@@ -5146,13 +5146,13 @@
               <a:buClr>
                 <a:schemeClr val="dk1"/>
               </a:buClr>
-              <a:buSzPts val="1800"/>
+              <a:buSzPts val="2400"/>
               <a:buChar char="•"/>
               <a:defRPr/>
             </a:lvl3pPr>
             <a:lvl4pPr indent="-342900" lvl="3" marL="1828800" algn="l">
               <a:spcBef>
-                <a:spcPts val="360"/>
+                <a:spcPts val="480"/>
               </a:spcBef>
               <a:spcAft>
                 <a:spcPts val="0"/>
@@ -5160,13 +5160,13 @@
               <a:buClr>
                 <a:schemeClr val="dk1"/>
               </a:buClr>
-              <a:buSzPts val="1800"/>
+              <a:buSzPts val="2400"/>
               <a:buChar char="–"/>
               <a:defRPr/>
             </a:lvl4pPr>
             <a:lvl5pPr indent="-342900" lvl="4" marL="2286000" algn="l">
               <a:spcBef>
-                <a:spcPts val="360"/>
+                <a:spcPts val="480"/>
               </a:spcBef>
               <a:spcAft>
                 <a:spcPts val="0"/>
@@ -5174,13 +5174,13 @@
               <a:buClr>
                 <a:schemeClr val="dk1"/>
               </a:buClr>
-              <a:buSzPts val="1800"/>
+              <a:buSzPts val="2400"/>
               <a:buChar char="»"/>
               <a:defRPr/>
             </a:lvl5pPr>
             <a:lvl6pPr indent="-342900" lvl="5" marL="2743200" algn="l">
               <a:spcBef>
-                <a:spcPts val="360"/>
+                <a:spcPts val="480"/>
               </a:spcBef>
               <a:spcAft>
                 <a:spcPts val="0"/>
@@ -5188,13 +5188,13 @@
               <a:buClr>
                 <a:schemeClr val="dk1"/>
               </a:buClr>
-              <a:buSzPts val="1800"/>
+              <a:buSzPts val="2400"/>
               <a:buChar char="•"/>
               <a:defRPr/>
             </a:lvl6pPr>
             <a:lvl7pPr indent="-342900" lvl="6" marL="3200400" algn="l">
               <a:spcBef>
-                <a:spcPts val="360"/>
+                <a:spcPts val="480"/>
               </a:spcBef>
               <a:spcAft>
                 <a:spcPts val="0"/>
@@ -5202,13 +5202,13 @@
               <a:buClr>
                 <a:schemeClr val="dk1"/>
               </a:buClr>
-              <a:buSzPts val="1800"/>
+              <a:buSzPts val="2400"/>
               <a:buChar char="•"/>
               <a:defRPr/>
             </a:lvl7pPr>
             <a:lvl8pPr indent="-342900" lvl="7" marL="3657600" algn="l">
               <a:spcBef>
-                <a:spcPts val="360"/>
+                <a:spcPts val="480"/>
               </a:spcBef>
               <a:spcAft>
                 <a:spcPts val="0"/>
@@ -5216,13 +5216,13 @@
               <a:buClr>
                 <a:schemeClr val="dk1"/>
               </a:buClr>
-              <a:buSzPts val="1800"/>
+              <a:buSzPts val="2400"/>
               <a:buChar char="•"/>
               <a:defRPr/>
             </a:lvl8pPr>
             <a:lvl9pPr indent="-342900" lvl="8" marL="4114800" algn="l">
               <a:spcBef>
-                <a:spcPts val="360"/>
+                <a:spcPts val="480"/>
               </a:spcBef>
               <a:spcAft>
                 <a:spcPts val="0"/>
@@ -5230,7 +5230,7 @@
               <a:buClr>
                 <a:schemeClr val="dk1"/>
               </a:buClr>
-              <a:buSzPts val="1800"/>
+              <a:buSzPts val="2400"/>
               <a:buChar char="•"/>
               <a:defRPr/>
             </a:lvl9pPr>
@@ -5248,8 +5248,8 @@
         </p:nvSpPr>
         <p:spPr>
           <a:xfrm>
-            <a:off x="342900" y="4767263"/>
-            <a:ext cx="1600200" cy="273844"/>
+            <a:off x="457189" y="6356192"/>
+            <a:ext cx="2133547" cy="365116"/>
           </a:xfrm>
           <a:prstGeom prst="rect">
             <a:avLst/>
@@ -5260,7 +5260,7 @@
           </a:ln>
         </p:spPr>
         <p:txBody>
-          <a:bodyPr anchorCtr="0" anchor="ctr" bIns="45700" lIns="91425" spcFirstLastPara="1" rIns="91425" wrap="square" tIns="45700">
+          <a:bodyPr anchorCtr="0" anchor="ctr" bIns="60932" lIns="121897" spcFirstLastPara="1" rIns="121897" wrap="square" tIns="60932">
             <a:noAutofit/>
           </a:bodyPr>
           <a:lstStyle>
@@ -5277,7 +5277,7 @@
               <a:buClr>
                 <a:srgbClr val="888888"/>
               </a:buClr>
-              <a:buSzPts val="1800"/>
+              <a:buSzPts val="2400"/>
               <a:buNone/>
               <a:defRPr/>
             </a:lvl1pPr>
@@ -5294,7 +5294,7 @@
               <a:buClr>
                 <a:schemeClr val="accent2"/>
               </a:buClr>
-              <a:buSzPts val="1800"/>
+              <a:buSzPts val="2400"/>
               <a:buNone/>
               <a:defRPr/>
             </a:lvl2pPr>
@@ -5311,7 +5311,7 @@
               <a:buClr>
                 <a:schemeClr val="accent2"/>
               </a:buClr>
-              <a:buSzPts val="1800"/>
+              <a:buSzPts val="2400"/>
               <a:buNone/>
               <a:defRPr/>
             </a:lvl3pPr>
@@ -5328,7 +5328,7 @@
               <a:buClr>
                 <a:schemeClr val="accent2"/>
               </a:buClr>
-              <a:buSzPts val="1800"/>
+              <a:buSzPts val="2400"/>
               <a:buNone/>
               <a:defRPr/>
             </a:lvl4pPr>
@@ -5345,7 +5345,7 @@
               <a:buClr>
                 <a:schemeClr val="accent2"/>
               </a:buClr>
-              <a:buSzPts val="1800"/>
+              <a:buSzPts val="2400"/>
               <a:buNone/>
               <a:defRPr/>
             </a:lvl5pPr>
@@ -5362,7 +5362,7 @@
               <a:buClr>
                 <a:schemeClr val="accent2"/>
               </a:buClr>
-              <a:buSzPts val="1800"/>
+              <a:buSzPts val="2400"/>
               <a:buNone/>
               <a:defRPr/>
             </a:lvl6pPr>
@@ -5379,7 +5379,7 @@
               <a:buClr>
                 <a:schemeClr val="accent2"/>
               </a:buClr>
-              <a:buSzPts val="1800"/>
+              <a:buSzPts val="2400"/>
               <a:buNone/>
               <a:defRPr/>
             </a:lvl7pPr>
@@ -5396,7 +5396,7 @@
               <a:buClr>
                 <a:schemeClr val="accent2"/>
               </a:buClr>
-              <a:buSzPts val="1800"/>
+              <a:buSzPts val="2400"/>
               <a:buNone/>
               <a:defRPr/>
             </a:lvl8pPr>
@@ -5413,7 +5413,7 @@
               <a:buClr>
                 <a:schemeClr val="accent2"/>
               </a:buClr>
-              <a:buSzPts val="1800"/>
+              <a:buSzPts val="2400"/>
               <a:buNone/>
               <a:defRPr/>
             </a:lvl9pPr>
@@ -5431,8 +5431,8 @@
         </p:nvSpPr>
         <p:spPr>
           <a:xfrm>
-            <a:off x="2343150" y="4767263"/>
-            <a:ext cx="2171700" cy="273844"/>
+            <a:off x="3124122" y="6356192"/>
+            <a:ext cx="2895528" cy="365116"/>
           </a:xfrm>
           <a:prstGeom prst="rect">
             <a:avLst/>
@@ -5443,7 +5443,7 @@
           </a:ln>
         </p:spPr>
         <p:txBody>
-          <a:bodyPr anchorCtr="0" anchor="ctr" bIns="45700" lIns="91425" spcFirstLastPara="1" rIns="91425" wrap="square" tIns="45700">
+          <a:bodyPr anchorCtr="0" anchor="ctr" bIns="60932" lIns="121897" spcFirstLastPara="1" rIns="121897" wrap="square" tIns="60932">
             <a:noAutofit/>
           </a:bodyPr>
           <a:lstStyle>
@@ -5460,7 +5460,7 @@
               <a:buClr>
                 <a:srgbClr val="888888"/>
               </a:buClr>
-              <a:buSzPts val="1800"/>
+              <a:buSzPts val="2400"/>
               <a:buNone/>
               <a:defRPr/>
             </a:lvl1pPr>
@@ -5477,7 +5477,7 @@
               <a:buClr>
                 <a:schemeClr val="accent2"/>
               </a:buClr>
-              <a:buSzPts val="1800"/>
+              <a:buSzPts val="2400"/>
               <a:buNone/>
               <a:defRPr/>
             </a:lvl2pPr>
@@ -5494,7 +5494,7 @@
               <a:buClr>
                 <a:schemeClr val="accent2"/>
               </a:buClr>
-              <a:buSzPts val="1800"/>
+              <a:buSzPts val="2400"/>
               <a:buNone/>
               <a:defRPr/>
             </a:lvl3pPr>
@@ -5511,7 +5511,7 @@
               <a:buClr>
                 <a:schemeClr val="accent2"/>
               </a:buClr>
-              <a:buSzPts val="1800"/>
+              <a:buSzPts val="2400"/>
               <a:buNone/>
               <a:defRPr/>
             </a:lvl4pPr>
@@ -5528,7 +5528,7 @@
               <a:buClr>
                 <a:schemeClr val="accent2"/>
               </a:buClr>
-              <a:buSzPts val="1800"/>
+              <a:buSzPts val="2400"/>
               <a:buNone/>
               <a:defRPr/>
             </a:lvl5pPr>
@@ -5545,7 +5545,7 @@
               <a:buClr>
                 <a:schemeClr val="accent2"/>
               </a:buClr>
-              <a:buSzPts val="1800"/>
+              <a:buSzPts val="2400"/>
               <a:buNone/>
               <a:defRPr/>
             </a:lvl6pPr>
@@ -5562,7 +5562,7 @@
               <a:buClr>
                 <a:schemeClr val="accent2"/>
               </a:buClr>
-              <a:buSzPts val="1800"/>
+              <a:buSzPts val="2400"/>
               <a:buNone/>
               <a:defRPr/>
             </a:lvl7pPr>
@@ -5579,7 +5579,7 @@
               <a:buClr>
                 <a:schemeClr val="accent2"/>
               </a:buClr>
-              <a:buSzPts val="1800"/>
+              <a:buSzPts val="2400"/>
               <a:buNone/>
               <a:defRPr/>
             </a:lvl8pPr>
@@ -5596,7 +5596,7 @@
               <a:buClr>
                 <a:schemeClr val="accent2"/>
               </a:buClr>
-              <a:buSzPts val="1800"/>
+              <a:buSzPts val="2400"/>
               <a:buNone/>
               <a:defRPr/>
             </a:lvl9pPr>
@@ -5614,8 +5614,8 @@
         </p:nvSpPr>
         <p:spPr>
           <a:xfrm>
-            <a:off x="4914900" y="4767263"/>
-            <a:ext cx="1600200" cy="273844"/>
+            <a:off x="6553036" y="6356192"/>
+            <a:ext cx="2133547" cy="365116"/>
           </a:xfrm>
           <a:prstGeom prst="rect">
             <a:avLst/>
@@ -5626,7 +5626,7 @@
           </a:ln>
         </p:spPr>
         <p:txBody>
-          <a:bodyPr anchorCtr="0" anchor="ctr" bIns="45700" lIns="91425" spcFirstLastPara="1" rIns="91425" wrap="square" tIns="45700">
+          <a:bodyPr anchorCtr="0" anchor="ctr" bIns="60932" lIns="121897" spcFirstLastPara="1" rIns="121897" wrap="square" tIns="60932">
             <a:noAutofit/>
           </a:bodyPr>
           <a:lstStyle>
@@ -5643,7 +5643,7 @@
               <a:buClr>
                 <a:srgbClr val="888888"/>
               </a:buClr>
-              <a:buSzPts val="900"/>
+              <a:buSzPts val="1200"/>
               <a:buFont typeface="Calibri"/>
               <a:buNone/>
               <a:defRPr/>
@@ -5661,7 +5661,7 @@
               <a:buClr>
                 <a:srgbClr val="888888"/>
               </a:buClr>
-              <a:buSzPts val="900"/>
+              <a:buSzPts val="1200"/>
               <a:buFont typeface="Calibri"/>
               <a:buNone/>
               <a:defRPr/>
@@ -5679,7 +5679,7 @@
               <a:buClr>
                 <a:srgbClr val="888888"/>
               </a:buClr>
-              <a:buSzPts val="900"/>
+              <a:buSzPts val="1200"/>
               <a:buFont typeface="Calibri"/>
               <a:buNone/>
               <a:defRPr/>
@@ -5697,7 +5697,7 @@
               <a:buClr>
                 <a:srgbClr val="888888"/>
               </a:buClr>
-              <a:buSzPts val="900"/>
+              <a:buSzPts val="1200"/>
               <a:buFont typeface="Calibri"/>
               <a:buNone/>
               <a:defRPr/>
@@ -5715,7 +5715,7 @@
               <a:buClr>
                 <a:srgbClr val="888888"/>
               </a:buClr>
-              <a:buSzPts val="900"/>
+              <a:buSzPts val="1200"/>
               <a:buFont typeface="Calibri"/>
               <a:buNone/>
               <a:defRPr/>
@@ -5733,7 +5733,7 @@
               <a:buClr>
                 <a:srgbClr val="888888"/>
               </a:buClr>
-              <a:buSzPts val="900"/>
+              <a:buSzPts val="1200"/>
               <a:buFont typeface="Calibri"/>
               <a:buNone/>
               <a:defRPr/>
@@ -5751,7 +5751,7 @@
               <a:buClr>
                 <a:srgbClr val="888888"/>
               </a:buClr>
-              <a:buSzPts val="900"/>
+              <a:buSzPts val="1200"/>
               <a:buFont typeface="Calibri"/>
               <a:buNone/>
               <a:defRPr/>
@@ -5769,7 +5769,7 @@
               <a:buClr>
                 <a:srgbClr val="888888"/>
               </a:buClr>
-              <a:buSzPts val="900"/>
+              <a:buSzPts val="1200"/>
               <a:buFont typeface="Calibri"/>
               <a:buNone/>
               <a:defRPr/>
@@ -5787,7 +5787,7 @@
               <a:buClr>
                 <a:srgbClr val="888888"/>
               </a:buClr>
-              <a:buSzPts val="900"/>
+              <a:buSzPts val="1200"/>
               <a:buFont typeface="Calibri"/>
               <a:buNone/>
               <a:defRPr/>
@@ -5846,8 +5846,8 @@
         </p:nvSpPr>
         <p:spPr>
           <a:xfrm>
-            <a:off x="541735" y="3305176"/>
-            <a:ext cx="5829300" cy="1021556"/>
+            <a:off x="722295" y="4406791"/>
+            <a:ext cx="7772206" cy="1362041"/>
           </a:xfrm>
           <a:prstGeom prst="rect">
             <a:avLst/>
@@ -5858,7 +5858,7 @@
           </a:ln>
         </p:spPr>
         <p:txBody>
-          <a:bodyPr anchorCtr="0" anchor="t" bIns="45700" lIns="91425" spcFirstLastPara="1" rIns="91425" wrap="square" tIns="45700">
+          <a:bodyPr anchorCtr="0" anchor="t" bIns="60932" lIns="121897" spcFirstLastPara="1" rIns="121897" wrap="square" tIns="60932">
             <a:normAutofit/>
           </a:bodyPr>
           <a:lstStyle>
@@ -5872,10 +5872,10 @@
               <a:buClr>
                 <a:schemeClr val="dk1"/>
               </a:buClr>
-              <a:buSzPts val="3000"/>
+              <a:buSzPts val="4000"/>
               <a:buFont typeface="Calibri"/>
               <a:buNone/>
-              <a:defRPr b="1" sz="3000" cap="none"/>
+              <a:defRPr b="1" sz="4000" cap="none"/>
             </a:lvl1pPr>
             <a:lvl2pPr lvl="1">
               <a:spcBef>
@@ -5884,7 +5884,7 @@
               <a:spcAft>
                 <a:spcPts val="0"/>
               </a:spcAft>
-              <a:buSzPts val="1400"/>
+              <a:buSzPts val="1867"/>
               <a:buNone/>
               <a:defRPr/>
             </a:lvl2pPr>
@@ -5895,7 +5895,7 @@
               <a:spcAft>
                 <a:spcPts val="0"/>
               </a:spcAft>
-              <a:buSzPts val="1400"/>
+              <a:buSzPts val="1867"/>
               <a:buNone/>
               <a:defRPr/>
             </a:lvl3pPr>
@@ -5906,7 +5906,7 @@
               <a:spcAft>
                 <a:spcPts val="0"/>
               </a:spcAft>
-              <a:buSzPts val="1400"/>
+              <a:buSzPts val="1867"/>
               <a:buNone/>
               <a:defRPr/>
             </a:lvl4pPr>
@@ -5917,7 +5917,7 @@
               <a:spcAft>
                 <a:spcPts val="0"/>
               </a:spcAft>
-              <a:buSzPts val="1400"/>
+              <a:buSzPts val="1867"/>
               <a:buNone/>
               <a:defRPr/>
             </a:lvl5pPr>
@@ -5928,7 +5928,7 @@
               <a:spcAft>
                 <a:spcPts val="0"/>
               </a:spcAft>
-              <a:buSzPts val="1400"/>
+              <a:buSzPts val="1867"/>
               <a:buNone/>
               <a:defRPr/>
             </a:lvl6pPr>
@@ -5939,7 +5939,7 @@
               <a:spcAft>
                 <a:spcPts val="0"/>
               </a:spcAft>
-              <a:buSzPts val="1400"/>
+              <a:buSzPts val="1867"/>
               <a:buNone/>
               <a:defRPr/>
             </a:lvl7pPr>
@@ -5950,7 +5950,7 @@
               <a:spcAft>
                 <a:spcPts val="0"/>
               </a:spcAft>
-              <a:buSzPts val="1400"/>
+              <a:buSzPts val="1867"/>
               <a:buNone/>
               <a:defRPr/>
             </a:lvl8pPr>
@@ -5961,7 +5961,7 @@
               <a:spcAft>
                 <a:spcPts val="0"/>
               </a:spcAft>
-              <a:buSzPts val="1400"/>
+              <a:buSzPts val="1867"/>
               <a:buNone/>
               <a:defRPr/>
             </a:lvl9pPr>
@@ -5979,8 +5979,8 @@
         </p:nvSpPr>
         <p:spPr>
           <a:xfrm>
-            <a:off x="541735" y="2180035"/>
-            <a:ext cx="5829300" cy="1125140"/>
+            <a:off x="722295" y="2906641"/>
+            <a:ext cx="7772206" cy="1500149"/>
           </a:xfrm>
           <a:prstGeom prst="rect">
             <a:avLst/>
@@ -5991,13 +5991,13 @@
           </a:ln>
         </p:spPr>
         <p:txBody>
-          <a:bodyPr anchorCtr="0" anchor="b" bIns="45700" lIns="91425" spcFirstLastPara="1" rIns="91425" wrap="square" tIns="45700">
+          <a:bodyPr anchorCtr="0" anchor="b" bIns="60932" lIns="121897" spcFirstLastPara="1" rIns="121897" wrap="square" tIns="60932">
             <a:normAutofit/>
           </a:bodyPr>
           <a:lstStyle>
             <a:lvl1pPr indent="-228600" lvl="0" marL="457200" algn="l">
               <a:spcBef>
-                <a:spcPts val="300"/>
+                <a:spcPts val="400"/>
               </a:spcBef>
               <a:spcAft>
                 <a:spcPts val="0"/>
@@ -6005,9 +6005,9 @@
               <a:buClr>
                 <a:srgbClr val="888888"/>
               </a:buClr>
-              <a:buSzPts val="1500"/>
-              <a:buNone/>
-              <a:defRPr sz="1500">
+              <a:buSzPts val="2000"/>
+              <a:buNone/>
+              <a:defRPr sz="2000">
                 <a:solidFill>
                   <a:srgbClr val="888888"/>
                 </a:solidFill>
@@ -6015,7 +6015,7 @@
             </a:lvl1pPr>
             <a:lvl2pPr indent="-228600" lvl="1" marL="914400" algn="l">
               <a:spcBef>
-                <a:spcPts val="270"/>
+                <a:spcPts val="360"/>
               </a:spcBef>
               <a:spcAft>
                 <a:spcPts val="0"/>
@@ -6023,9 +6023,9 @@
               <a:buClr>
                 <a:srgbClr val="888888"/>
               </a:buClr>
-              <a:buSzPts val="1350"/>
-              <a:buNone/>
-              <a:defRPr sz="1350">
+              <a:buSzPts val="1800"/>
+              <a:buNone/>
+              <a:defRPr sz="1800">
                 <a:solidFill>
                   <a:srgbClr val="888888"/>
                 </a:solidFill>
@@ -6033,7 +6033,7 @@
             </a:lvl2pPr>
             <a:lvl3pPr indent="-228600" lvl="2" marL="1371600" algn="l">
               <a:spcBef>
-                <a:spcPts val="240"/>
+                <a:spcPts val="320"/>
               </a:spcBef>
               <a:spcAft>
                 <a:spcPts val="0"/>
@@ -6041,9 +6041,9 @@
               <a:buClr>
                 <a:srgbClr val="888888"/>
               </a:buClr>
-              <a:buSzPts val="1200"/>
-              <a:buNone/>
-              <a:defRPr sz="1200">
+              <a:buSzPts val="1600"/>
+              <a:buNone/>
+              <a:defRPr sz="1600">
                 <a:solidFill>
                   <a:srgbClr val="888888"/>
                 </a:solidFill>
@@ -6051,7 +6051,7 @@
             </a:lvl3pPr>
             <a:lvl4pPr indent="-228600" lvl="3" marL="1828800" algn="l">
               <a:spcBef>
-                <a:spcPts val="210"/>
+                <a:spcPts val="280"/>
               </a:spcBef>
               <a:spcAft>
                 <a:spcPts val="0"/>
@@ -6059,9 +6059,9 @@
               <a:buClr>
                 <a:srgbClr val="888888"/>
               </a:buClr>
-              <a:buSzPts val="1050"/>
-              <a:buNone/>
-              <a:defRPr sz="1050">
+              <a:buSzPts val="1400"/>
+              <a:buNone/>
+              <a:defRPr sz="1400">
                 <a:solidFill>
                   <a:srgbClr val="888888"/>
                 </a:solidFill>
@@ -6069,7 +6069,7 @@
             </a:lvl4pPr>
             <a:lvl5pPr indent="-228600" lvl="4" marL="2286000" algn="l">
               <a:spcBef>
-                <a:spcPts val="210"/>
+                <a:spcPts val="280"/>
               </a:spcBef>
               <a:spcAft>
                 <a:spcPts val="0"/>
@@ -6077,9 +6077,9 @@
               <a:buClr>
                 <a:srgbClr val="888888"/>
               </a:buClr>
-              <a:buSzPts val="1050"/>
-              <a:buNone/>
-              <a:defRPr sz="1050">
+              <a:buSzPts val="1400"/>
+              <a:buNone/>
+              <a:defRPr sz="1400">
                 <a:solidFill>
                   <a:srgbClr val="888888"/>
                 </a:solidFill>
@@ -6087,7 +6087,7 @@
             </a:lvl5pPr>
             <a:lvl6pPr indent="-228600" lvl="5" marL="2743200" algn="l">
               <a:spcBef>
-                <a:spcPts val="210"/>
+                <a:spcPts val="280"/>
               </a:spcBef>
               <a:spcAft>
                 <a:spcPts val="0"/>
@@ -6095,9 +6095,9 @@
               <a:buClr>
                 <a:srgbClr val="888888"/>
               </a:buClr>
-              <a:buSzPts val="1050"/>
-              <a:buNone/>
-              <a:defRPr sz="1050">
+              <a:buSzPts val="1400"/>
+              <a:buNone/>
+              <a:defRPr sz="1400">
                 <a:solidFill>
                   <a:srgbClr val="888888"/>
                 </a:solidFill>
@@ -6105,7 +6105,7 @@
             </a:lvl6pPr>
             <a:lvl7pPr indent="-228600" lvl="6" marL="3200400" algn="l">
               <a:spcBef>
-                <a:spcPts val="210"/>
+                <a:spcPts val="280"/>
               </a:spcBef>
               <a:spcAft>
                 <a:spcPts val="0"/>
@@ -6113,9 +6113,9 @@
               <a:buClr>
                 <a:srgbClr val="888888"/>
               </a:buClr>
-              <a:buSzPts val="1050"/>
-              <a:buNone/>
-              <a:defRPr sz="1050">
+              <a:buSzPts val="1400"/>
+              <a:buNone/>
+              <a:defRPr sz="1400">
                 <a:solidFill>
                   <a:srgbClr val="888888"/>
                 </a:solidFill>
@@ -6123,7 +6123,7 @@
             </a:lvl7pPr>
             <a:lvl8pPr indent="-228600" lvl="7" marL="3657600" algn="l">
               <a:spcBef>
-                <a:spcPts val="210"/>
+                <a:spcPts val="280"/>
               </a:spcBef>
               <a:spcAft>
                 <a:spcPts val="0"/>
@@ -6131,9 +6131,9 @@
               <a:buClr>
                 <a:srgbClr val="888888"/>
               </a:buClr>
-              <a:buSzPts val="1050"/>
-              <a:buNone/>
-              <a:defRPr sz="1050">
+              <a:buSzPts val="1400"/>
+              <a:buNone/>
+              <a:defRPr sz="1400">
                 <a:solidFill>
                   <a:srgbClr val="888888"/>
                 </a:solidFill>
@@ -6141,7 +6141,7 @@
             </a:lvl8pPr>
             <a:lvl9pPr indent="-228600" lvl="8" marL="4114800" algn="l">
               <a:spcBef>
-                <a:spcPts val="210"/>
+                <a:spcPts val="280"/>
               </a:spcBef>
               <a:spcAft>
                 <a:spcPts val="0"/>
@@ -6149,9 +6149,9 @@
               <a:buClr>
                 <a:srgbClr val="888888"/>
               </a:buClr>
-              <a:buSzPts val="1050"/>
-              <a:buNone/>
-              <a:defRPr sz="1050">
+              <a:buSzPts val="1400"/>
+              <a:buNone/>
+              <a:defRPr sz="1400">
                 <a:solidFill>
                   <a:srgbClr val="888888"/>
                 </a:solidFill>
@@ -6171,8 +6171,8 @@
         </p:nvSpPr>
         <p:spPr>
           <a:xfrm>
-            <a:off x="342900" y="4767263"/>
-            <a:ext cx="1600200" cy="273844"/>
+            <a:off x="457189" y="6356192"/>
+            <a:ext cx="2133547" cy="365116"/>
           </a:xfrm>
           <a:prstGeom prst="rect">
             <a:avLst/>
@@ -6183,7 +6183,7 @@
           </a:ln>
         </p:spPr>
         <p:txBody>
-          <a:bodyPr anchorCtr="0" anchor="ctr" bIns="45700" lIns="91425" spcFirstLastPara="1" rIns="91425" wrap="square" tIns="45700">
+          <a:bodyPr anchorCtr="0" anchor="ctr" bIns="60932" lIns="121897" spcFirstLastPara="1" rIns="121897" wrap="square" tIns="60932">
             <a:noAutofit/>
           </a:bodyPr>
           <a:lstStyle>
@@ -6200,7 +6200,7 @@
               <a:buClr>
                 <a:srgbClr val="888888"/>
               </a:buClr>
-              <a:buSzPts val="1800"/>
+              <a:buSzPts val="2400"/>
               <a:buNone/>
               <a:defRPr/>
             </a:lvl1pPr>
@@ -6217,7 +6217,7 @@
               <a:buClr>
                 <a:schemeClr val="accent2"/>
               </a:buClr>
-              <a:buSzPts val="1800"/>
+              <a:buSzPts val="2400"/>
               <a:buNone/>
               <a:defRPr/>
             </a:lvl2pPr>
@@ -6234,7 +6234,7 @@
               <a:buClr>
                 <a:schemeClr val="accent2"/>
               </a:buClr>
-              <a:buSzPts val="1800"/>
+              <a:buSzPts val="2400"/>
               <a:buNone/>
               <a:defRPr/>
             </a:lvl3pPr>
@@ -6251,7 +6251,7 @@
               <a:buClr>
                 <a:schemeClr val="accent2"/>
               </a:buClr>
-              <a:buSzPts val="1800"/>
+              <a:buSzPts val="2400"/>
               <a:buNone/>
               <a:defRPr/>
             </a:lvl4pPr>
@@ -6268,7 +6268,7 @@
               <a:buClr>
                 <a:schemeClr val="accent2"/>
               </a:buClr>
-              <a:buSzPts val="1800"/>
+              <a:buSzPts val="2400"/>
               <a:buNone/>
               <a:defRPr/>
             </a:lvl5pPr>
@@ -6285,7 +6285,7 @@
               <a:buClr>
                 <a:schemeClr val="accent2"/>
               </a:buClr>
-              <a:buSzPts val="1800"/>
+              <a:buSzPts val="2400"/>
               <a:buNone/>
               <a:defRPr/>
             </a:lvl6pPr>
@@ -6302,7 +6302,7 @@
               <a:buClr>
                 <a:schemeClr val="accent2"/>
               </a:buClr>
-              <a:buSzPts val="1800"/>
+              <a:buSzPts val="2400"/>
               <a:buNone/>
               <a:defRPr/>
             </a:lvl7pPr>
@@ -6319,7 +6319,7 @@
               <a:buClr>
                 <a:schemeClr val="accent2"/>
               </a:buClr>
-              <a:buSzPts val="1800"/>
+              <a:buSzPts val="2400"/>
               <a:buNone/>
               <a:defRPr/>
             </a:lvl8pPr>
@@ -6336,7 +6336,7 @@
               <a:buClr>
                 <a:schemeClr val="accent2"/>
               </a:buClr>
-              <a:buSzPts val="1800"/>
+              <a:buSzPts val="2400"/>
               <a:buNone/>
               <a:defRPr/>
             </a:lvl9pPr>
@@ -6354,8 +6354,8 @@
         </p:nvSpPr>
         <p:spPr>
           <a:xfrm>
-            <a:off x="2343150" y="4767263"/>
-            <a:ext cx="2171700" cy="273844"/>
+            <a:off x="3124122" y="6356192"/>
+            <a:ext cx="2895528" cy="365116"/>
           </a:xfrm>
           <a:prstGeom prst="rect">
             <a:avLst/>
@@ -6366,7 +6366,7 @@
           </a:ln>
         </p:spPr>
         <p:txBody>
-          <a:bodyPr anchorCtr="0" anchor="ctr" bIns="45700" lIns="91425" spcFirstLastPara="1" rIns="91425" wrap="square" tIns="45700">
+          <a:bodyPr anchorCtr="0" anchor="ctr" bIns="60932" lIns="121897" spcFirstLastPara="1" rIns="121897" wrap="square" tIns="60932">
             <a:noAutofit/>
           </a:bodyPr>
           <a:lstStyle>
@@ -6383,7 +6383,7 @@
               <a:buClr>
                 <a:srgbClr val="888888"/>
               </a:buClr>
-              <a:buSzPts val="1800"/>
+              <a:buSzPts val="2400"/>
               <a:buNone/>
               <a:defRPr/>
             </a:lvl1pPr>
@@ -6400,7 +6400,7 @@
               <a:buClr>
                 <a:schemeClr val="accent2"/>
               </a:buClr>
-              <a:buSzPts val="1800"/>
+              <a:buSzPts val="2400"/>
               <a:buNone/>
               <a:defRPr/>
             </a:lvl2pPr>
@@ -6417,7 +6417,7 @@
               <a:buClr>
                 <a:schemeClr val="accent2"/>
               </a:buClr>
-              <a:buSzPts val="1800"/>
+              <a:buSzPts val="2400"/>
               <a:buNone/>
               <a:defRPr/>
             </a:lvl3pPr>
@@ -6434,7 +6434,7 @@
               <a:buClr>
                 <a:schemeClr val="accent2"/>
               </a:buClr>
-              <a:buSzPts val="1800"/>
+              <a:buSzPts val="2400"/>
               <a:buNone/>
               <a:defRPr/>
             </a:lvl4pPr>
@@ -6451,7 +6451,7 @@
               <a:buClr>
                 <a:schemeClr val="accent2"/>
               </a:buClr>
-              <a:buSzPts val="1800"/>
+              <a:buSzPts val="2400"/>
               <a:buNone/>
               <a:defRPr/>
             </a:lvl5pPr>
@@ -6468,7 +6468,7 @@
               <a:buClr>
                 <a:schemeClr val="accent2"/>
               </a:buClr>
-              <a:buSzPts val="1800"/>
+              <a:buSzPts val="2400"/>
               <a:buNone/>
               <a:defRPr/>
             </a:lvl6pPr>
@@ -6485,7 +6485,7 @@
               <a:buClr>
                 <a:schemeClr val="accent2"/>
               </a:buClr>
-              <a:buSzPts val="1800"/>
+              <a:buSzPts val="2400"/>
               <a:buNone/>
               <a:defRPr/>
             </a:lvl7pPr>
@@ -6502,7 +6502,7 @@
               <a:buClr>
                 <a:schemeClr val="accent2"/>
               </a:buClr>
-              <a:buSzPts val="1800"/>
+              <a:buSzPts val="2400"/>
               <a:buNone/>
               <a:defRPr/>
             </a:lvl8pPr>
@@ -6519,7 +6519,7 @@
               <a:buClr>
                 <a:schemeClr val="accent2"/>
               </a:buClr>
-              <a:buSzPts val="1800"/>
+              <a:buSzPts val="2400"/>
               <a:buNone/>
               <a:defRPr/>
             </a:lvl9pPr>
@@ -6537,8 +6537,8 @@
         </p:nvSpPr>
         <p:spPr>
           <a:xfrm>
-            <a:off x="4914900" y="4767263"/>
-            <a:ext cx="1600200" cy="273844"/>
+            <a:off x="6553036" y="6356192"/>
+            <a:ext cx="2133547" cy="365116"/>
           </a:xfrm>
           <a:prstGeom prst="rect">
             <a:avLst/>
@@ -6549,7 +6549,7 @@
           </a:ln>
         </p:spPr>
         <p:txBody>
-          <a:bodyPr anchorCtr="0" anchor="ctr" bIns="45700" lIns="91425" spcFirstLastPara="1" rIns="91425" wrap="square" tIns="45700">
+          <a:bodyPr anchorCtr="0" anchor="ctr" bIns="60932" lIns="121897" spcFirstLastPara="1" rIns="121897" wrap="square" tIns="60932">
             <a:noAutofit/>
           </a:bodyPr>
           <a:lstStyle>
@@ -6566,7 +6566,7 @@
               <a:buClr>
                 <a:srgbClr val="888888"/>
               </a:buClr>
-              <a:buSzPts val="900"/>
+              <a:buSzPts val="1200"/>
               <a:buFont typeface="Calibri"/>
               <a:buNone/>
               <a:defRPr/>
@@ -6584,7 +6584,7 @@
               <a:buClr>
                 <a:srgbClr val="888888"/>
               </a:buClr>
-              <a:buSzPts val="900"/>
+              <a:buSzPts val="1200"/>
               <a:buFont typeface="Calibri"/>
               <a:buNone/>
               <a:defRPr/>
@@ -6602,7 +6602,7 @@
               <a:buClr>
                 <a:srgbClr val="888888"/>
               </a:buClr>
-              <a:buSzPts val="900"/>
+              <a:buSzPts val="1200"/>
               <a:buFont typeface="Calibri"/>
               <a:buNone/>
               <a:defRPr/>
@@ -6620,7 +6620,7 @@
               <a:buClr>
                 <a:srgbClr val="888888"/>
               </a:buClr>
-              <a:buSzPts val="900"/>
+              <a:buSzPts val="1200"/>
               <a:buFont typeface="Calibri"/>
               <a:buNone/>
               <a:defRPr/>
@@ -6638,7 +6638,7 @@
               <a:buClr>
                 <a:srgbClr val="888888"/>
               </a:buClr>
-              <a:buSzPts val="900"/>
+              <a:buSzPts val="1200"/>
               <a:buFont typeface="Calibri"/>
               <a:buNone/>
               <a:defRPr/>
@@ -6656,7 +6656,7 @@
               <a:buClr>
                 <a:srgbClr val="888888"/>
               </a:buClr>
-              <a:buSzPts val="900"/>
+              <a:buSzPts val="1200"/>
               <a:buFont typeface="Calibri"/>
               <a:buNone/>
               <a:defRPr/>
@@ -6674,7 +6674,7 @@
               <a:buClr>
                 <a:srgbClr val="888888"/>
               </a:buClr>
-              <a:buSzPts val="900"/>
+              <a:buSzPts val="1200"/>
               <a:buFont typeface="Calibri"/>
               <a:buNone/>
               <a:defRPr/>
@@ -6692,7 +6692,7 @@
               <a:buClr>
                 <a:srgbClr val="888888"/>
               </a:buClr>
-              <a:buSzPts val="900"/>
+              <a:buSzPts val="1200"/>
               <a:buFont typeface="Calibri"/>
               <a:buNone/>
               <a:defRPr/>
@@ -6710,7 +6710,7 @@
               <a:buClr>
                 <a:srgbClr val="888888"/>
               </a:buClr>
-              <a:buSzPts val="900"/>
+              <a:buSzPts val="1200"/>
               <a:buFont typeface="Calibri"/>
               <a:buNone/>
               <a:defRPr/>
@@ -6939,8 +6939,8 @@
         </p:nvSpPr>
         <p:spPr>
           <a:xfrm>
-            <a:off x="342900" y="205978"/>
-            <a:ext cx="6172200" cy="857250"/>
+            <a:off x="457189" y="274630"/>
+            <a:ext cx="8229394" cy="1142971"/>
           </a:xfrm>
           <a:prstGeom prst="rect">
             <a:avLst/>
@@ -6951,7 +6951,7 @@
           </a:ln>
         </p:spPr>
         <p:txBody>
-          <a:bodyPr anchorCtr="0" anchor="ctr" bIns="45700" lIns="91425" spcFirstLastPara="1" rIns="91425" wrap="square" tIns="45700">
+          <a:bodyPr anchorCtr="0" anchor="ctr" bIns="60932" lIns="121897" spcFirstLastPara="1" rIns="121897" wrap="square" tIns="60932">
             <a:normAutofit/>
           </a:bodyPr>
           <a:lstStyle>
@@ -6965,7 +6965,7 @@
               <a:buClr>
                 <a:schemeClr val="dk1"/>
               </a:buClr>
-              <a:buSzPts val="1800"/>
+              <a:buSzPts val="2400"/>
               <a:buNone/>
               <a:defRPr/>
             </a:lvl1pPr>
@@ -6976,7 +6976,7 @@
               <a:spcAft>
                 <a:spcPts val="0"/>
               </a:spcAft>
-              <a:buSzPts val="1400"/>
+              <a:buSzPts val="1867"/>
               <a:buNone/>
               <a:defRPr/>
             </a:lvl2pPr>
@@ -6987,7 +6987,7 @@
               <a:spcAft>
                 <a:spcPts val="0"/>
               </a:spcAft>
-              <a:buSzPts val="1400"/>
+              <a:buSzPts val="1867"/>
               <a:buNone/>
               <a:defRPr/>
             </a:lvl3pPr>
@@ -6998,7 +6998,7 @@
               <a:spcAft>
                 <a:spcPts val="0"/>
               </a:spcAft>
-              <a:buSzPts val="1400"/>
+              <a:buSzPts val="1867"/>
               <a:buNone/>
               <a:defRPr/>
             </a:lvl4pPr>
@@ -7009,7 +7009,7 @@
               <a:spcAft>
                 <a:spcPts val="0"/>
               </a:spcAft>
-              <a:buSzPts val="1400"/>
+              <a:buSzPts val="1867"/>
               <a:buNone/>
               <a:defRPr/>
             </a:lvl5pPr>
@@ -7020,7 +7020,7 @@
               <a:spcAft>
                 <a:spcPts val="0"/>
               </a:spcAft>
-              <a:buSzPts val="1400"/>
+              <a:buSzPts val="1867"/>
               <a:buNone/>
               <a:defRPr/>
             </a:lvl6pPr>
@@ -7031,7 +7031,7 @@
               <a:spcAft>
                 <a:spcPts val="0"/>
               </a:spcAft>
-              <a:buSzPts val="1400"/>
+              <a:buSzPts val="1867"/>
               <a:buNone/>
               <a:defRPr/>
             </a:lvl7pPr>
@@ -7042,7 +7042,7 @@
               <a:spcAft>
                 <a:spcPts val="0"/>
               </a:spcAft>
-              <a:buSzPts val="1400"/>
+              <a:buSzPts val="1867"/>
               <a:buNone/>
               <a:defRPr/>
             </a:lvl8pPr>
@@ -7053,7 +7053,7 @@
               <a:spcAft>
                 <a:spcPts val="0"/>
               </a:spcAft>
-              <a:buSzPts val="1400"/>
+              <a:buSzPts val="1867"/>
               <a:buNone/>
               <a:defRPr/>
             </a:lvl9pPr>
@@ -7071,8 +7071,8 @@
         </p:nvSpPr>
         <p:spPr>
           <a:xfrm>
-            <a:off x="342900" y="1200151"/>
-            <a:ext cx="3028950" cy="3394472"/>
+            <a:off x="457189" y="1600161"/>
+            <a:ext cx="4038499" cy="4525849"/>
           </a:xfrm>
           <a:prstGeom prst="rect">
             <a:avLst/>
@@ -7083,13 +7083,13 @@
           </a:ln>
         </p:spPr>
         <p:txBody>
-          <a:bodyPr anchorCtr="0" anchor="t" bIns="45700" lIns="91425" spcFirstLastPara="1" rIns="91425" wrap="square" tIns="45700">
+          <a:bodyPr anchorCtr="0" anchor="t" bIns="60932" lIns="121897" spcFirstLastPara="1" rIns="121897" wrap="square" tIns="60932">
             <a:normAutofit/>
           </a:bodyPr>
           <a:lstStyle>
             <a:lvl1pPr indent="-361950" lvl="0" marL="457200" algn="l">
               <a:spcBef>
-                <a:spcPts val="420"/>
+                <a:spcPts val="560"/>
               </a:spcBef>
               <a:spcAft>
                 <a:spcPts val="0"/>
@@ -7097,11 +7097,39 @@
               <a:buClr>
                 <a:schemeClr val="dk1"/>
               </a:buClr>
-              <a:buSzPts val="2100"/>
+              <a:buSzPts val="2800"/>
               <a:buChar char="•"/>
-              <a:defRPr sz="2100"/>
+              <a:defRPr sz="2800"/>
             </a:lvl1pPr>
             <a:lvl2pPr indent="-342900" lvl="1" marL="914400" algn="l">
+              <a:spcBef>
+                <a:spcPts val="480"/>
+              </a:spcBef>
+              <a:spcAft>
+                <a:spcPts val="0"/>
+              </a:spcAft>
+              <a:buClr>
+                <a:schemeClr val="dk1"/>
+              </a:buClr>
+              <a:buSzPts val="2400"/>
+              <a:buChar char="–"/>
+              <a:defRPr sz="2400"/>
+            </a:lvl2pPr>
+            <a:lvl3pPr indent="-323850" lvl="2" marL="1371600" algn="l">
+              <a:spcBef>
+                <a:spcPts val="400"/>
+              </a:spcBef>
+              <a:spcAft>
+                <a:spcPts val="0"/>
+              </a:spcAft>
+              <a:buClr>
+                <a:schemeClr val="dk1"/>
+              </a:buClr>
+              <a:buSzPts val="2000"/>
+              <a:buChar char="•"/>
+              <a:defRPr sz="2000"/>
+            </a:lvl3pPr>
+            <a:lvl4pPr indent="-314325" lvl="3" marL="1828800" algn="l">
               <a:spcBef>
                 <a:spcPts val="360"/>
               </a:spcBef>
@@ -7114,38 +7142,10 @@
               <a:buSzPts val="1800"/>
               <a:buChar char="–"/>
               <a:defRPr sz="1800"/>
-            </a:lvl2pPr>
-            <a:lvl3pPr indent="-323850" lvl="2" marL="1371600" algn="l">
-              <a:spcBef>
-                <a:spcPts val="300"/>
-              </a:spcBef>
-              <a:spcAft>
-                <a:spcPts val="0"/>
-              </a:spcAft>
-              <a:buClr>
-                <a:schemeClr val="dk1"/>
-              </a:buClr>
-              <a:buSzPts val="1500"/>
-              <a:buChar char="•"/>
-              <a:defRPr sz="1500"/>
-            </a:lvl3pPr>
-            <a:lvl4pPr indent="-314325" lvl="3" marL="1828800" algn="l">
-              <a:spcBef>
-                <a:spcPts val="270"/>
-              </a:spcBef>
-              <a:spcAft>
-                <a:spcPts val="0"/>
-              </a:spcAft>
-              <a:buClr>
-                <a:schemeClr val="dk1"/>
-              </a:buClr>
-              <a:buSzPts val="1350"/>
-              <a:buChar char="–"/>
-              <a:defRPr sz="1350"/>
             </a:lvl4pPr>
             <a:lvl5pPr indent="-314325" lvl="4" marL="2286000" algn="l">
               <a:spcBef>
-                <a:spcPts val="270"/>
+                <a:spcPts val="360"/>
               </a:spcBef>
               <a:spcAft>
                 <a:spcPts val="0"/>
@@ -7153,13 +7153,13 @@
               <a:buClr>
                 <a:schemeClr val="dk1"/>
               </a:buClr>
-              <a:buSzPts val="1350"/>
+              <a:buSzPts val="1800"/>
               <a:buChar char="»"/>
-              <a:defRPr sz="1350"/>
+              <a:defRPr sz="1800"/>
             </a:lvl5pPr>
             <a:lvl6pPr indent="-314325" lvl="5" marL="2743200" algn="l">
               <a:spcBef>
-                <a:spcPts val="270"/>
+                <a:spcPts val="360"/>
               </a:spcBef>
               <a:spcAft>
                 <a:spcPts val="0"/>
@@ -7167,13 +7167,13 @@
               <a:buClr>
                 <a:schemeClr val="dk1"/>
               </a:buClr>
-              <a:buSzPts val="1350"/>
+              <a:buSzPts val="1800"/>
               <a:buChar char="•"/>
-              <a:defRPr sz="1350"/>
+              <a:defRPr sz="1800"/>
             </a:lvl6pPr>
             <a:lvl7pPr indent="-314325" lvl="6" marL="3200400" algn="l">
               <a:spcBef>
-                <a:spcPts val="270"/>
+                <a:spcPts val="360"/>
               </a:spcBef>
               <a:spcAft>
                 <a:spcPts val="0"/>
@@ -7181,13 +7181,13 @@
               <a:buClr>
                 <a:schemeClr val="dk1"/>
               </a:buClr>
-              <a:buSzPts val="1350"/>
+              <a:buSzPts val="1800"/>
               <a:buChar char="•"/>
-              <a:defRPr sz="1350"/>
+              <a:defRPr sz="1800"/>
             </a:lvl7pPr>
             <a:lvl8pPr indent="-314325" lvl="7" marL="3657600" algn="l">
               <a:spcBef>
-                <a:spcPts val="270"/>
+                <a:spcPts val="360"/>
               </a:spcBef>
               <a:spcAft>
                 <a:spcPts val="0"/>
@@ -7195,13 +7195,13 @@
               <a:buClr>
                 <a:schemeClr val="dk1"/>
               </a:buClr>
-              <a:buSzPts val="1350"/>
+              <a:buSzPts val="1800"/>
               <a:buChar char="•"/>
-              <a:defRPr sz="1350"/>
+              <a:defRPr sz="1800"/>
             </a:lvl8pPr>
             <a:lvl9pPr indent="-314325" lvl="8" marL="4114800" algn="l">
               <a:spcBef>
-                <a:spcPts val="270"/>
+                <a:spcPts val="360"/>
               </a:spcBef>
               <a:spcAft>
                 <a:spcPts val="0"/>
@@ -7209,9 +7209,9 @@
               <a:buClr>
                 <a:schemeClr val="dk1"/>
               </a:buClr>
-              <a:buSzPts val="1350"/>
+              <a:buSzPts val="1800"/>
               <a:buChar char="•"/>
-              <a:defRPr sz="1350"/>
+              <a:defRPr sz="1800"/>
             </a:lvl9pPr>
           </a:lstStyle>
           <a:p/>
@@ -7227,8 +7227,8 @@
         </p:nvSpPr>
         <p:spPr>
           <a:xfrm>
-            <a:off x="3486150" y="1200151"/>
-            <a:ext cx="3028950" cy="3394472"/>
+            <a:off x="4648084" y="1600161"/>
+            <a:ext cx="4038499" cy="4525849"/>
           </a:xfrm>
           <a:prstGeom prst="rect">
             <a:avLst/>
@@ -7239,13 +7239,13 @@
           </a:ln>
         </p:spPr>
         <p:txBody>
-          <a:bodyPr anchorCtr="0" anchor="t" bIns="45700" lIns="91425" spcFirstLastPara="1" rIns="91425" wrap="square" tIns="45700">
+          <a:bodyPr anchorCtr="0" anchor="t" bIns="60932" lIns="121897" spcFirstLastPara="1" rIns="121897" wrap="square" tIns="60932">
             <a:normAutofit/>
           </a:bodyPr>
           <a:lstStyle>
             <a:lvl1pPr indent="-361950" lvl="0" marL="457200" algn="l">
               <a:spcBef>
-                <a:spcPts val="420"/>
+                <a:spcPts val="560"/>
               </a:spcBef>
               <a:spcAft>
                 <a:spcPts val="0"/>
@@ -7253,11 +7253,39 @@
               <a:buClr>
                 <a:schemeClr val="dk1"/>
               </a:buClr>
-              <a:buSzPts val="2100"/>
+              <a:buSzPts val="2800"/>
               <a:buChar char="•"/>
-              <a:defRPr sz="2100"/>
+              <a:defRPr sz="2800"/>
             </a:lvl1pPr>
             <a:lvl2pPr indent="-342900" lvl="1" marL="914400" algn="l">
+              <a:spcBef>
+                <a:spcPts val="480"/>
+              </a:spcBef>
+              <a:spcAft>
+                <a:spcPts val="0"/>
+              </a:spcAft>
+              <a:buClr>
+                <a:schemeClr val="dk1"/>
+              </a:buClr>
+              <a:buSzPts val="2400"/>
+              <a:buChar char="–"/>
+              <a:defRPr sz="2400"/>
+            </a:lvl2pPr>
+            <a:lvl3pPr indent="-323850" lvl="2" marL="1371600" algn="l">
+              <a:spcBef>
+                <a:spcPts val="400"/>
+              </a:spcBef>
+              <a:spcAft>
+                <a:spcPts val="0"/>
+              </a:spcAft>
+              <a:buClr>
+                <a:schemeClr val="dk1"/>
+              </a:buClr>
+              <a:buSzPts val="2000"/>
+              <a:buChar char="•"/>
+              <a:defRPr sz="2000"/>
+            </a:lvl3pPr>
+            <a:lvl4pPr indent="-314325" lvl="3" marL="1828800" algn="l">
               <a:spcBef>
                 <a:spcPts val="360"/>
               </a:spcBef>
@@ -7270,38 +7298,10 @@
               <a:buSzPts val="1800"/>
               <a:buChar char="–"/>
               <a:defRPr sz="1800"/>
-            </a:lvl2pPr>
-            <a:lvl3pPr indent="-323850" lvl="2" marL="1371600" algn="l">
-              <a:spcBef>
-                <a:spcPts val="300"/>
-              </a:spcBef>
-              <a:spcAft>
-                <a:spcPts val="0"/>
-              </a:spcAft>
-              <a:buClr>
-                <a:schemeClr val="dk1"/>
-              </a:buClr>
-              <a:buSzPts val="1500"/>
-              <a:buChar char="•"/>
-              <a:defRPr sz="1500"/>
-            </a:lvl3pPr>
-            <a:lvl4pPr indent="-314325" lvl="3" marL="1828800" algn="l">
-              <a:spcBef>
-                <a:spcPts val="270"/>
-              </a:spcBef>
-              <a:spcAft>
-                <a:spcPts val="0"/>
-              </a:spcAft>
-              <a:buClr>
-                <a:schemeClr val="dk1"/>
-              </a:buClr>
-              <a:buSzPts val="1350"/>
-              <a:buChar char="–"/>
-              <a:defRPr sz="1350"/>
             </a:lvl4pPr>
             <a:lvl5pPr indent="-314325" lvl="4" marL="2286000" algn="l">
               <a:spcBef>
-                <a:spcPts val="270"/>
+                <a:spcPts val="360"/>
               </a:spcBef>
               <a:spcAft>
                 <a:spcPts val="0"/>
@@ -7309,13 +7309,13 @@
               <a:buClr>
                 <a:schemeClr val="dk1"/>
               </a:buClr>
-              <a:buSzPts val="1350"/>
+              <a:buSzPts val="1800"/>
               <a:buChar char="»"/>
-              <a:defRPr sz="1350"/>
+              <a:defRPr sz="1800"/>
             </a:lvl5pPr>
             <a:lvl6pPr indent="-314325" lvl="5" marL="2743200" algn="l">
               <a:spcBef>
-                <a:spcPts val="270"/>
+                <a:spcPts val="360"/>
               </a:spcBef>
               <a:spcAft>
                 <a:spcPts val="0"/>
@@ -7323,13 +7323,13 @@
               <a:buClr>
                 <a:schemeClr val="dk1"/>
               </a:buClr>
-              <a:buSzPts val="1350"/>
+              <a:buSzPts val="1800"/>
               <a:buChar char="•"/>
-              <a:defRPr sz="1350"/>
+              <a:defRPr sz="1800"/>
             </a:lvl6pPr>
             <a:lvl7pPr indent="-314325" lvl="6" marL="3200400" algn="l">
               <a:spcBef>
-                <a:spcPts val="270"/>
+                <a:spcPts val="360"/>
               </a:spcBef>
               <a:spcAft>
                 <a:spcPts val="0"/>
@@ -7337,13 +7337,13 @@
               <a:buClr>
                 <a:schemeClr val="dk1"/>
               </a:buClr>
-              <a:buSzPts val="1350"/>
+              <a:buSzPts val="1800"/>
               <a:buChar char="•"/>
-              <a:defRPr sz="1350"/>
+              <a:defRPr sz="1800"/>
             </a:lvl7pPr>
             <a:lvl8pPr indent="-314325" lvl="7" marL="3657600" algn="l">
               <a:spcBef>
-                <a:spcPts val="270"/>
+                <a:spcPts val="360"/>
               </a:spcBef>
               <a:spcAft>
                 <a:spcPts val="0"/>
@@ -7351,13 +7351,13 @@
               <a:buClr>
                 <a:schemeClr val="dk1"/>
               </a:buClr>
-              <a:buSzPts val="1350"/>
+              <a:buSzPts val="1800"/>
               <a:buChar char="•"/>
-              <a:defRPr sz="1350"/>
+              <a:defRPr sz="1800"/>
             </a:lvl8pPr>
             <a:lvl9pPr indent="-314325" lvl="8" marL="4114800" algn="l">
               <a:spcBef>
-                <a:spcPts val="270"/>
+                <a:spcPts val="360"/>
               </a:spcBef>
               <a:spcAft>
                 <a:spcPts val="0"/>
@@ -7365,9 +7365,9 @@
               <a:buClr>
                 <a:schemeClr val="dk1"/>
               </a:buClr>
-              <a:buSzPts val="1350"/>
+              <a:buSzPts val="1800"/>
               <a:buChar char="•"/>
-              <a:defRPr sz="1350"/>
+              <a:defRPr sz="1800"/>
             </a:lvl9pPr>
           </a:lstStyle>
           <a:p/>
@@ -7383,8 +7383,8 @@
         </p:nvSpPr>
         <p:spPr>
           <a:xfrm>
-            <a:off x="342900" y="4767263"/>
-            <a:ext cx="1600200" cy="273844"/>
+            <a:off x="457189" y="6356192"/>
+            <a:ext cx="2133547" cy="365116"/>
           </a:xfrm>
           <a:prstGeom prst="rect">
             <a:avLst/>
@@ -7395,7 +7395,7 @@
           </a:ln>
         </p:spPr>
         <p:txBody>
-          <a:bodyPr anchorCtr="0" anchor="ctr" bIns="45700" lIns="91425" spcFirstLastPara="1" rIns="91425" wrap="square" tIns="45700">
+          <a:bodyPr anchorCtr="0" anchor="ctr" bIns="60932" lIns="121897" spcFirstLastPara="1" rIns="121897" wrap="square" tIns="60932">
             <a:noAutofit/>
           </a:bodyPr>
           <a:lstStyle>
@@ -7412,7 +7412,7 @@
               <a:buClr>
                 <a:srgbClr val="888888"/>
               </a:buClr>
-              <a:buSzPts val="1800"/>
+              <a:buSzPts val="2400"/>
               <a:buNone/>
               <a:defRPr/>
             </a:lvl1pPr>
@@ -7429,7 +7429,7 @@
               <a:buClr>
                 <a:schemeClr val="accent2"/>
               </a:buClr>
-              <a:buSzPts val="1800"/>
+              <a:buSzPts val="2400"/>
               <a:buNone/>
               <a:defRPr/>
             </a:lvl2pPr>
@@ -7446,7 +7446,7 @@
               <a:buClr>
                 <a:schemeClr val="accent2"/>
               </a:buClr>
-              <a:buSzPts val="1800"/>
+              <a:buSzPts val="2400"/>
               <a:buNone/>
               <a:defRPr/>
             </a:lvl3pPr>
@@ -7463,7 +7463,7 @@
               <a:buClr>
                 <a:schemeClr val="accent2"/>
               </a:buClr>
-              <a:buSzPts val="1800"/>
+              <a:buSzPts val="2400"/>
               <a:buNone/>
               <a:defRPr/>
             </a:lvl4pPr>
@@ -7480,7 +7480,7 @@
               <a:buClr>
                 <a:schemeClr val="accent2"/>
               </a:buClr>
-              <a:buSzPts val="1800"/>
+              <a:buSzPts val="2400"/>
               <a:buNone/>
               <a:defRPr/>
             </a:lvl5pPr>
@@ -7497,7 +7497,7 @@
               <a:buClr>
                 <a:schemeClr val="accent2"/>
               </a:buClr>
-              <a:buSzPts val="1800"/>
+              <a:buSzPts val="2400"/>
               <a:buNone/>
               <a:defRPr/>
             </a:lvl6pPr>
@@ -7514,7 +7514,7 @@
               <a:buClr>
                 <a:schemeClr val="accent2"/>
               </a:buClr>
-              <a:buSzPts val="1800"/>
+              <a:buSzPts val="2400"/>
               <a:buNone/>
               <a:defRPr/>
             </a:lvl7pPr>
@@ -7531,7 +7531,7 @@
               <a:buClr>
                 <a:schemeClr val="accent2"/>
               </a:buClr>
-              <a:buSzPts val="1800"/>
+              <a:buSzPts val="2400"/>
               <a:buNone/>
               <a:defRPr/>
             </a:lvl8pPr>
@@ -7548,7 +7548,7 @@
               <a:buClr>
                 <a:schemeClr val="accent2"/>
               </a:buClr>
-              <a:buSzPts val="1800"/>
+              <a:buSzPts val="2400"/>
               <a:buNone/>
               <a:defRPr/>
             </a:lvl9pPr>
@@ -7566,8 +7566,8 @@
         </p:nvSpPr>
         <p:spPr>
           <a:xfrm>
-            <a:off x="2343150" y="4767263"/>
-            <a:ext cx="2171700" cy="273844"/>
+            <a:off x="3124122" y="6356192"/>
+            <a:ext cx="2895528" cy="365116"/>
           </a:xfrm>
           <a:prstGeom prst="rect">
             <a:avLst/>
@@ -7578,7 +7578,7 @@
           </a:ln>
         </p:spPr>
         <p:txBody>
-          <a:bodyPr anchorCtr="0" anchor="ctr" bIns="45700" lIns="91425" spcFirstLastPara="1" rIns="91425" wrap="square" tIns="45700">
+          <a:bodyPr anchorCtr="0" anchor="ctr" bIns="60932" lIns="121897" spcFirstLastPara="1" rIns="121897" wrap="square" tIns="60932">
             <a:noAutofit/>
           </a:bodyPr>
           <a:lstStyle>
@@ -7595,7 +7595,7 @@
               <a:buClr>
                 <a:srgbClr val="888888"/>
               </a:buClr>
-              <a:buSzPts val="1800"/>
+              <a:buSzPts val="2400"/>
               <a:buNone/>
               <a:defRPr/>
             </a:lvl1pPr>
@@ -7612,7 +7612,7 @@
               <a:buClr>
                 <a:schemeClr val="accent2"/>
               </a:buClr>
-              <a:buSzPts val="1800"/>
+              <a:buSzPts val="2400"/>
               <a:buNone/>
               <a:defRPr/>
             </a:lvl2pPr>
@@ -7629,7 +7629,7 @@
               <a:buClr>
                 <a:schemeClr val="accent2"/>
               </a:buClr>
-              <a:buSzPts val="1800"/>
+              <a:buSzPts val="2400"/>
               <a:buNone/>
               <a:defRPr/>
             </a:lvl3pPr>
@@ -7646,7 +7646,7 @@
               <a:buClr>
                 <a:schemeClr val="accent2"/>
               </a:buClr>
-              <a:buSzPts val="1800"/>
+              <a:buSzPts val="2400"/>
               <a:buNone/>
               <a:defRPr/>
             </a:lvl4pPr>
@@ -7663,7 +7663,7 @@
               <a:buClr>
                 <a:schemeClr val="accent2"/>
               </a:buClr>
-              <a:buSzPts val="1800"/>
+              <a:buSzPts val="2400"/>
               <a:buNone/>
               <a:defRPr/>
             </a:lvl5pPr>
@@ -7680,7 +7680,7 @@
               <a:buClr>
                 <a:schemeClr val="accent2"/>
               </a:buClr>
-              <a:buSzPts val="1800"/>
+              <a:buSzPts val="2400"/>
               <a:buNone/>
               <a:defRPr/>
             </a:lvl6pPr>
@@ -7697,7 +7697,7 @@
               <a:buClr>
                 <a:schemeClr val="accent2"/>
               </a:buClr>
-              <a:buSzPts val="1800"/>
+              <a:buSzPts val="2400"/>
               <a:buNone/>
               <a:defRPr/>
             </a:lvl7pPr>
@@ -7714,7 +7714,7 @@
               <a:buClr>
                 <a:schemeClr val="accent2"/>
               </a:buClr>
-              <a:buSzPts val="1800"/>
+              <a:buSzPts val="2400"/>
               <a:buNone/>
               <a:defRPr/>
             </a:lvl8pPr>
@@ -7731,7 +7731,7 @@
               <a:buClr>
                 <a:schemeClr val="accent2"/>
               </a:buClr>
-              <a:buSzPts val="1800"/>
+              <a:buSzPts val="2400"/>
               <a:buNone/>
               <a:defRPr/>
             </a:lvl9pPr>
@@ -7749,8 +7749,8 @@
         </p:nvSpPr>
         <p:spPr>
           <a:xfrm>
-            <a:off x="4914900" y="4767263"/>
-            <a:ext cx="1600200" cy="273844"/>
+            <a:off x="6553036" y="6356192"/>
+            <a:ext cx="2133547" cy="365116"/>
           </a:xfrm>
           <a:prstGeom prst="rect">
             <a:avLst/>
@@ -7761,7 +7761,7 @@
           </a:ln>
         </p:spPr>
         <p:txBody>
-          <a:bodyPr anchorCtr="0" anchor="ctr" bIns="45700" lIns="91425" spcFirstLastPara="1" rIns="91425" wrap="square" tIns="45700">
+          <a:bodyPr anchorCtr="0" anchor="ctr" bIns="60932" lIns="121897" spcFirstLastPara="1" rIns="121897" wrap="square" tIns="60932">
             <a:noAutofit/>
           </a:bodyPr>
           <a:lstStyle>
@@ -7778,7 +7778,7 @@
               <a:buClr>
                 <a:srgbClr val="888888"/>
               </a:buClr>
-              <a:buSzPts val="900"/>
+              <a:buSzPts val="1200"/>
               <a:buFont typeface="Calibri"/>
               <a:buNone/>
               <a:defRPr/>
@@ -7796,7 +7796,7 @@
               <a:buClr>
                 <a:srgbClr val="888888"/>
               </a:buClr>
-              <a:buSzPts val="900"/>
+              <a:buSzPts val="1200"/>
               <a:buFont typeface="Calibri"/>
               <a:buNone/>
               <a:defRPr/>
@@ -7814,7 +7814,7 @@
               <a:buClr>
                 <a:srgbClr val="888888"/>
               </a:buClr>
-              <a:buSzPts val="900"/>
+              <a:buSzPts val="1200"/>
               <a:buFont typeface="Calibri"/>
               <a:buNone/>
               <a:defRPr/>
@@ -7832,7 +7832,7 @@
               <a:buClr>
                 <a:srgbClr val="888888"/>
               </a:buClr>
-              <a:buSzPts val="900"/>
+              <a:buSzPts val="1200"/>
               <a:buFont typeface="Calibri"/>
               <a:buNone/>
               <a:defRPr/>
@@ -7850,7 +7850,7 @@
               <a:buClr>
                 <a:srgbClr val="888888"/>
               </a:buClr>
-              <a:buSzPts val="900"/>
+              <a:buSzPts val="1200"/>
               <a:buFont typeface="Calibri"/>
               <a:buNone/>
               <a:defRPr/>
@@ -7868,7 +7868,7 @@
               <a:buClr>
                 <a:srgbClr val="888888"/>
               </a:buClr>
-              <a:buSzPts val="900"/>
+              <a:buSzPts val="1200"/>
               <a:buFont typeface="Calibri"/>
               <a:buNone/>
               <a:defRPr/>
@@ -7886,7 +7886,7 @@
               <a:buClr>
                 <a:srgbClr val="888888"/>
               </a:buClr>
-              <a:buSzPts val="900"/>
+              <a:buSzPts val="1200"/>
               <a:buFont typeface="Calibri"/>
               <a:buNone/>
               <a:defRPr/>
@@ -7904,7 +7904,7 @@
               <a:buClr>
                 <a:srgbClr val="888888"/>
               </a:buClr>
-              <a:buSzPts val="900"/>
+              <a:buSzPts val="1200"/>
               <a:buFont typeface="Calibri"/>
               <a:buNone/>
               <a:defRPr/>
@@ -7922,7 +7922,7 @@
               <a:buClr>
                 <a:srgbClr val="888888"/>
               </a:buClr>
-              <a:buSzPts val="900"/>
+              <a:buSzPts val="1200"/>
               <a:buFont typeface="Calibri"/>
               <a:buNone/>
               <a:defRPr/>
@@ -7981,8 +7981,8 @@
         </p:nvSpPr>
         <p:spPr>
           <a:xfrm>
-            <a:off x="342900" y="205978"/>
-            <a:ext cx="6172200" cy="857250"/>
+            <a:off x="457189" y="274630"/>
+            <a:ext cx="8229394" cy="1142971"/>
           </a:xfrm>
           <a:prstGeom prst="rect">
             <a:avLst/>
@@ -7993,7 +7993,7 @@
           </a:ln>
         </p:spPr>
         <p:txBody>
-          <a:bodyPr anchorCtr="0" anchor="ctr" bIns="45700" lIns="91425" spcFirstLastPara="1" rIns="91425" wrap="square" tIns="45700">
+          <a:bodyPr anchorCtr="0" anchor="ctr" bIns="60932" lIns="121897" spcFirstLastPara="1" rIns="121897" wrap="square" tIns="60932">
             <a:normAutofit/>
           </a:bodyPr>
           <a:lstStyle>
@@ -8007,7 +8007,7 @@
               <a:buClr>
                 <a:schemeClr val="dk1"/>
               </a:buClr>
-              <a:buSzPts val="3300"/>
+              <a:buSzPts val="4400"/>
               <a:buFont typeface="Calibri"/>
               <a:buNone/>
               <a:defRPr/>
@@ -8019,7 +8019,7 @@
               <a:spcAft>
                 <a:spcPts val="0"/>
               </a:spcAft>
-              <a:buSzPts val="1400"/>
+              <a:buSzPts val="1867"/>
               <a:buNone/>
               <a:defRPr/>
             </a:lvl2pPr>
@@ -8030,7 +8030,7 @@
               <a:spcAft>
                 <a:spcPts val="0"/>
               </a:spcAft>
-              <a:buSzPts val="1400"/>
+              <a:buSzPts val="1867"/>
               <a:buNone/>
               <a:defRPr/>
             </a:lvl3pPr>
@@ -8041,7 +8041,7 @@
               <a:spcAft>
                 <a:spcPts val="0"/>
               </a:spcAft>
-              <a:buSzPts val="1400"/>
+              <a:buSzPts val="1867"/>
               <a:buNone/>
               <a:defRPr/>
             </a:lvl4pPr>
@@ -8052,7 +8052,7 @@
               <a:spcAft>
                 <a:spcPts val="0"/>
               </a:spcAft>
-              <a:buSzPts val="1400"/>
+              <a:buSzPts val="1867"/>
               <a:buNone/>
               <a:defRPr/>
             </a:lvl5pPr>
@@ -8063,7 +8063,7 @@
               <a:spcAft>
                 <a:spcPts val="0"/>
               </a:spcAft>
-              <a:buSzPts val="1400"/>
+              <a:buSzPts val="1867"/>
               <a:buNone/>
               <a:defRPr/>
             </a:lvl6pPr>
@@ -8074,7 +8074,7 @@
               <a:spcAft>
                 <a:spcPts val="0"/>
               </a:spcAft>
-              <a:buSzPts val="1400"/>
+              <a:buSzPts val="1867"/>
               <a:buNone/>
               <a:defRPr/>
             </a:lvl7pPr>
@@ -8085,7 +8085,7 @@
               <a:spcAft>
                 <a:spcPts val="0"/>
               </a:spcAft>
-              <a:buSzPts val="1400"/>
+              <a:buSzPts val="1867"/>
               <a:buNone/>
               <a:defRPr/>
             </a:lvl8pPr>
@@ -8096,7 +8096,7 @@
               <a:spcAft>
                 <a:spcPts val="0"/>
               </a:spcAft>
-              <a:buSzPts val="1400"/>
+              <a:buSzPts val="1867"/>
               <a:buNone/>
               <a:defRPr/>
             </a:lvl9pPr>
@@ -8114,8 +8114,8 @@
         </p:nvSpPr>
         <p:spPr>
           <a:xfrm>
-            <a:off x="342900" y="1151335"/>
-            <a:ext cx="3030141" cy="479822"/>
+            <a:off x="457189" y="1535075"/>
+            <a:ext cx="4040087" cy="639747"/>
           </a:xfrm>
           <a:prstGeom prst="rect">
             <a:avLst/>
@@ -8126,13 +8126,13 @@
           </a:ln>
         </p:spPr>
         <p:txBody>
-          <a:bodyPr anchorCtr="0" anchor="b" bIns="45700" lIns="91425" spcFirstLastPara="1" rIns="91425" wrap="square" tIns="45700">
+          <a:bodyPr anchorCtr="0" anchor="b" bIns="60932" lIns="121897" spcFirstLastPara="1" rIns="121897" wrap="square" tIns="60932">
             <a:normAutofit/>
           </a:bodyPr>
           <a:lstStyle>
             <a:lvl1pPr indent="-228600" lvl="0" marL="457200" algn="l">
               <a:spcBef>
-                <a:spcPts val="360"/>
+                <a:spcPts val="480"/>
               </a:spcBef>
               <a:spcAft>
                 <a:spcPts val="0"/>
@@ -8140,13 +8140,13 @@
               <a:buClr>
                 <a:schemeClr val="dk1"/>
               </a:buClr>
-              <a:buSzPts val="1800"/>
-              <a:buNone/>
-              <a:defRPr b="1" sz="1800"/>
+              <a:buSzPts val="2400"/>
+              <a:buNone/>
+              <a:defRPr b="1" sz="2400"/>
             </a:lvl1pPr>
             <a:lvl2pPr indent="-228600" lvl="1" marL="914400" algn="l">
               <a:spcBef>
-                <a:spcPts val="300"/>
+                <a:spcPts val="400"/>
               </a:spcBef>
               <a:spcAft>
                 <a:spcPts val="0"/>
@@ -8154,13 +8154,13 @@
               <a:buClr>
                 <a:schemeClr val="dk1"/>
               </a:buClr>
-              <a:buSzPts val="1500"/>
-              <a:buNone/>
-              <a:defRPr b="1" sz="1500"/>
+              <a:buSzPts val="2000"/>
+              <a:buNone/>
+              <a:defRPr b="1" sz="2000"/>
             </a:lvl2pPr>
             <a:lvl3pPr indent="-228600" lvl="2" marL="1371600" algn="l">
               <a:spcBef>
-                <a:spcPts val="270"/>
+                <a:spcPts val="360"/>
               </a:spcBef>
               <a:spcAft>
                 <a:spcPts val="0"/>
@@ -8168,13 +8168,13 @@
               <a:buClr>
                 <a:schemeClr val="dk1"/>
               </a:buClr>
-              <a:buSzPts val="1350"/>
-              <a:buNone/>
-              <a:defRPr b="1" sz="1350"/>
+              <a:buSzPts val="1800"/>
+              <a:buNone/>
+              <a:defRPr b="1" sz="1800"/>
             </a:lvl3pPr>
             <a:lvl4pPr indent="-228600" lvl="3" marL="1828800" algn="l">
               <a:spcBef>
-                <a:spcPts val="240"/>
+                <a:spcPts val="320"/>
               </a:spcBef>
               <a:spcAft>
                 <a:spcPts val="0"/>
@@ -8182,13 +8182,13 @@
               <a:buClr>
                 <a:schemeClr val="dk1"/>
               </a:buClr>
-              <a:buSzPts val="1200"/>
-              <a:buNone/>
-              <a:defRPr b="1" sz="1200"/>
+              <a:buSzPts val="1600"/>
+              <a:buNone/>
+              <a:defRPr b="1" sz="1600"/>
             </a:lvl4pPr>
             <a:lvl5pPr indent="-228600" lvl="4" marL="2286000" algn="l">
               <a:spcBef>
-                <a:spcPts val="240"/>
+                <a:spcPts val="320"/>
               </a:spcBef>
               <a:spcAft>
                 <a:spcPts val="0"/>
@@ -8196,13 +8196,13 @@
               <a:buClr>
                 <a:schemeClr val="dk1"/>
               </a:buClr>
-              <a:buSzPts val="1200"/>
-              <a:buNone/>
-              <a:defRPr b="1" sz="1200"/>
+              <a:buSzPts val="1600"/>
+              <a:buNone/>
+              <a:defRPr b="1" sz="1600"/>
             </a:lvl5pPr>
             <a:lvl6pPr indent="-228600" lvl="5" marL="2743200" algn="l">
               <a:spcBef>
-                <a:spcPts val="240"/>
+                <a:spcPts val="320"/>
               </a:spcBef>
               <a:spcAft>
                 <a:spcPts val="0"/>
@@ -8210,13 +8210,13 @@
               <a:buClr>
                 <a:schemeClr val="dk1"/>
               </a:buClr>
-              <a:buSzPts val="1200"/>
-              <a:buNone/>
-              <a:defRPr b="1" sz="1200"/>
+              <a:buSzPts val="1600"/>
+              <a:buNone/>
+              <a:defRPr b="1" sz="1600"/>
             </a:lvl6pPr>
             <a:lvl7pPr indent="-228600" lvl="6" marL="3200400" algn="l">
               <a:spcBef>
-                <a:spcPts val="240"/>
+                <a:spcPts val="320"/>
               </a:spcBef>
               <a:spcAft>
                 <a:spcPts val="0"/>
@@ -8224,13 +8224,13 @@
               <a:buClr>
                 <a:schemeClr val="dk1"/>
               </a:buClr>
-              <a:buSzPts val="1200"/>
-              <a:buNone/>
-              <a:defRPr b="1" sz="1200"/>
+              <a:buSzPts val="1600"/>
+              <a:buNone/>
+              <a:defRPr b="1" sz="1600"/>
             </a:lvl7pPr>
             <a:lvl8pPr indent="-228600" lvl="7" marL="3657600" algn="l">
               <a:spcBef>
-                <a:spcPts val="240"/>
+                <a:spcPts val="320"/>
               </a:spcBef>
               <a:spcAft>
                 <a:spcPts val="0"/>
@@ -8238,13 +8238,13 @@
               <a:buClr>
                 <a:schemeClr val="dk1"/>
               </a:buClr>
-              <a:buSzPts val="1200"/>
-              <a:buNone/>
-              <a:defRPr b="1" sz="1200"/>
+              <a:buSzPts val="1600"/>
+              <a:buNone/>
+              <a:defRPr b="1" sz="1600"/>
             </a:lvl8pPr>
             <a:lvl9pPr indent="-228600" lvl="8" marL="4114800" algn="l">
               <a:spcBef>
-                <a:spcPts val="240"/>
+                <a:spcPts val="320"/>
               </a:spcBef>
               <a:spcAft>
                 <a:spcPts val="0"/>
@@ -8252,9 +8252,9 @@
               <a:buClr>
                 <a:schemeClr val="dk1"/>
               </a:buClr>
-              <a:buSzPts val="1200"/>
-              <a:buNone/>
-              <a:defRPr b="1" sz="1200"/>
+              <a:buSzPts val="1600"/>
+              <a:buNone/>
+              <a:defRPr b="1" sz="1600"/>
             </a:lvl9pPr>
           </a:lstStyle>
           <a:p/>
@@ -8270,8 +8270,8 @@
         </p:nvSpPr>
         <p:spPr>
           <a:xfrm>
-            <a:off x="342900" y="1631156"/>
-            <a:ext cx="3030141" cy="2963466"/>
+            <a:off x="457189" y="2174820"/>
+            <a:ext cx="4040087" cy="3951189"/>
           </a:xfrm>
           <a:prstGeom prst="rect">
             <a:avLst/>
@@ -8282,12 +8282,40 @@
           </a:ln>
         </p:spPr>
         <p:txBody>
-          <a:bodyPr anchorCtr="0" anchor="t" bIns="45700" lIns="91425" spcFirstLastPara="1" rIns="91425" wrap="square" tIns="45700">
+          <a:bodyPr anchorCtr="0" anchor="t" bIns="60932" lIns="121897" spcFirstLastPara="1" rIns="121897" wrap="square" tIns="60932">
             <a:normAutofit/>
           </a:bodyPr>
           <a:lstStyle>
             <a:lvl1pPr indent="-342900" lvl="0" marL="457200" algn="l">
               <a:spcBef>
+                <a:spcPts val="480"/>
+              </a:spcBef>
+              <a:spcAft>
+                <a:spcPts val="0"/>
+              </a:spcAft>
+              <a:buClr>
+                <a:schemeClr val="dk1"/>
+              </a:buClr>
+              <a:buSzPts val="2400"/>
+              <a:buChar char="•"/>
+              <a:defRPr sz="2400"/>
+            </a:lvl1pPr>
+            <a:lvl2pPr indent="-323850" lvl="1" marL="914400" algn="l">
+              <a:spcBef>
+                <a:spcPts val="400"/>
+              </a:spcBef>
+              <a:spcAft>
+                <a:spcPts val="0"/>
+              </a:spcAft>
+              <a:buClr>
+                <a:schemeClr val="dk1"/>
+              </a:buClr>
+              <a:buSzPts val="2000"/>
+              <a:buChar char="–"/>
+              <a:defRPr sz="2000"/>
+            </a:lvl2pPr>
+            <a:lvl3pPr indent="-314325" lvl="2" marL="1371600" algn="l">
+              <a:spcBef>
                 <a:spcPts val="360"/>
               </a:spcBef>
               <a:spcAft>
@@ -8299,38 +8327,10 @@
               <a:buSzPts val="1800"/>
               <a:buChar char="•"/>
               <a:defRPr sz="1800"/>
-            </a:lvl1pPr>
-            <a:lvl2pPr indent="-323850" lvl="1" marL="914400" algn="l">
-              <a:spcBef>
-                <a:spcPts val="300"/>
-              </a:spcBef>
-              <a:spcAft>
-                <a:spcPts val="0"/>
-              </a:spcAft>
-              <a:buClr>
-                <a:schemeClr val="dk1"/>
-              </a:buClr>
-              <a:buSzPts val="1500"/>
-              <a:buChar char="–"/>
-              <a:defRPr sz="1500"/>
-            </a:lvl2pPr>
-            <a:lvl3pPr indent="-314325" lvl="2" marL="1371600" algn="l">
-              <a:spcBef>
-                <a:spcPts val="270"/>
-              </a:spcBef>
-              <a:spcAft>
-                <a:spcPts val="0"/>
-              </a:spcAft>
-              <a:buClr>
-                <a:schemeClr val="dk1"/>
-              </a:buClr>
-              <a:buSzPts val="1350"/>
-              <a:buChar char="•"/>
-              <a:defRPr sz="1350"/>
             </a:lvl3pPr>
             <a:lvl4pPr indent="-304800" lvl="3" marL="1828800" algn="l">
               <a:spcBef>
-                <a:spcPts val="240"/>
+                <a:spcPts val="320"/>
               </a:spcBef>
               <a:spcAft>
                 <a:spcPts val="0"/>
@@ -8338,13 +8338,13 @@
               <a:buClr>
                 <a:schemeClr val="dk1"/>
               </a:buClr>
-              <a:buSzPts val="1200"/>
+              <a:buSzPts val="1600"/>
               <a:buChar char="–"/>
-              <a:defRPr sz="1200"/>
+              <a:defRPr sz="1600"/>
             </a:lvl4pPr>
             <a:lvl5pPr indent="-304800" lvl="4" marL="2286000" algn="l">
               <a:spcBef>
-                <a:spcPts val="240"/>
+                <a:spcPts val="320"/>
               </a:spcBef>
               <a:spcAft>
                 <a:spcPts val="0"/>
@@ -8352,13 +8352,13 @@
               <a:buClr>
                 <a:schemeClr val="dk1"/>
               </a:buClr>
-              <a:buSzPts val="1200"/>
+              <a:buSzPts val="1600"/>
               <a:buChar char="»"/>
-              <a:defRPr sz="1200"/>
+              <a:defRPr sz="1600"/>
             </a:lvl5pPr>
             <a:lvl6pPr indent="-304800" lvl="5" marL="2743200" algn="l">
               <a:spcBef>
-                <a:spcPts val="240"/>
+                <a:spcPts val="320"/>
               </a:spcBef>
               <a:spcAft>
                 <a:spcPts val="0"/>
@@ -8366,13 +8366,13 @@
               <a:buClr>
                 <a:schemeClr val="dk1"/>
               </a:buClr>
-              <a:buSzPts val="1200"/>
+              <a:buSzPts val="1600"/>
               <a:buChar char="•"/>
-              <a:defRPr sz="1200"/>
+              <a:defRPr sz="1600"/>
             </a:lvl6pPr>
             <a:lvl7pPr indent="-304800" lvl="6" marL="3200400" algn="l">
               <a:spcBef>
-                <a:spcPts val="240"/>
+                <a:spcPts val="320"/>
               </a:spcBef>
               <a:spcAft>
                 <a:spcPts val="0"/>
@@ -8380,13 +8380,13 @@
               <a:buClr>
                 <a:schemeClr val="dk1"/>
               </a:buClr>
-              <a:buSzPts val="1200"/>
+              <a:buSzPts val="1600"/>
               <a:buChar char="•"/>
-              <a:defRPr sz="1200"/>
+              <a:defRPr sz="1600"/>
             </a:lvl7pPr>
             <a:lvl8pPr indent="-304800" lvl="7" marL="3657600" algn="l">
               <a:spcBef>
-                <a:spcPts val="240"/>
+                <a:spcPts val="320"/>
               </a:spcBef>
               <a:spcAft>
                 <a:spcPts val="0"/>
@@ -8394,13 +8394,13 @@
               <a:buClr>
                 <a:schemeClr val="dk1"/>
               </a:buClr>
-              <a:buSzPts val="1200"/>
+              <a:buSzPts val="1600"/>
               <a:buChar char="•"/>
-              <a:defRPr sz="1200"/>
+              <a:defRPr sz="1600"/>
             </a:lvl8pPr>
             <a:lvl9pPr indent="-304800" lvl="8" marL="4114800" algn="l">
               <a:spcBef>
-                <a:spcPts val="240"/>
+                <a:spcPts val="320"/>
               </a:spcBef>
               <a:spcAft>
                 <a:spcPts val="0"/>
@@ -8408,9 +8408,9 @@
               <a:buClr>
                 <a:schemeClr val="dk1"/>
               </a:buClr>
-              <a:buSzPts val="1200"/>
+              <a:buSzPts val="1600"/>
               <a:buChar char="•"/>
-              <a:defRPr sz="1200"/>
+              <a:defRPr sz="1600"/>
             </a:lvl9pPr>
           </a:lstStyle>
           <a:p/>
@@ -8426,8 +8426,8 @@
         </p:nvSpPr>
         <p:spPr>
           <a:xfrm>
-            <a:off x="3483769" y="1151335"/>
-            <a:ext cx="3031331" cy="479822"/>
+            <a:off x="4644909" y="1535075"/>
+            <a:ext cx="4041674" cy="639747"/>
           </a:xfrm>
           <a:prstGeom prst="rect">
             <a:avLst/>
@@ -8438,13 +8438,13 @@
           </a:ln>
         </p:spPr>
         <p:txBody>
-          <a:bodyPr anchorCtr="0" anchor="b" bIns="45700" lIns="91425" spcFirstLastPara="1" rIns="91425" wrap="square" tIns="45700">
+          <a:bodyPr anchorCtr="0" anchor="b" bIns="60932" lIns="121897" spcFirstLastPara="1" rIns="121897" wrap="square" tIns="60932">
             <a:normAutofit/>
           </a:bodyPr>
           <a:lstStyle>
             <a:lvl1pPr indent="-228600" lvl="0" marL="457200" algn="l">
               <a:spcBef>
-                <a:spcPts val="360"/>
+                <a:spcPts val="480"/>
               </a:spcBef>
               <a:spcAft>
                 <a:spcPts val="0"/>
@@ -8452,13 +8452,13 @@
               <a:buClr>
                 <a:schemeClr val="dk1"/>
               </a:buClr>
-              <a:buSzPts val="1800"/>
-              <a:buNone/>
-              <a:defRPr b="1" sz="1800"/>
+              <a:buSzPts val="2400"/>
+              <a:buNone/>
+              <a:defRPr b="1" sz="2400"/>
             </a:lvl1pPr>
             <a:lvl2pPr indent="-228600" lvl="1" marL="914400" algn="l">
               <a:spcBef>
-                <a:spcPts val="300"/>
+                <a:spcPts val="400"/>
               </a:spcBef>
               <a:spcAft>
                 <a:spcPts val="0"/>
@@ -8466,13 +8466,13 @@
               <a:buClr>
                 <a:schemeClr val="dk1"/>
               </a:buClr>
-              <a:buSzPts val="1500"/>
-              <a:buNone/>
-              <a:defRPr b="1" sz="1500"/>
+              <a:buSzPts val="2000"/>
+              <a:buNone/>
+              <a:defRPr b="1" sz="2000"/>
             </a:lvl2pPr>
             <a:lvl3pPr indent="-228600" lvl="2" marL="1371600" algn="l">
               <a:spcBef>
-                <a:spcPts val="270"/>
+                <a:spcPts val="360"/>
               </a:spcBef>
               <a:spcAft>
                 <a:spcPts val="0"/>
@@ -8480,13 +8480,13 @@
               <a:buClr>
                 <a:schemeClr val="dk1"/>
               </a:buClr>
-              <a:buSzPts val="1350"/>
-              <a:buNone/>
-              <a:defRPr b="1" sz="1350"/>
+              <a:buSzPts val="1800"/>
+              <a:buNone/>
+              <a:defRPr b="1" sz="1800"/>
             </a:lvl3pPr>
             <a:lvl4pPr indent="-228600" lvl="3" marL="1828800" algn="l">
               <a:spcBef>
-                <a:spcPts val="240"/>
+                <a:spcPts val="320"/>
               </a:spcBef>
               <a:spcAft>
                 <a:spcPts val="0"/>
@@ -8494,13 +8494,13 @@
               <a:buClr>
                 <a:schemeClr val="dk1"/>
               </a:buClr>
-              <a:buSzPts val="1200"/>
-              <a:buNone/>
-              <a:defRPr b="1" sz="1200"/>
+              <a:buSzPts val="1600"/>
+              <a:buNone/>
+              <a:defRPr b="1" sz="1600"/>
             </a:lvl4pPr>
             <a:lvl5pPr indent="-228600" lvl="4" marL="2286000" algn="l">
               <a:spcBef>
-                <a:spcPts val="240"/>
+                <a:spcPts val="320"/>
               </a:spcBef>
               <a:spcAft>
                 <a:spcPts val="0"/>
@@ -8508,13 +8508,13 @@
               <a:buClr>
                 <a:schemeClr val="dk1"/>
               </a:buClr>
-              <a:buSzPts val="1200"/>
-              <a:buNone/>
-              <a:defRPr b="1" sz="1200"/>
+              <a:buSzPts val="1600"/>
+              <a:buNone/>
+              <a:defRPr b="1" sz="1600"/>
             </a:lvl5pPr>
             <a:lvl6pPr indent="-228600" lvl="5" marL="2743200" algn="l">
               <a:spcBef>
-                <a:spcPts val="240"/>
+                <a:spcPts val="320"/>
               </a:spcBef>
               <a:spcAft>
                 <a:spcPts val="0"/>
@@ -8522,13 +8522,13 @@
               <a:buClr>
                 <a:schemeClr val="dk1"/>
               </a:buClr>
-              <a:buSzPts val="1200"/>
-              <a:buNone/>
-              <a:defRPr b="1" sz="1200"/>
+              <a:buSzPts val="1600"/>
+              <a:buNone/>
+              <a:defRPr b="1" sz="1600"/>
             </a:lvl6pPr>
             <a:lvl7pPr indent="-228600" lvl="6" marL="3200400" algn="l">
               <a:spcBef>
-                <a:spcPts val="240"/>
+                <a:spcPts val="320"/>
               </a:spcBef>
               <a:spcAft>
                 <a:spcPts val="0"/>
@@ -8536,13 +8536,13 @@
               <a:buClr>
                 <a:schemeClr val="dk1"/>
               </a:buClr>
-              <a:buSzPts val="1200"/>
-              <a:buNone/>
-              <a:defRPr b="1" sz="1200"/>
+              <a:buSzPts val="1600"/>
+              <a:buNone/>
+              <a:defRPr b="1" sz="1600"/>
             </a:lvl7pPr>
             <a:lvl8pPr indent="-228600" lvl="7" marL="3657600" algn="l">
               <a:spcBef>
-                <a:spcPts val="240"/>
+                <a:spcPts val="320"/>
               </a:spcBef>
               <a:spcAft>
                 <a:spcPts val="0"/>
@@ -8550,13 +8550,13 @@
               <a:buClr>
                 <a:schemeClr val="dk1"/>
               </a:buClr>
-              <a:buSzPts val="1200"/>
-              <a:buNone/>
-              <a:defRPr b="1" sz="1200"/>
+              <a:buSzPts val="1600"/>
+              <a:buNone/>
+              <a:defRPr b="1" sz="1600"/>
             </a:lvl8pPr>
             <a:lvl9pPr indent="-228600" lvl="8" marL="4114800" algn="l">
               <a:spcBef>
-                <a:spcPts val="240"/>
+                <a:spcPts val="320"/>
               </a:spcBef>
               <a:spcAft>
                 <a:spcPts val="0"/>
@@ -8564,9 +8564,9 @@
               <a:buClr>
                 <a:schemeClr val="dk1"/>
               </a:buClr>
-              <a:buSzPts val="1200"/>
-              <a:buNone/>
-              <a:defRPr b="1" sz="1200"/>
+              <a:buSzPts val="1600"/>
+              <a:buNone/>
+              <a:defRPr b="1" sz="1600"/>
             </a:lvl9pPr>
           </a:lstStyle>
           <a:p/>
@@ -8582,8 +8582,8 @@
         </p:nvSpPr>
         <p:spPr>
           <a:xfrm>
-            <a:off x="3483769" y="1631156"/>
-            <a:ext cx="3031331" cy="2963466"/>
+            <a:off x="4644909" y="2174820"/>
+            <a:ext cx="4041674" cy="3951189"/>
           </a:xfrm>
           <a:prstGeom prst="rect">
             <a:avLst/>
@@ -8594,12 +8594,40 @@
           </a:ln>
         </p:spPr>
         <p:txBody>
-          <a:bodyPr anchorCtr="0" anchor="t" bIns="45700" lIns="91425" spcFirstLastPara="1" rIns="91425" wrap="square" tIns="45700">
+          <a:bodyPr anchorCtr="0" anchor="t" bIns="60932" lIns="121897" spcFirstLastPara="1" rIns="121897" wrap="square" tIns="60932">
             <a:normAutofit/>
           </a:bodyPr>
           <a:lstStyle>
             <a:lvl1pPr indent="-342900" lvl="0" marL="457200" algn="l">
               <a:spcBef>
+                <a:spcPts val="480"/>
+              </a:spcBef>
+              <a:spcAft>
+                <a:spcPts val="0"/>
+              </a:spcAft>
+              <a:buClr>
+                <a:schemeClr val="dk1"/>
+              </a:buClr>
+              <a:buSzPts val="2400"/>
+              <a:buChar char="•"/>
+              <a:defRPr sz="2400"/>
+            </a:lvl1pPr>
+            <a:lvl2pPr indent="-323850" lvl="1" marL="914400" algn="l">
+              <a:spcBef>
+                <a:spcPts val="400"/>
+              </a:spcBef>
+              <a:spcAft>
+                <a:spcPts val="0"/>
+              </a:spcAft>
+              <a:buClr>
+                <a:schemeClr val="dk1"/>
+              </a:buClr>
+              <a:buSzPts val="2000"/>
+              <a:buChar char="–"/>
+              <a:defRPr sz="2000"/>
+            </a:lvl2pPr>
+            <a:lvl3pPr indent="-314325" lvl="2" marL="1371600" algn="l">
+              <a:spcBef>
                 <a:spcPts val="360"/>
               </a:spcBef>
               <a:spcAft>
@@ -8611,38 +8639,10 @@
               <a:buSzPts val="1800"/>
               <a:buChar char="•"/>
               <a:defRPr sz="1800"/>
-            </a:lvl1pPr>
-            <a:lvl2pPr indent="-323850" lvl="1" marL="914400" algn="l">
-              <a:spcBef>
-                <a:spcPts val="300"/>
-              </a:spcBef>
-              <a:spcAft>
-                <a:spcPts val="0"/>
-              </a:spcAft>
-              <a:buClr>
-                <a:schemeClr val="dk1"/>
-              </a:buClr>
-              <a:buSzPts val="1500"/>
-              <a:buChar char="–"/>
-              <a:defRPr sz="1500"/>
-            </a:lvl2pPr>
-            <a:lvl3pPr indent="-314325" lvl="2" marL="1371600" algn="l">
-              <a:spcBef>
-                <a:spcPts val="270"/>
-              </a:spcBef>
-              <a:spcAft>
-                <a:spcPts val="0"/>
-              </a:spcAft>
-              <a:buClr>
-                <a:schemeClr val="dk1"/>
-              </a:buClr>
-              <a:buSzPts val="1350"/>
-              <a:buChar char="•"/>
-              <a:defRPr sz="1350"/>
             </a:lvl3pPr>
             <a:lvl4pPr indent="-304800" lvl="3" marL="1828800" algn="l">
               <a:spcBef>
-                <a:spcPts val="240"/>
+                <a:spcPts val="320"/>
               </a:spcBef>
               <a:spcAft>
                 <a:spcPts val="0"/>
@@ -8650,13 +8650,13 @@
               <a:buClr>
                 <a:schemeClr val="dk1"/>
               </a:buClr>
-              <a:buSzPts val="1200"/>
+              <a:buSzPts val="1600"/>
               <a:buChar char="–"/>
-              <a:defRPr sz="1200"/>
+              <a:defRPr sz="1600"/>
             </a:lvl4pPr>
             <a:lvl5pPr indent="-304800" lvl="4" marL="2286000" algn="l">
               <a:spcBef>
-                <a:spcPts val="240"/>
+                <a:spcPts val="320"/>
               </a:spcBef>
               <a:spcAft>
                 <a:spcPts val="0"/>
@@ -8664,13 +8664,13 @@
               <a:buClr>
                 <a:schemeClr val="dk1"/>
               </a:buClr>
-              <a:buSzPts val="1200"/>
+              <a:buSzPts val="1600"/>
               <a:buChar char="»"/>
-              <a:defRPr sz="1200"/>
+              <a:defRPr sz="1600"/>
             </a:lvl5pPr>
             <a:lvl6pPr indent="-304800" lvl="5" marL="2743200" algn="l">
               <a:spcBef>
-                <a:spcPts val="240"/>
+                <a:spcPts val="320"/>
               </a:spcBef>
               <a:spcAft>
                 <a:spcPts val="0"/>
@@ -8678,13 +8678,13 @@
               <a:buClr>
                 <a:schemeClr val="dk1"/>
               </a:buClr>
-              <a:buSzPts val="1200"/>
+              <a:buSzPts val="1600"/>
               <a:buChar char="•"/>
-              <a:defRPr sz="1200"/>
+              <a:defRPr sz="1600"/>
             </a:lvl6pPr>
             <a:lvl7pPr indent="-304800" lvl="6" marL="3200400" algn="l">
               <a:spcBef>
-                <a:spcPts val="240"/>
+                <a:spcPts val="320"/>
               </a:spcBef>
               <a:spcAft>
                 <a:spcPts val="0"/>
@@ -8692,13 +8692,13 @@
               <a:buClr>
                 <a:schemeClr val="dk1"/>
               </a:buClr>
-              <a:buSzPts val="1200"/>
+              <a:buSzPts val="1600"/>
               <a:buChar char="•"/>
-              <a:defRPr sz="1200"/>
+              <a:defRPr sz="1600"/>
             </a:lvl7pPr>
             <a:lvl8pPr indent="-304800" lvl="7" marL="3657600" algn="l">
               <a:spcBef>
-                <a:spcPts val="240"/>
+                <a:spcPts val="320"/>
               </a:spcBef>
               <a:spcAft>
                 <a:spcPts val="0"/>
@@ -8706,13 +8706,13 @@
               <a:buClr>
                 <a:schemeClr val="dk1"/>
               </a:buClr>
-              <a:buSzPts val="1200"/>
+              <a:buSzPts val="1600"/>
               <a:buChar char="•"/>
-              <a:defRPr sz="1200"/>
+              <a:defRPr sz="1600"/>
             </a:lvl8pPr>
             <a:lvl9pPr indent="-304800" lvl="8" marL="4114800" algn="l">
               <a:spcBef>
-                <a:spcPts val="240"/>
+                <a:spcPts val="320"/>
               </a:spcBef>
               <a:spcAft>
                 <a:spcPts val="0"/>
@@ -8720,9 +8720,9 @@
               <a:buClr>
                 <a:schemeClr val="dk1"/>
               </a:buClr>
-              <a:buSzPts val="1200"/>
+              <a:buSzPts val="1600"/>
               <a:buChar char="•"/>
-              <a:defRPr sz="1200"/>
+              <a:defRPr sz="1600"/>
             </a:lvl9pPr>
           </a:lstStyle>
           <a:p/>
@@ -8738,8 +8738,8 @@
         </p:nvSpPr>
         <p:spPr>
           <a:xfrm>
-            <a:off x="342900" y="4767263"/>
-            <a:ext cx="1600200" cy="273844"/>
+            <a:off x="457189" y="6356192"/>
+            <a:ext cx="2133547" cy="365116"/>
           </a:xfrm>
           <a:prstGeom prst="rect">
             <a:avLst/>
@@ -8750,7 +8750,7 @@
           </a:ln>
         </p:spPr>
         <p:txBody>
-          <a:bodyPr anchorCtr="0" anchor="ctr" bIns="45700" lIns="91425" spcFirstLastPara="1" rIns="91425" wrap="square" tIns="45700">
+          <a:bodyPr anchorCtr="0" anchor="ctr" bIns="60932" lIns="121897" spcFirstLastPara="1" rIns="121897" wrap="square" tIns="60932">
             <a:noAutofit/>
           </a:bodyPr>
           <a:lstStyle>
@@ -8767,7 +8767,7 @@
               <a:buClr>
                 <a:srgbClr val="888888"/>
               </a:buClr>
-              <a:buSzPts val="1800"/>
+              <a:buSzPts val="2400"/>
               <a:buNone/>
               <a:defRPr/>
             </a:lvl1pPr>
@@ -8784,7 +8784,7 @@
               <a:buClr>
                 <a:schemeClr val="accent2"/>
               </a:buClr>
-              <a:buSzPts val="1800"/>
+              <a:buSzPts val="2400"/>
               <a:buNone/>
               <a:defRPr/>
             </a:lvl2pPr>
@@ -8801,7 +8801,7 @@
               <a:buClr>
                 <a:schemeClr val="accent2"/>
               </a:buClr>
-              <a:buSzPts val="1800"/>
+              <a:buSzPts val="2400"/>
               <a:buNone/>
               <a:defRPr/>
             </a:lvl3pPr>
@@ -8818,7 +8818,7 @@
               <a:buClr>
                 <a:schemeClr val="accent2"/>
               </a:buClr>
-              <a:buSzPts val="1800"/>
+              <a:buSzPts val="2400"/>
               <a:buNone/>
               <a:defRPr/>
             </a:lvl4pPr>
@@ -8835,7 +8835,7 @@
               <a:buClr>
                 <a:schemeClr val="accent2"/>
               </a:buClr>
-              <a:buSzPts val="1800"/>
+              <a:buSzPts val="2400"/>
               <a:buNone/>
               <a:defRPr/>
             </a:lvl5pPr>
@@ -8852,7 +8852,7 @@
               <a:buClr>
                 <a:schemeClr val="accent2"/>
               </a:buClr>
-              <a:buSzPts val="1800"/>
+              <a:buSzPts val="2400"/>
               <a:buNone/>
               <a:defRPr/>
             </a:lvl6pPr>
@@ -8869,7 +8869,7 @@
               <a:buClr>
                 <a:schemeClr val="accent2"/>
               </a:buClr>
-              <a:buSzPts val="1800"/>
+              <a:buSzPts val="2400"/>
               <a:buNone/>
               <a:defRPr/>
             </a:lvl7pPr>
@@ -8886,7 +8886,7 @@
               <a:buClr>
                 <a:schemeClr val="accent2"/>
               </a:buClr>
-              <a:buSzPts val="1800"/>
+              <a:buSzPts val="2400"/>
               <a:buNone/>
               <a:defRPr/>
             </a:lvl8pPr>
@@ -8903,7 +8903,7 @@
               <a:buClr>
                 <a:schemeClr val="accent2"/>
               </a:buClr>
-              <a:buSzPts val="1800"/>
+              <a:buSzPts val="2400"/>
               <a:buNone/>
               <a:defRPr/>
             </a:lvl9pPr>
@@ -8921,8 +8921,8 @@
         </p:nvSpPr>
         <p:spPr>
           <a:xfrm>
-            <a:off x="2343150" y="4767263"/>
-            <a:ext cx="2171700" cy="273844"/>
+            <a:off x="3124122" y="6356192"/>
+            <a:ext cx="2895528" cy="365116"/>
           </a:xfrm>
           <a:prstGeom prst="rect">
             <a:avLst/>
@@ -8933,7 +8933,7 @@
           </a:ln>
         </p:spPr>
         <p:txBody>
-          <a:bodyPr anchorCtr="0" anchor="ctr" bIns="45700" lIns="91425" spcFirstLastPara="1" rIns="91425" wrap="square" tIns="45700">
+          <a:bodyPr anchorCtr="0" anchor="ctr" bIns="60932" lIns="121897" spcFirstLastPara="1" rIns="121897" wrap="square" tIns="60932">
             <a:noAutofit/>
           </a:bodyPr>
           <a:lstStyle>
@@ -8950,7 +8950,7 @@
               <a:buClr>
                 <a:srgbClr val="888888"/>
               </a:buClr>
-              <a:buSzPts val="1800"/>
+              <a:buSzPts val="2400"/>
               <a:buNone/>
               <a:defRPr/>
             </a:lvl1pPr>
@@ -8967,7 +8967,7 @@
               <a:buClr>
                 <a:schemeClr val="accent2"/>
               </a:buClr>
-              <a:buSzPts val="1800"/>
+              <a:buSzPts val="2400"/>
               <a:buNone/>
               <a:defRPr/>
             </a:lvl2pPr>
@@ -8984,7 +8984,7 @@
               <a:buClr>
                 <a:schemeClr val="accent2"/>
               </a:buClr>
-              <a:buSzPts val="1800"/>
+              <a:buSzPts val="2400"/>
               <a:buNone/>
               <a:defRPr/>
             </a:lvl3pPr>
@@ -9001,7 +9001,7 @@
               <a:buClr>
                 <a:schemeClr val="accent2"/>
               </a:buClr>
-              <a:buSzPts val="1800"/>
+              <a:buSzPts val="2400"/>
               <a:buNone/>
               <a:defRPr/>
             </a:lvl4pPr>
@@ -9018,7 +9018,7 @@
               <a:buClr>
                 <a:schemeClr val="accent2"/>
               </a:buClr>
-              <a:buSzPts val="1800"/>
+              <a:buSzPts val="2400"/>
               <a:buNone/>
               <a:defRPr/>
             </a:lvl5pPr>
@@ -9035,7 +9035,7 @@
               <a:buClr>
                 <a:schemeClr val="accent2"/>
               </a:buClr>
-              <a:buSzPts val="1800"/>
+              <a:buSzPts val="2400"/>
               <a:buNone/>
               <a:defRPr/>
             </a:lvl6pPr>
@@ -9052,7 +9052,7 @@
               <a:buClr>
                 <a:schemeClr val="accent2"/>
               </a:buClr>
-              <a:buSzPts val="1800"/>
+              <a:buSzPts val="2400"/>
               <a:buNone/>
               <a:defRPr/>
             </a:lvl7pPr>
@@ -9069,7 +9069,7 @@
               <a:buClr>
                 <a:schemeClr val="accent2"/>
               </a:buClr>
-              <a:buSzPts val="1800"/>
+              <a:buSzPts val="2400"/>
               <a:buNone/>
               <a:defRPr/>
             </a:lvl8pPr>
@@ -9086,7 +9086,7 @@
               <a:buClr>
                 <a:schemeClr val="accent2"/>
               </a:buClr>
-              <a:buSzPts val="1800"/>
+              <a:buSzPts val="2400"/>
               <a:buNone/>
               <a:defRPr/>
             </a:lvl9pPr>
@@ -9104,8 +9104,8 @@
         </p:nvSpPr>
         <p:spPr>
           <a:xfrm>
-            <a:off x="4914900" y="4767263"/>
-            <a:ext cx="1600200" cy="273844"/>
+            <a:off x="6553036" y="6356192"/>
+            <a:ext cx="2133547" cy="365116"/>
           </a:xfrm>
           <a:prstGeom prst="rect">
             <a:avLst/>
@@ -9116,7 +9116,7 @@
           </a:ln>
         </p:spPr>
         <p:txBody>
-          <a:bodyPr anchorCtr="0" anchor="ctr" bIns="45700" lIns="91425" spcFirstLastPara="1" rIns="91425" wrap="square" tIns="45700">
+          <a:bodyPr anchorCtr="0" anchor="ctr" bIns="60932" lIns="121897" spcFirstLastPara="1" rIns="121897" wrap="square" tIns="60932">
             <a:noAutofit/>
           </a:bodyPr>
           <a:lstStyle>
@@ -9133,7 +9133,7 @@
               <a:buClr>
                 <a:srgbClr val="888888"/>
               </a:buClr>
-              <a:buSzPts val="900"/>
+              <a:buSzPts val="1200"/>
               <a:buFont typeface="Calibri"/>
               <a:buNone/>
               <a:defRPr/>
@@ -9151,7 +9151,7 @@
               <a:buClr>
                 <a:srgbClr val="888888"/>
               </a:buClr>
-              <a:buSzPts val="900"/>
+              <a:buSzPts val="1200"/>
               <a:buFont typeface="Calibri"/>
               <a:buNone/>
               <a:defRPr/>
@@ -9169,7 +9169,7 @@
               <a:buClr>
                 <a:srgbClr val="888888"/>
               </a:buClr>
-              <a:buSzPts val="900"/>
+              <a:buSzPts val="1200"/>
               <a:buFont typeface="Calibri"/>
               <a:buNone/>
               <a:defRPr/>
@@ -9187,7 +9187,7 @@
               <a:buClr>
                 <a:srgbClr val="888888"/>
               </a:buClr>
-              <a:buSzPts val="900"/>
+              <a:buSzPts val="1200"/>
               <a:buFont typeface="Calibri"/>
               <a:buNone/>
               <a:defRPr/>
@@ -9205,7 +9205,7 @@
               <a:buClr>
                 <a:srgbClr val="888888"/>
               </a:buClr>
-              <a:buSzPts val="900"/>
+              <a:buSzPts val="1200"/>
               <a:buFont typeface="Calibri"/>
               <a:buNone/>
               <a:defRPr/>
@@ -9223,7 +9223,7 @@
               <a:buClr>
                 <a:srgbClr val="888888"/>
               </a:buClr>
-              <a:buSzPts val="900"/>
+              <a:buSzPts val="1200"/>
               <a:buFont typeface="Calibri"/>
               <a:buNone/>
               <a:defRPr/>
@@ -9241,7 +9241,7 @@
               <a:buClr>
                 <a:srgbClr val="888888"/>
               </a:buClr>
-              <a:buSzPts val="900"/>
+              <a:buSzPts val="1200"/>
               <a:buFont typeface="Calibri"/>
               <a:buNone/>
               <a:defRPr/>
@@ -9259,7 +9259,7 @@
               <a:buClr>
                 <a:srgbClr val="888888"/>
               </a:buClr>
-              <a:buSzPts val="900"/>
+              <a:buSzPts val="1200"/>
               <a:buFont typeface="Calibri"/>
               <a:buNone/>
               <a:defRPr/>
@@ -9277,7 +9277,7 @@
               <a:buClr>
                 <a:srgbClr val="888888"/>
               </a:buClr>
-              <a:buSzPts val="900"/>
+              <a:buSzPts val="1200"/>
               <a:buFont typeface="Calibri"/>
               <a:buNone/>
               <a:defRPr/>
@@ -9336,8 +9336,8 @@
         </p:nvSpPr>
         <p:spPr>
           <a:xfrm>
-            <a:off x="342900" y="205978"/>
-            <a:ext cx="6172200" cy="857250"/>
+            <a:off x="457189" y="274630"/>
+            <a:ext cx="8229394" cy="1142971"/>
           </a:xfrm>
           <a:prstGeom prst="rect">
             <a:avLst/>
@@ -9348,7 +9348,7 @@
           </a:ln>
         </p:spPr>
         <p:txBody>
-          <a:bodyPr anchorCtr="0" anchor="ctr" bIns="45700" lIns="91425" spcFirstLastPara="1" rIns="91425" wrap="square" tIns="45700">
+          <a:bodyPr anchorCtr="0" anchor="ctr" bIns="60932" lIns="121897" spcFirstLastPara="1" rIns="121897" wrap="square" tIns="60932">
             <a:normAutofit/>
           </a:bodyPr>
           <a:lstStyle>
@@ -9362,7 +9362,7 @@
               <a:buClr>
                 <a:schemeClr val="dk1"/>
               </a:buClr>
-              <a:buSzPts val="1800"/>
+              <a:buSzPts val="2400"/>
               <a:buNone/>
               <a:defRPr/>
             </a:lvl1pPr>
@@ -9373,7 +9373,7 @@
               <a:spcAft>
                 <a:spcPts val="0"/>
               </a:spcAft>
-              <a:buSzPts val="1400"/>
+              <a:buSzPts val="1867"/>
               <a:buNone/>
               <a:defRPr/>
             </a:lvl2pPr>
@@ -9384,7 +9384,7 @@
               <a:spcAft>
                 <a:spcPts val="0"/>
               </a:spcAft>
-              <a:buSzPts val="1400"/>
+              <a:buSzPts val="1867"/>
               <a:buNone/>
               <a:defRPr/>
             </a:lvl3pPr>
@@ -9395,7 +9395,7 @@
               <a:spcAft>
                 <a:spcPts val="0"/>
               </a:spcAft>
-              <a:buSzPts val="1400"/>
+              <a:buSzPts val="1867"/>
               <a:buNone/>
               <a:defRPr/>
             </a:lvl4pPr>
@@ -9406,7 +9406,7 @@
               <a:spcAft>
                 <a:spcPts val="0"/>
               </a:spcAft>
-              <a:buSzPts val="1400"/>
+              <a:buSzPts val="1867"/>
               <a:buNone/>
               <a:defRPr/>
             </a:lvl5pPr>
@@ -9417,7 +9417,7 @@
               <a:spcAft>
                 <a:spcPts val="0"/>
               </a:spcAft>
-              <a:buSzPts val="1400"/>
+              <a:buSzPts val="1867"/>
               <a:buNone/>
               <a:defRPr/>
             </a:lvl6pPr>
@@ -9428,7 +9428,7 @@
               <a:spcAft>
                 <a:spcPts val="0"/>
               </a:spcAft>
-              <a:buSzPts val="1400"/>
+              <a:buSzPts val="1867"/>
               <a:buNone/>
               <a:defRPr/>
             </a:lvl7pPr>
@@ -9439,7 +9439,7 @@
               <a:spcAft>
                 <a:spcPts val="0"/>
               </a:spcAft>
-              <a:buSzPts val="1400"/>
+              <a:buSzPts val="1867"/>
               <a:buNone/>
               <a:defRPr/>
             </a:lvl8pPr>
@@ -9450,7 +9450,7 @@
               <a:spcAft>
                 <a:spcPts val="0"/>
               </a:spcAft>
-              <a:buSzPts val="1400"/>
+              <a:buSzPts val="1867"/>
               <a:buNone/>
               <a:defRPr/>
             </a:lvl9pPr>
@@ -9468,8 +9468,8 @@
         </p:nvSpPr>
         <p:spPr>
           <a:xfrm>
-            <a:off x="342900" y="4767263"/>
-            <a:ext cx="1600200" cy="273844"/>
+            <a:off x="457189" y="6356192"/>
+            <a:ext cx="2133547" cy="365116"/>
           </a:xfrm>
           <a:prstGeom prst="rect">
             <a:avLst/>
@@ -9480,7 +9480,7 @@
           </a:ln>
         </p:spPr>
         <p:txBody>
-          <a:bodyPr anchorCtr="0" anchor="ctr" bIns="45700" lIns="91425" spcFirstLastPara="1" rIns="91425" wrap="square" tIns="45700">
+          <a:bodyPr anchorCtr="0" anchor="ctr" bIns="60932" lIns="121897" spcFirstLastPara="1" rIns="121897" wrap="square" tIns="60932">
             <a:noAutofit/>
           </a:bodyPr>
           <a:lstStyle>
@@ -9497,7 +9497,7 @@
               <a:buClr>
                 <a:srgbClr val="888888"/>
               </a:buClr>
-              <a:buSzPts val="1800"/>
+              <a:buSzPts val="2400"/>
               <a:buNone/>
               <a:defRPr/>
             </a:lvl1pPr>
@@ -9514,7 +9514,7 @@
               <a:buClr>
                 <a:schemeClr val="accent2"/>
               </a:buClr>
-              <a:buSzPts val="1800"/>
+              <a:buSzPts val="2400"/>
               <a:buNone/>
               <a:defRPr/>
             </a:lvl2pPr>
@@ -9531,7 +9531,7 @@
               <a:buClr>
                 <a:schemeClr val="accent2"/>
               </a:buClr>
-              <a:buSzPts val="1800"/>
+              <a:buSzPts val="2400"/>
               <a:buNone/>
               <a:defRPr/>
             </a:lvl3pPr>
@@ -9548,7 +9548,7 @@
               <a:buClr>
                 <a:schemeClr val="accent2"/>
               </a:buClr>
-              <a:buSzPts val="1800"/>
+              <a:buSzPts val="2400"/>
               <a:buNone/>
               <a:defRPr/>
             </a:lvl4pPr>
@@ -9565,7 +9565,7 @@
               <a:buClr>
                 <a:schemeClr val="accent2"/>
               </a:buClr>
-              <a:buSzPts val="1800"/>
+              <a:buSzPts val="2400"/>
               <a:buNone/>
               <a:defRPr/>
             </a:lvl5pPr>
@@ -9582,7 +9582,7 @@
               <a:buClr>
                 <a:schemeClr val="accent2"/>
               </a:buClr>
-              <a:buSzPts val="1800"/>
+              <a:buSzPts val="2400"/>
               <a:buNone/>
               <a:defRPr/>
             </a:lvl6pPr>
@@ -9599,7 +9599,7 @@
               <a:buClr>
                 <a:schemeClr val="accent2"/>
               </a:buClr>
-              <a:buSzPts val="1800"/>
+              <a:buSzPts val="2400"/>
               <a:buNone/>
               <a:defRPr/>
             </a:lvl7pPr>
@@ -9616,7 +9616,7 @@
               <a:buClr>
                 <a:schemeClr val="accent2"/>
               </a:buClr>
-              <a:buSzPts val="1800"/>
+              <a:buSzPts val="2400"/>
               <a:buNone/>
               <a:defRPr/>
             </a:lvl8pPr>
@@ -9633,7 +9633,7 @@
               <a:buClr>
                 <a:schemeClr val="accent2"/>
               </a:buClr>
-              <a:buSzPts val="1800"/>
+              <a:buSzPts val="2400"/>
               <a:buNone/>
               <a:defRPr/>
             </a:lvl9pPr>
@@ -9651,8 +9651,8 @@
         </p:nvSpPr>
         <p:spPr>
           <a:xfrm>
-            <a:off x="2343150" y="4767263"/>
-            <a:ext cx="2171700" cy="273844"/>
+            <a:off x="3124122" y="6356192"/>
+            <a:ext cx="2895528" cy="365116"/>
           </a:xfrm>
           <a:prstGeom prst="rect">
             <a:avLst/>
@@ -9663,7 +9663,7 @@
           </a:ln>
         </p:spPr>
         <p:txBody>
-          <a:bodyPr anchorCtr="0" anchor="ctr" bIns="45700" lIns="91425" spcFirstLastPara="1" rIns="91425" wrap="square" tIns="45700">
+          <a:bodyPr anchorCtr="0" anchor="ctr" bIns="60932" lIns="121897" spcFirstLastPara="1" rIns="121897" wrap="square" tIns="60932">
             <a:noAutofit/>
           </a:bodyPr>
           <a:lstStyle>
@@ -9680,7 +9680,7 @@
               <a:buClr>
                 <a:srgbClr val="888888"/>
               </a:buClr>
-              <a:buSzPts val="1800"/>
+              <a:buSzPts val="2400"/>
               <a:buNone/>
               <a:defRPr/>
             </a:lvl1pPr>
@@ -9697,7 +9697,7 @@
               <a:buClr>
                 <a:schemeClr val="accent2"/>
               </a:buClr>
-              <a:buSzPts val="1800"/>
+              <a:buSzPts val="2400"/>
               <a:buNone/>
               <a:defRPr/>
             </a:lvl2pPr>
@@ -9714,7 +9714,7 @@
               <a:buClr>
                 <a:schemeClr val="accent2"/>
               </a:buClr>
-              <a:buSzPts val="1800"/>
+              <a:buSzPts val="2400"/>
               <a:buNone/>
               <a:defRPr/>
             </a:lvl3pPr>
@@ -9731,7 +9731,7 @@
               <a:buClr>
                 <a:schemeClr val="accent2"/>
               </a:buClr>
-              <a:buSzPts val="1800"/>
+              <a:buSzPts val="2400"/>
               <a:buNone/>
               <a:defRPr/>
             </a:lvl4pPr>
@@ -9748,7 +9748,7 @@
               <a:buClr>
                 <a:schemeClr val="accent2"/>
               </a:buClr>
-              <a:buSzPts val="1800"/>
+              <a:buSzPts val="2400"/>
               <a:buNone/>
               <a:defRPr/>
             </a:lvl5pPr>
@@ -9765,7 +9765,7 @@
               <a:buClr>
                 <a:schemeClr val="accent2"/>
               </a:buClr>
-              <a:buSzPts val="1800"/>
+              <a:buSzPts val="2400"/>
               <a:buNone/>
               <a:defRPr/>
             </a:lvl6pPr>
@@ -9782,7 +9782,7 @@
               <a:buClr>
                 <a:schemeClr val="accent2"/>
               </a:buClr>
-              <a:buSzPts val="1800"/>
+              <a:buSzPts val="2400"/>
               <a:buNone/>
               <a:defRPr/>
             </a:lvl7pPr>
@@ -9799,7 +9799,7 @@
               <a:buClr>
                 <a:schemeClr val="accent2"/>
               </a:buClr>
-              <a:buSzPts val="1800"/>
+              <a:buSzPts val="2400"/>
               <a:buNone/>
               <a:defRPr/>
             </a:lvl8pPr>
@@ -9816,7 +9816,7 @@
               <a:buClr>
                 <a:schemeClr val="accent2"/>
               </a:buClr>
-              <a:buSzPts val="1800"/>
+              <a:buSzPts val="2400"/>
               <a:buNone/>
               <a:defRPr/>
             </a:lvl9pPr>
@@ -9834,8 +9834,8 @@
         </p:nvSpPr>
         <p:spPr>
           <a:xfrm>
-            <a:off x="4914900" y="4767263"/>
-            <a:ext cx="1600200" cy="273844"/>
+            <a:off x="6553036" y="6356192"/>
+            <a:ext cx="2133547" cy="365116"/>
           </a:xfrm>
           <a:prstGeom prst="rect">
             <a:avLst/>
@@ -9846,7 +9846,7 @@
           </a:ln>
         </p:spPr>
         <p:txBody>
-          <a:bodyPr anchorCtr="0" anchor="ctr" bIns="45700" lIns="91425" spcFirstLastPara="1" rIns="91425" wrap="square" tIns="45700">
+          <a:bodyPr anchorCtr="0" anchor="ctr" bIns="60932" lIns="121897" spcFirstLastPara="1" rIns="121897" wrap="square" tIns="60932">
             <a:noAutofit/>
           </a:bodyPr>
           <a:lstStyle>
@@ -9863,7 +9863,7 @@
               <a:buClr>
                 <a:srgbClr val="888888"/>
               </a:buClr>
-              <a:buSzPts val="900"/>
+              <a:buSzPts val="1200"/>
               <a:buFont typeface="Calibri"/>
               <a:buNone/>
               <a:defRPr/>
@@ -9881,7 +9881,7 @@
               <a:buClr>
                 <a:srgbClr val="888888"/>
               </a:buClr>
-              <a:buSzPts val="900"/>
+              <a:buSzPts val="1200"/>
               <a:buFont typeface="Calibri"/>
               <a:buNone/>
               <a:defRPr/>
@@ -9899,7 +9899,7 @@
               <a:buClr>
                 <a:srgbClr val="888888"/>
               </a:buClr>
-              <a:buSzPts val="900"/>
+              <a:buSzPts val="1200"/>
               <a:buFont typeface="Calibri"/>
               <a:buNone/>
               <a:defRPr/>
@@ -9917,7 +9917,7 @@
               <a:buClr>
                 <a:srgbClr val="888888"/>
               </a:buClr>
-              <a:buSzPts val="900"/>
+              <a:buSzPts val="1200"/>
               <a:buFont typeface="Calibri"/>
               <a:buNone/>
               <a:defRPr/>
@@ -9935,7 +9935,7 @@
               <a:buClr>
                 <a:srgbClr val="888888"/>
               </a:buClr>
-              <a:buSzPts val="900"/>
+              <a:buSzPts val="1200"/>
               <a:buFont typeface="Calibri"/>
               <a:buNone/>
               <a:defRPr/>
@@ -9953,7 +9953,7 @@
               <a:buClr>
                 <a:srgbClr val="888888"/>
               </a:buClr>
-              <a:buSzPts val="900"/>
+              <a:buSzPts val="1200"/>
               <a:buFont typeface="Calibri"/>
               <a:buNone/>
               <a:defRPr/>
@@ -9971,7 +9971,7 @@
               <a:buClr>
                 <a:srgbClr val="888888"/>
               </a:buClr>
-              <a:buSzPts val="900"/>
+              <a:buSzPts val="1200"/>
               <a:buFont typeface="Calibri"/>
               <a:buNone/>
               <a:defRPr/>
@@ -9989,7 +9989,7 @@
               <a:buClr>
                 <a:srgbClr val="888888"/>
               </a:buClr>
-              <a:buSzPts val="900"/>
+              <a:buSzPts val="1200"/>
               <a:buFont typeface="Calibri"/>
               <a:buNone/>
               <a:defRPr/>
@@ -10007,7 +10007,7 @@
               <a:buClr>
                 <a:srgbClr val="888888"/>
               </a:buClr>
-              <a:buSzPts val="900"/>
+              <a:buSzPts val="1200"/>
               <a:buFont typeface="Calibri"/>
               <a:buNone/>
               <a:defRPr/>
@@ -10066,8 +10066,8 @@
         </p:nvSpPr>
         <p:spPr>
           <a:xfrm>
-            <a:off x="342900" y="204787"/>
-            <a:ext cx="2256235" cy="871538"/>
+            <a:off x="457189" y="273043"/>
+            <a:ext cx="3008238" cy="1162022"/>
           </a:xfrm>
           <a:prstGeom prst="rect">
             <a:avLst/>
@@ -10078,7 +10078,7 @@
           </a:ln>
         </p:spPr>
         <p:txBody>
-          <a:bodyPr anchorCtr="0" anchor="b" bIns="45700" lIns="91425" spcFirstLastPara="1" rIns="91425" wrap="square" tIns="45700">
+          <a:bodyPr anchorCtr="0" anchor="b" bIns="60932" lIns="121897" spcFirstLastPara="1" rIns="121897" wrap="square" tIns="60932">
             <a:normAutofit/>
           </a:bodyPr>
           <a:lstStyle>
@@ -10092,10 +10092,10 @@
               <a:buClr>
                 <a:schemeClr val="dk1"/>
               </a:buClr>
-              <a:buSzPts val="1500"/>
+              <a:buSzPts val="2000"/>
               <a:buFont typeface="Calibri"/>
               <a:buNone/>
-              <a:defRPr b="1" sz="1500"/>
+              <a:defRPr b="1" sz="2000"/>
             </a:lvl1pPr>
             <a:lvl2pPr lvl="1">
               <a:spcBef>
@@ -10104,7 +10104,7 @@
               <a:spcAft>
                 <a:spcPts val="0"/>
               </a:spcAft>
-              <a:buSzPts val="1400"/>
+              <a:buSzPts val="1867"/>
               <a:buNone/>
               <a:defRPr/>
             </a:lvl2pPr>
@@ -10115,7 +10115,7 @@
               <a:spcAft>
                 <a:spcPts val="0"/>
               </a:spcAft>
-              <a:buSzPts val="1400"/>
+              <a:buSzPts val="1867"/>
               <a:buNone/>
               <a:defRPr/>
             </a:lvl3pPr>
@@ -10126,7 +10126,7 @@
               <a:spcAft>
                 <a:spcPts val="0"/>
               </a:spcAft>
-              <a:buSzPts val="1400"/>
+              <a:buSzPts val="1867"/>
               <a:buNone/>
               <a:defRPr/>
             </a:lvl4pPr>
@@ -10137,7 +10137,7 @@
               <a:spcAft>
                 <a:spcPts val="0"/>
               </a:spcAft>
-              <a:buSzPts val="1400"/>
+              <a:buSzPts val="1867"/>
               <a:buNone/>
               <a:defRPr/>
             </a:lvl5pPr>
@@ -10148,7 +10148,7 @@
               <a:spcAft>
                 <a:spcPts val="0"/>
               </a:spcAft>
-              <a:buSzPts val="1400"/>
+              <a:buSzPts val="1867"/>
               <a:buNone/>
               <a:defRPr/>
             </a:lvl6pPr>
@@ -10159,7 +10159,7 @@
               <a:spcAft>
                 <a:spcPts val="0"/>
               </a:spcAft>
-              <a:buSzPts val="1400"/>
+              <a:buSzPts val="1867"/>
               <a:buNone/>
               <a:defRPr/>
             </a:lvl7pPr>
@@ -10170,7 +10170,7 @@
               <a:spcAft>
                 <a:spcPts val="0"/>
               </a:spcAft>
-              <a:buSzPts val="1400"/>
+              <a:buSzPts val="1867"/>
               <a:buNone/>
               <a:defRPr/>
             </a:lvl8pPr>
@@ -10181,7 +10181,7 @@
               <a:spcAft>
                 <a:spcPts val="0"/>
               </a:spcAft>
-              <a:buSzPts val="1400"/>
+              <a:buSzPts val="1867"/>
               <a:buNone/>
               <a:defRPr/>
             </a:lvl9pPr>
@@ -10199,8 +10199,8 @@
         </p:nvSpPr>
         <p:spPr>
           <a:xfrm>
-            <a:off x="2681287" y="204788"/>
-            <a:ext cx="3833813" cy="4389835"/>
+            <a:off x="3574960" y="273044"/>
+            <a:ext cx="5111623" cy="5852967"/>
           </a:xfrm>
           <a:prstGeom prst="rect">
             <a:avLst/>
@@ -10211,12 +10211,40 @@
           </a:ln>
         </p:spPr>
         <p:txBody>
-          <a:bodyPr anchorCtr="0" anchor="t" bIns="45700" lIns="91425" spcFirstLastPara="1" rIns="91425" wrap="square" tIns="45700">
+          <a:bodyPr anchorCtr="0" anchor="t" bIns="60932" lIns="121897" spcFirstLastPara="1" rIns="121897" wrap="square" tIns="60932">
             <a:normAutofit/>
           </a:bodyPr>
           <a:lstStyle>
             <a:lvl1pPr indent="-381000" lvl="0" marL="457200" algn="l">
               <a:spcBef>
+                <a:spcPts val="640"/>
+              </a:spcBef>
+              <a:spcAft>
+                <a:spcPts val="0"/>
+              </a:spcAft>
+              <a:buClr>
+                <a:schemeClr val="dk1"/>
+              </a:buClr>
+              <a:buSzPts val="3200"/>
+              <a:buChar char="•"/>
+              <a:defRPr sz="3200"/>
+            </a:lvl1pPr>
+            <a:lvl2pPr indent="-361950" lvl="1" marL="914400" algn="l">
+              <a:spcBef>
+                <a:spcPts val="560"/>
+              </a:spcBef>
+              <a:spcAft>
+                <a:spcPts val="0"/>
+              </a:spcAft>
+              <a:buClr>
+                <a:schemeClr val="dk1"/>
+              </a:buClr>
+              <a:buSzPts val="2800"/>
+              <a:buChar char="–"/>
+              <a:defRPr sz="2800"/>
+            </a:lvl2pPr>
+            <a:lvl3pPr indent="-342900" lvl="2" marL="1371600" algn="l">
+              <a:spcBef>
                 <a:spcPts val="480"/>
               </a:spcBef>
               <a:spcAft>
@@ -10228,38 +10256,10 @@
               <a:buSzPts val="2400"/>
               <a:buChar char="•"/>
               <a:defRPr sz="2400"/>
-            </a:lvl1pPr>
-            <a:lvl2pPr indent="-361950" lvl="1" marL="914400" algn="l">
-              <a:spcBef>
-                <a:spcPts val="420"/>
-              </a:spcBef>
-              <a:spcAft>
-                <a:spcPts val="0"/>
-              </a:spcAft>
-              <a:buClr>
-                <a:schemeClr val="dk1"/>
-              </a:buClr>
-              <a:buSzPts val="2100"/>
-              <a:buChar char="–"/>
-              <a:defRPr sz="2100"/>
-            </a:lvl2pPr>
-            <a:lvl3pPr indent="-342900" lvl="2" marL="1371600" algn="l">
-              <a:spcBef>
-                <a:spcPts val="360"/>
-              </a:spcBef>
-              <a:spcAft>
-                <a:spcPts val="0"/>
-              </a:spcAft>
-              <a:buClr>
-                <a:schemeClr val="dk1"/>
-              </a:buClr>
-              <a:buSzPts val="1800"/>
-              <a:buChar char="•"/>
-              <a:defRPr sz="1800"/>
             </a:lvl3pPr>
             <a:lvl4pPr indent="-323850" lvl="3" marL="1828800" algn="l">
               <a:spcBef>
-                <a:spcPts val="300"/>
+                <a:spcPts val="400"/>
               </a:spcBef>
               <a:spcAft>
                 <a:spcPts val="0"/>
@@ -10267,13 +10267,13 @@
               <a:buClr>
                 <a:schemeClr val="dk1"/>
               </a:buClr>
-              <a:buSzPts val="1500"/>
+              <a:buSzPts val="2000"/>
               <a:buChar char="–"/>
-              <a:defRPr sz="1500"/>
+              <a:defRPr sz="2000"/>
             </a:lvl4pPr>
             <a:lvl5pPr indent="-323850" lvl="4" marL="2286000" algn="l">
               <a:spcBef>
-                <a:spcPts val="300"/>
+                <a:spcPts val="400"/>
               </a:spcBef>
               <a:spcAft>
                 <a:spcPts val="0"/>
@@ -10281,13 +10281,13 @@
               <a:buClr>
                 <a:schemeClr val="dk1"/>
               </a:buClr>
-              <a:buSzPts val="1500"/>
+              <a:buSzPts val="2000"/>
               <a:buChar char="»"/>
-              <a:defRPr sz="1500"/>
+              <a:defRPr sz="2000"/>
             </a:lvl5pPr>
             <a:lvl6pPr indent="-323850" lvl="5" marL="2743200" algn="l">
               <a:spcBef>
-                <a:spcPts val="300"/>
+                <a:spcPts val="400"/>
               </a:spcBef>
               <a:spcAft>
                 <a:spcPts val="0"/>
@@ -10295,13 +10295,13 @@
               <a:buClr>
                 <a:schemeClr val="dk1"/>
               </a:buClr>
-              <a:buSzPts val="1500"/>
+              <a:buSzPts val="2000"/>
               <a:buChar char="•"/>
-              <a:defRPr sz="1500"/>
+              <a:defRPr sz="2000"/>
             </a:lvl6pPr>
             <a:lvl7pPr indent="-323850" lvl="6" marL="3200400" algn="l">
               <a:spcBef>
-                <a:spcPts val="300"/>
+                <a:spcPts val="400"/>
               </a:spcBef>
               <a:spcAft>
                 <a:spcPts val="0"/>
@@ -10309,13 +10309,13 @@
               <a:buClr>
                 <a:schemeClr val="dk1"/>
               </a:buClr>
-              <a:buSzPts val="1500"/>
+              <a:buSzPts val="2000"/>
               <a:buChar char="•"/>
-              <a:defRPr sz="1500"/>
+              <a:defRPr sz="2000"/>
             </a:lvl7pPr>
             <a:lvl8pPr indent="-323850" lvl="7" marL="3657600" algn="l">
               <a:spcBef>
-                <a:spcPts val="300"/>
+                <a:spcPts val="400"/>
               </a:spcBef>
               <a:spcAft>
                 <a:spcPts val="0"/>
@@ -10323,13 +10323,13 @@
               <a:buClr>
                 <a:schemeClr val="dk1"/>
               </a:buClr>
-              <a:buSzPts val="1500"/>
+              <a:buSzPts val="2000"/>
               <a:buChar char="•"/>
-              <a:defRPr sz="1500"/>
+              <a:defRPr sz="2000"/>
             </a:lvl8pPr>
             <a:lvl9pPr indent="-323850" lvl="8" marL="4114800" algn="l">
               <a:spcBef>
-                <a:spcPts val="300"/>
+                <a:spcPts val="400"/>
               </a:spcBef>
               <a:spcAft>
                 <a:spcPts val="0"/>
@@ -10337,9 +10337,9 @@
               <a:buClr>
                 <a:schemeClr val="dk1"/>
               </a:buClr>
-              <a:buSzPts val="1500"/>
+              <a:buSzPts val="2000"/>
               <a:buChar char="•"/>
-              <a:defRPr sz="1500"/>
+              <a:defRPr sz="2000"/>
             </a:lvl9pPr>
           </a:lstStyle>
           <a:p/>
@@ -10355,8 +10355,8 @@
         </p:nvSpPr>
         <p:spPr>
           <a:xfrm>
-            <a:off x="342900" y="1076326"/>
-            <a:ext cx="2256235" cy="3518297"/>
+            <a:off x="457189" y="1435065"/>
+            <a:ext cx="3008238" cy="4690945"/>
           </a:xfrm>
           <a:prstGeom prst="rect">
             <a:avLst/>
@@ -10367,13 +10367,13 @@
           </a:ln>
         </p:spPr>
         <p:txBody>
-          <a:bodyPr anchorCtr="0" anchor="t" bIns="45700" lIns="91425" spcFirstLastPara="1" rIns="91425" wrap="square" tIns="45700">
+          <a:bodyPr anchorCtr="0" anchor="t" bIns="60932" lIns="121897" spcFirstLastPara="1" rIns="121897" wrap="square" tIns="60932">
             <a:normAutofit/>
           </a:bodyPr>
           <a:lstStyle>
             <a:lvl1pPr indent="-228600" lvl="0" marL="457200" algn="l">
               <a:spcBef>
-                <a:spcPts val="210"/>
+                <a:spcPts val="280"/>
               </a:spcBef>
               <a:spcAft>
                 <a:spcPts val="0"/>
@@ -10381,13 +10381,13 @@
               <a:buClr>
                 <a:schemeClr val="dk1"/>
               </a:buClr>
-              <a:buSzPts val="1050"/>
-              <a:buNone/>
-              <a:defRPr sz="1050"/>
+              <a:buSzPts val="1400"/>
+              <a:buNone/>
+              <a:defRPr sz="1400"/>
             </a:lvl1pPr>
             <a:lvl2pPr indent="-228600" lvl="1" marL="914400" algn="l">
               <a:spcBef>
-                <a:spcPts val="180"/>
+                <a:spcPts val="240"/>
               </a:spcBef>
               <a:spcAft>
                 <a:spcPts val="0"/>
@@ -10395,13 +10395,13 @@
               <a:buClr>
                 <a:schemeClr val="dk1"/>
               </a:buClr>
-              <a:buSzPts val="900"/>
-              <a:buNone/>
-              <a:defRPr sz="900"/>
+              <a:buSzPts val="1200"/>
+              <a:buNone/>
+              <a:defRPr sz="1200"/>
             </a:lvl2pPr>
             <a:lvl3pPr indent="-228600" lvl="2" marL="1371600" algn="l">
               <a:spcBef>
-                <a:spcPts val="150"/>
+                <a:spcPts val="200"/>
               </a:spcBef>
               <a:spcAft>
                 <a:spcPts val="0"/>
@@ -10409,13 +10409,13 @@
               <a:buClr>
                 <a:schemeClr val="dk1"/>
               </a:buClr>
-              <a:buSzPts val="750"/>
-              <a:buNone/>
-              <a:defRPr sz="750"/>
+              <a:buSzPts val="1000"/>
+              <a:buNone/>
+              <a:defRPr sz="1000"/>
             </a:lvl3pPr>
             <a:lvl4pPr indent="-228600" lvl="3" marL="1828800" algn="l">
               <a:spcBef>
-                <a:spcPts val="135"/>
+                <a:spcPts val="180"/>
               </a:spcBef>
               <a:spcAft>
                 <a:spcPts val="0"/>
@@ -10423,13 +10423,13 @@
               <a:buClr>
                 <a:schemeClr val="dk1"/>
               </a:buClr>
-              <a:buSzPts val="675"/>
-              <a:buNone/>
-              <a:defRPr sz="675"/>
+              <a:buSzPts val="900"/>
+              <a:buNone/>
+              <a:defRPr sz="900"/>
             </a:lvl4pPr>
             <a:lvl5pPr indent="-228600" lvl="4" marL="2286000" algn="l">
               <a:spcBef>
-                <a:spcPts val="135"/>
+                <a:spcPts val="180"/>
               </a:spcBef>
               <a:spcAft>
                 <a:spcPts val="0"/>
@@ -10437,13 +10437,13 @@
               <a:buClr>
                 <a:schemeClr val="dk1"/>
               </a:buClr>
-              <a:buSzPts val="675"/>
-              <a:buNone/>
-              <a:defRPr sz="675"/>
+              <a:buSzPts val="900"/>
+              <a:buNone/>
+              <a:defRPr sz="900"/>
             </a:lvl5pPr>
             <a:lvl6pPr indent="-228600" lvl="5" marL="2743200" algn="l">
               <a:spcBef>
-                <a:spcPts val="135"/>
+                <a:spcPts val="180"/>
               </a:spcBef>
               <a:spcAft>
                 <a:spcPts val="0"/>
@@ -10451,13 +10451,13 @@
               <a:buClr>
                 <a:schemeClr val="dk1"/>
               </a:buClr>
-              <a:buSzPts val="675"/>
-              <a:buNone/>
-              <a:defRPr sz="675"/>
+              <a:buSzPts val="900"/>
+              <a:buNone/>
+              <a:defRPr sz="900"/>
             </a:lvl6pPr>
             <a:lvl7pPr indent="-228600" lvl="6" marL="3200400" algn="l">
               <a:spcBef>
-                <a:spcPts val="135"/>
+                <a:spcPts val="180"/>
               </a:spcBef>
               <a:spcAft>
                 <a:spcPts val="0"/>
@@ -10465,13 +10465,13 @@
               <a:buClr>
                 <a:schemeClr val="dk1"/>
               </a:buClr>
-              <a:buSzPts val="675"/>
-              <a:buNone/>
-              <a:defRPr sz="675"/>
+              <a:buSzPts val="900"/>
+              <a:buNone/>
+              <a:defRPr sz="900"/>
             </a:lvl7pPr>
             <a:lvl8pPr indent="-228600" lvl="7" marL="3657600" algn="l">
               <a:spcBef>
-                <a:spcPts val="135"/>
+                <a:spcPts val="180"/>
               </a:spcBef>
               <a:spcAft>
                 <a:spcPts val="0"/>
@@ -10479,13 +10479,13 @@
               <a:buClr>
                 <a:schemeClr val="dk1"/>
               </a:buClr>
-              <a:buSzPts val="675"/>
-              <a:buNone/>
-              <a:defRPr sz="675"/>
+              <a:buSzPts val="900"/>
+              <a:buNone/>
+              <a:defRPr sz="900"/>
             </a:lvl8pPr>
             <a:lvl9pPr indent="-228600" lvl="8" marL="4114800" algn="l">
               <a:spcBef>
-                <a:spcPts val="135"/>
+                <a:spcPts val="180"/>
               </a:spcBef>
               <a:spcAft>
                 <a:spcPts val="0"/>
@@ -10493,9 +10493,9 @@
               <a:buClr>
                 <a:schemeClr val="dk1"/>
               </a:buClr>
-              <a:buSzPts val="675"/>
-              <a:buNone/>
-              <a:defRPr sz="675"/>
+              <a:buSzPts val="900"/>
+              <a:buNone/>
+              <a:defRPr sz="900"/>
             </a:lvl9pPr>
           </a:lstStyle>
           <a:p/>
@@ -10511,8 +10511,8 @@
         </p:nvSpPr>
         <p:spPr>
           <a:xfrm>
-            <a:off x="342900" y="4767263"/>
-            <a:ext cx="1600200" cy="273844"/>
+            <a:off x="457189" y="6356192"/>
+            <a:ext cx="2133547" cy="365116"/>
           </a:xfrm>
           <a:prstGeom prst="rect">
             <a:avLst/>
@@ -10523,7 +10523,7 @@
           </a:ln>
         </p:spPr>
         <p:txBody>
-          <a:bodyPr anchorCtr="0" anchor="ctr" bIns="45700" lIns="91425" spcFirstLastPara="1" rIns="91425" wrap="square" tIns="45700">
+          <a:bodyPr anchorCtr="0" anchor="ctr" bIns="60932" lIns="121897" spcFirstLastPara="1" rIns="121897" wrap="square" tIns="60932">
             <a:noAutofit/>
           </a:bodyPr>
           <a:lstStyle>
@@ -10540,7 +10540,7 @@
               <a:buClr>
                 <a:srgbClr val="888888"/>
               </a:buClr>
-              <a:buSzPts val="1800"/>
+              <a:buSzPts val="2400"/>
               <a:buNone/>
               <a:defRPr/>
             </a:lvl1pPr>
@@ -10557,7 +10557,7 @@
               <a:buClr>
                 <a:schemeClr val="accent2"/>
               </a:buClr>
-              <a:buSzPts val="1800"/>
+              <a:buSzPts val="2400"/>
               <a:buNone/>
               <a:defRPr/>
             </a:lvl2pPr>
@@ -10574,7 +10574,7 @@
               <a:buClr>
                 <a:schemeClr val="accent2"/>
               </a:buClr>
-              <a:buSzPts val="1800"/>
+              <a:buSzPts val="2400"/>
               <a:buNone/>
               <a:defRPr/>
             </a:lvl3pPr>
@@ -10591,7 +10591,7 @@
               <a:buClr>
                 <a:schemeClr val="accent2"/>
               </a:buClr>
-              <a:buSzPts val="1800"/>
+              <a:buSzPts val="2400"/>
               <a:buNone/>
               <a:defRPr/>
             </a:lvl4pPr>
@@ -10608,7 +10608,7 @@
               <a:buClr>
                 <a:schemeClr val="accent2"/>
               </a:buClr>
-              <a:buSzPts val="1800"/>
+              <a:buSzPts val="2400"/>
               <a:buNone/>
               <a:defRPr/>
             </a:lvl5pPr>
@@ -10625,7 +10625,7 @@
               <a:buClr>
                 <a:schemeClr val="accent2"/>
               </a:buClr>
-              <a:buSzPts val="1800"/>
+              <a:buSzPts val="2400"/>
               <a:buNone/>
               <a:defRPr/>
             </a:lvl6pPr>
@@ -10642,7 +10642,7 @@
               <a:buClr>
                 <a:schemeClr val="accent2"/>
               </a:buClr>
-              <a:buSzPts val="1800"/>
+              <a:buSzPts val="2400"/>
               <a:buNone/>
               <a:defRPr/>
             </a:lvl7pPr>
@@ -10659,7 +10659,7 @@
               <a:buClr>
                 <a:schemeClr val="accent2"/>
               </a:buClr>
-              <a:buSzPts val="1800"/>
+              <a:buSzPts val="2400"/>
               <a:buNone/>
               <a:defRPr/>
             </a:lvl8pPr>
@@ -10676,7 +10676,7 @@
               <a:buClr>
                 <a:schemeClr val="accent2"/>
               </a:buClr>
-              <a:buSzPts val="1800"/>
+              <a:buSzPts val="2400"/>
               <a:buNone/>
               <a:defRPr/>
             </a:lvl9pPr>
@@ -10694,8 +10694,8 @@
         </p:nvSpPr>
         <p:spPr>
           <a:xfrm>
-            <a:off x="2343150" y="4767263"/>
-            <a:ext cx="2171700" cy="273844"/>
+            <a:off x="3124122" y="6356192"/>
+            <a:ext cx="2895528" cy="365116"/>
           </a:xfrm>
           <a:prstGeom prst="rect">
             <a:avLst/>
@@ -10706,7 +10706,7 @@
           </a:ln>
         </p:spPr>
         <p:txBody>
-          <a:bodyPr anchorCtr="0" anchor="ctr" bIns="45700" lIns="91425" spcFirstLastPara="1" rIns="91425" wrap="square" tIns="45700">
+          <a:bodyPr anchorCtr="0" anchor="ctr" bIns="60932" lIns="121897" spcFirstLastPara="1" rIns="121897" wrap="square" tIns="60932">
             <a:noAutofit/>
           </a:bodyPr>
           <a:lstStyle>
@@ -10723,7 +10723,7 @@
               <a:buClr>
                 <a:srgbClr val="888888"/>
               </a:buClr>
-              <a:buSzPts val="1800"/>
+              <a:buSzPts val="2400"/>
               <a:buNone/>
               <a:defRPr/>
             </a:lvl1pPr>
@@ -10740,7 +10740,7 @@
               <a:buClr>
                 <a:schemeClr val="accent2"/>
               </a:buClr>
-              <a:buSzPts val="1800"/>
+              <a:buSzPts val="2400"/>
               <a:buNone/>
               <a:defRPr/>
             </a:lvl2pPr>
@@ -10757,7 +10757,7 @@
               <a:buClr>
                 <a:schemeClr val="accent2"/>
               </a:buClr>
-              <a:buSzPts val="1800"/>
+              <a:buSzPts val="2400"/>
               <a:buNone/>
               <a:defRPr/>
             </a:lvl3pPr>
@@ -10774,7 +10774,7 @@
               <a:buClr>
                 <a:schemeClr val="accent2"/>
               </a:buClr>
-              <a:buSzPts val="1800"/>
+              <a:buSzPts val="2400"/>
               <a:buNone/>
               <a:defRPr/>
             </a:lvl4pPr>
@@ -10791,7 +10791,7 @@
               <a:buClr>
                 <a:schemeClr val="accent2"/>
               </a:buClr>
-              <a:buSzPts val="1800"/>
+              <a:buSzPts val="2400"/>
               <a:buNone/>
               <a:defRPr/>
             </a:lvl5pPr>
@@ -10808,7 +10808,7 @@
               <a:buClr>
                 <a:schemeClr val="accent2"/>
               </a:buClr>
-              <a:buSzPts val="1800"/>
+              <a:buSzPts val="2400"/>
               <a:buNone/>
               <a:defRPr/>
             </a:lvl6pPr>
@@ -10825,7 +10825,7 @@
               <a:buClr>
                 <a:schemeClr val="accent2"/>
               </a:buClr>
-              <a:buSzPts val="1800"/>
+              <a:buSzPts val="2400"/>
               <a:buNone/>
               <a:defRPr/>
             </a:lvl7pPr>
@@ -10842,7 +10842,7 @@
               <a:buClr>
                 <a:schemeClr val="accent2"/>
               </a:buClr>
-              <a:buSzPts val="1800"/>
+              <a:buSzPts val="2400"/>
               <a:buNone/>
               <a:defRPr/>
             </a:lvl8pPr>
@@ -10859,7 +10859,7 @@
               <a:buClr>
                 <a:schemeClr val="accent2"/>
               </a:buClr>
-              <a:buSzPts val="1800"/>
+              <a:buSzPts val="2400"/>
               <a:buNone/>
               <a:defRPr/>
             </a:lvl9pPr>
@@ -10877,8 +10877,8 @@
         </p:nvSpPr>
         <p:spPr>
           <a:xfrm>
-            <a:off x="4914900" y="4767263"/>
-            <a:ext cx="1600200" cy="273844"/>
+            <a:off x="6553036" y="6356192"/>
+            <a:ext cx="2133547" cy="365116"/>
           </a:xfrm>
           <a:prstGeom prst="rect">
             <a:avLst/>
@@ -10889,7 +10889,7 @@
           </a:ln>
         </p:spPr>
         <p:txBody>
-          <a:bodyPr anchorCtr="0" anchor="ctr" bIns="45700" lIns="91425" spcFirstLastPara="1" rIns="91425" wrap="square" tIns="45700">
+          <a:bodyPr anchorCtr="0" anchor="ctr" bIns="60932" lIns="121897" spcFirstLastPara="1" rIns="121897" wrap="square" tIns="60932">
             <a:noAutofit/>
           </a:bodyPr>
           <a:lstStyle>
@@ -10906,7 +10906,7 @@
               <a:buClr>
                 <a:srgbClr val="888888"/>
               </a:buClr>
-              <a:buSzPts val="900"/>
+              <a:buSzPts val="1200"/>
               <a:buFont typeface="Calibri"/>
               <a:buNone/>
               <a:defRPr/>
@@ -10924,7 +10924,7 @@
               <a:buClr>
                 <a:srgbClr val="888888"/>
               </a:buClr>
-              <a:buSzPts val="900"/>
+              <a:buSzPts val="1200"/>
               <a:buFont typeface="Calibri"/>
               <a:buNone/>
               <a:defRPr/>
@@ -10942,7 +10942,7 @@
               <a:buClr>
                 <a:srgbClr val="888888"/>
               </a:buClr>
-              <a:buSzPts val="900"/>
+              <a:buSzPts val="1200"/>
               <a:buFont typeface="Calibri"/>
               <a:buNone/>
               <a:defRPr/>
@@ -10960,7 +10960,7 @@
               <a:buClr>
                 <a:srgbClr val="888888"/>
               </a:buClr>
-              <a:buSzPts val="900"/>
+              <a:buSzPts val="1200"/>
               <a:buFont typeface="Calibri"/>
               <a:buNone/>
               <a:defRPr/>
@@ -10978,7 +10978,7 @@
               <a:buClr>
                 <a:srgbClr val="888888"/>
               </a:buClr>
-              <a:buSzPts val="900"/>
+              <a:buSzPts val="1200"/>
               <a:buFont typeface="Calibri"/>
               <a:buNone/>
               <a:defRPr/>
@@ -10996,7 +10996,7 @@
               <a:buClr>
                 <a:srgbClr val="888888"/>
               </a:buClr>
-              <a:buSzPts val="900"/>
+              <a:buSzPts val="1200"/>
               <a:buFont typeface="Calibri"/>
               <a:buNone/>
               <a:defRPr/>
@@ -11014,7 +11014,7 @@
               <a:buClr>
                 <a:srgbClr val="888888"/>
               </a:buClr>
-              <a:buSzPts val="900"/>
+              <a:buSzPts val="1200"/>
               <a:buFont typeface="Calibri"/>
               <a:buNone/>
               <a:defRPr/>
@@ -11032,7 +11032,7 @@
               <a:buClr>
                 <a:srgbClr val="888888"/>
               </a:buClr>
-              <a:buSzPts val="900"/>
+              <a:buSzPts val="1200"/>
               <a:buFont typeface="Calibri"/>
               <a:buNone/>
               <a:defRPr/>
@@ -11050,7 +11050,7 @@
               <a:buClr>
                 <a:srgbClr val="888888"/>
               </a:buClr>
-              <a:buSzPts val="900"/>
+              <a:buSzPts val="1200"/>
               <a:buFont typeface="Calibri"/>
               <a:buNone/>
               <a:defRPr/>
@@ -13325,8 +13325,8 @@
         </p:nvSpPr>
         <p:spPr>
           <a:xfrm>
-            <a:off x="342900" y="205978"/>
-            <a:ext cx="6172200" cy="857250"/>
+            <a:off x="457189" y="274630"/>
+            <a:ext cx="8229394" cy="1142971"/>
           </a:xfrm>
           <a:prstGeom prst="rect">
             <a:avLst/>
@@ -13337,7 +13337,7 @@
           </a:ln>
         </p:spPr>
         <p:txBody>
-          <a:bodyPr anchorCtr="0" anchor="ctr" bIns="45700" lIns="91425" spcFirstLastPara="1" rIns="91425" wrap="square" tIns="45700">
+          <a:bodyPr anchorCtr="0" anchor="ctr" bIns="60932" lIns="121897" spcFirstLastPara="1" rIns="121897" wrap="square" tIns="60932">
             <a:normAutofit/>
           </a:bodyPr>
           <a:lstStyle>
@@ -13351,10 +13351,10 @@
               <a:buClr>
                 <a:schemeClr val="dk1"/>
               </a:buClr>
-              <a:buSzPts val="3300"/>
+              <a:buSzPts val="4400"/>
               <a:buFont typeface="Calibri"/>
               <a:buNone/>
-              <a:defRPr b="0" i="0" sz="3300" u="none" cap="none" strike="noStrike">
+              <a:defRPr b="0" i="0" sz="4400" u="none" cap="none" strike="noStrike">
                 <a:solidFill>
                   <a:schemeClr val="dk1"/>
                 </a:solidFill>
@@ -13371,9 +13371,9 @@
               <a:spcAft>
                 <a:spcPts val="0"/>
               </a:spcAft>
-              <a:buSzPts val="1400"/>
-              <a:buNone/>
-              <a:defRPr sz="1800"/>
+              <a:buSzPts val="1867"/>
+              <a:buNone/>
+              <a:defRPr sz="2400"/>
             </a:lvl2pPr>
             <a:lvl3pPr lvl="2">
               <a:spcBef>
@@ -13382,9 +13382,9 @@
               <a:spcAft>
                 <a:spcPts val="0"/>
               </a:spcAft>
-              <a:buSzPts val="1400"/>
-              <a:buNone/>
-              <a:defRPr sz="1800"/>
+              <a:buSzPts val="1867"/>
+              <a:buNone/>
+              <a:defRPr sz="2400"/>
             </a:lvl3pPr>
             <a:lvl4pPr lvl="3">
               <a:spcBef>
@@ -13393,9 +13393,9 @@
               <a:spcAft>
                 <a:spcPts val="0"/>
               </a:spcAft>
-              <a:buSzPts val="1400"/>
-              <a:buNone/>
-              <a:defRPr sz="1800"/>
+              <a:buSzPts val="1867"/>
+              <a:buNone/>
+              <a:defRPr sz="2400"/>
             </a:lvl4pPr>
             <a:lvl5pPr lvl="4">
               <a:spcBef>
@@ -13404,9 +13404,9 @@
               <a:spcAft>
                 <a:spcPts val="0"/>
               </a:spcAft>
-              <a:buSzPts val="1400"/>
-              <a:buNone/>
-              <a:defRPr sz="1800"/>
+              <a:buSzPts val="1867"/>
+              <a:buNone/>
+              <a:defRPr sz="2400"/>
             </a:lvl5pPr>
             <a:lvl6pPr lvl="5">
               <a:spcBef>
@@ -13415,9 +13415,9 @@
               <a:spcAft>
                 <a:spcPts val="0"/>
               </a:spcAft>
-              <a:buSzPts val="1400"/>
-              <a:buNone/>
-              <a:defRPr sz="1800"/>
+              <a:buSzPts val="1867"/>
+              <a:buNone/>
+              <a:defRPr sz="2400"/>
             </a:lvl6pPr>
             <a:lvl7pPr lvl="6">
               <a:spcBef>
@@ -13426,9 +13426,9 @@
               <a:spcAft>
                 <a:spcPts val="0"/>
               </a:spcAft>
-              <a:buSzPts val="1400"/>
-              <a:buNone/>
-              <a:defRPr sz="1800"/>
+              <a:buSzPts val="1867"/>
+              <a:buNone/>
+              <a:defRPr sz="2400"/>
             </a:lvl7pPr>
             <a:lvl8pPr lvl="7">
               <a:spcBef>
@@ -13437,9 +13437,9 @@
               <a:spcAft>
                 <a:spcPts val="0"/>
               </a:spcAft>
-              <a:buSzPts val="1400"/>
-              <a:buNone/>
-              <a:defRPr sz="1800"/>
+              <a:buSzPts val="1867"/>
+              <a:buNone/>
+              <a:defRPr sz="2400"/>
             </a:lvl8pPr>
             <a:lvl9pPr lvl="8">
               <a:spcBef>
@@ -13448,9 +13448,9 @@
               <a:spcAft>
                 <a:spcPts val="0"/>
               </a:spcAft>
-              <a:buSzPts val="1400"/>
-              <a:buNone/>
-              <a:defRPr sz="1800"/>
+              <a:buSzPts val="1867"/>
+              <a:buNone/>
+              <a:defRPr sz="2400"/>
             </a:lvl9pPr>
           </a:lstStyle>
           <a:p/>
@@ -13466,8 +13466,8 @@
         </p:nvSpPr>
         <p:spPr>
           <a:xfrm>
-            <a:off x="342900" y="1200151"/>
-            <a:ext cx="6172200" cy="3394472"/>
+            <a:off x="457189" y="1600161"/>
+            <a:ext cx="8229394" cy="4525849"/>
           </a:xfrm>
           <a:prstGeom prst="rect">
             <a:avLst/>
@@ -13478,11 +13478,57 @@
           </a:ln>
         </p:spPr>
         <p:txBody>
-          <a:bodyPr anchorCtr="0" anchor="t" bIns="45700" lIns="91425" spcFirstLastPara="1" rIns="91425" wrap="square" tIns="45700">
+          <a:bodyPr anchorCtr="0" anchor="t" bIns="60932" lIns="121897" spcFirstLastPara="1" rIns="121897" wrap="square" tIns="60932">
             <a:normAutofit/>
           </a:bodyPr>
           <a:lstStyle>
             <a:lvl1pPr indent="-381000" lvl="0" marL="457200" marR="0" rtl="0" algn="l">
+              <a:spcBef>
+                <a:spcPts val="640"/>
+              </a:spcBef>
+              <a:spcAft>
+                <a:spcPts val="0"/>
+              </a:spcAft>
+              <a:buClr>
+                <a:schemeClr val="dk1"/>
+              </a:buClr>
+              <a:buSzPts val="3200"/>
+              <a:buFont typeface="Arial"/>
+              <a:buChar char="•"/>
+              <a:defRPr b="0" i="0" sz="3200" u="none" cap="none" strike="noStrike">
+                <a:solidFill>
+                  <a:schemeClr val="dk1"/>
+                </a:solidFill>
+                <a:latin typeface="Calibri"/>
+                <a:ea typeface="Calibri"/>
+                <a:cs typeface="Calibri"/>
+                <a:sym typeface="Calibri"/>
+              </a:defRPr>
+            </a:lvl1pPr>
+            <a:lvl2pPr indent="-361950" lvl="1" marL="914400" marR="0" rtl="0" algn="l">
+              <a:spcBef>
+                <a:spcPts val="560"/>
+              </a:spcBef>
+              <a:spcAft>
+                <a:spcPts val="0"/>
+              </a:spcAft>
+              <a:buClr>
+                <a:schemeClr val="dk1"/>
+              </a:buClr>
+              <a:buSzPts val="2800"/>
+              <a:buFont typeface="Arial"/>
+              <a:buChar char="–"/>
+              <a:defRPr b="0" i="0" sz="2800" u="none" cap="none" strike="noStrike">
+                <a:solidFill>
+                  <a:schemeClr val="dk1"/>
+                </a:solidFill>
+                <a:latin typeface="Calibri"/>
+                <a:ea typeface="Calibri"/>
+                <a:cs typeface="Calibri"/>
+                <a:sym typeface="Calibri"/>
+              </a:defRPr>
+            </a:lvl2pPr>
+            <a:lvl3pPr indent="-342900" lvl="2" marL="1371600" marR="0" rtl="0" algn="l">
               <a:spcBef>
                 <a:spcPts val="480"/>
               </a:spcBef>
@@ -13504,10 +13550,10 @@
                 <a:cs typeface="Calibri"/>
                 <a:sym typeface="Calibri"/>
               </a:defRPr>
-            </a:lvl1pPr>
-            <a:lvl2pPr indent="-361950" lvl="1" marL="914400" marR="0" rtl="0" algn="l">
-              <a:spcBef>
-                <a:spcPts val="420"/>
+            </a:lvl3pPr>
+            <a:lvl4pPr indent="-323850" lvl="3" marL="1828800" marR="0" rtl="0" algn="l">
+              <a:spcBef>
+                <a:spcPts val="400"/>
               </a:spcBef>
               <a:spcAft>
                 <a:spcPts val="0"/>
@@ -13515,56 +13561,10 @@
               <a:buClr>
                 <a:schemeClr val="dk1"/>
               </a:buClr>
-              <a:buSzPts val="2100"/>
+              <a:buSzPts val="2000"/>
               <a:buFont typeface="Arial"/>
               <a:buChar char="–"/>
-              <a:defRPr b="0" i="0" sz="2100" u="none" cap="none" strike="noStrike">
-                <a:solidFill>
-                  <a:schemeClr val="dk1"/>
-                </a:solidFill>
-                <a:latin typeface="Calibri"/>
-                <a:ea typeface="Calibri"/>
-                <a:cs typeface="Calibri"/>
-                <a:sym typeface="Calibri"/>
-              </a:defRPr>
-            </a:lvl2pPr>
-            <a:lvl3pPr indent="-342900" lvl="2" marL="1371600" marR="0" rtl="0" algn="l">
-              <a:spcBef>
-                <a:spcPts val="360"/>
-              </a:spcBef>
-              <a:spcAft>
-                <a:spcPts val="0"/>
-              </a:spcAft>
-              <a:buClr>
-                <a:schemeClr val="dk1"/>
-              </a:buClr>
-              <a:buSzPts val="1800"/>
-              <a:buFont typeface="Arial"/>
-              <a:buChar char="•"/>
-              <a:defRPr b="0" i="0" sz="1800" u="none" cap="none" strike="noStrike">
-                <a:solidFill>
-                  <a:schemeClr val="dk1"/>
-                </a:solidFill>
-                <a:latin typeface="Calibri"/>
-                <a:ea typeface="Calibri"/>
-                <a:cs typeface="Calibri"/>
-                <a:sym typeface="Calibri"/>
-              </a:defRPr>
-            </a:lvl3pPr>
-            <a:lvl4pPr indent="-323850" lvl="3" marL="1828800" marR="0" rtl="0" algn="l">
-              <a:spcBef>
-                <a:spcPts val="300"/>
-              </a:spcBef>
-              <a:spcAft>
-                <a:spcPts val="0"/>
-              </a:spcAft>
-              <a:buClr>
-                <a:schemeClr val="dk1"/>
-              </a:buClr>
-              <a:buSzPts val="1500"/>
-              <a:buFont typeface="Arial"/>
-              <a:buChar char="–"/>
-              <a:defRPr b="0" i="0" sz="1500" u="none" cap="none" strike="noStrike">
+              <a:defRPr b="0" i="0" sz="2000" u="none" cap="none" strike="noStrike">
                 <a:solidFill>
                   <a:schemeClr val="dk1"/>
                 </a:solidFill>
@@ -13576,7 +13576,7 @@
             </a:lvl4pPr>
             <a:lvl5pPr indent="-323850" lvl="4" marL="2286000" marR="0" rtl="0" algn="l">
               <a:spcBef>
-                <a:spcPts val="300"/>
+                <a:spcPts val="400"/>
               </a:spcBef>
               <a:spcAft>
                 <a:spcPts val="0"/>
@@ -13584,10 +13584,10 @@
               <a:buClr>
                 <a:schemeClr val="dk1"/>
               </a:buClr>
-              <a:buSzPts val="1500"/>
+              <a:buSzPts val="2000"/>
               <a:buFont typeface="Arial"/>
               <a:buChar char="»"/>
-              <a:defRPr b="0" i="0" sz="1500" u="none" cap="none" strike="noStrike">
+              <a:defRPr b="0" i="0" sz="2000" u="none" cap="none" strike="noStrike">
                 <a:solidFill>
                   <a:schemeClr val="dk1"/>
                 </a:solidFill>
@@ -13599,7 +13599,7 @@
             </a:lvl5pPr>
             <a:lvl6pPr indent="-323850" lvl="5" marL="2743200" marR="0" rtl="0" algn="l">
               <a:spcBef>
-                <a:spcPts val="300"/>
+                <a:spcPts val="400"/>
               </a:spcBef>
               <a:spcAft>
                 <a:spcPts val="0"/>
@@ -13607,10 +13607,10 @@
               <a:buClr>
                 <a:schemeClr val="dk1"/>
               </a:buClr>
-              <a:buSzPts val="1500"/>
+              <a:buSzPts val="2000"/>
               <a:buFont typeface="Arial"/>
               <a:buChar char="•"/>
-              <a:defRPr b="0" i="0" sz="1500" u="none" cap="none" strike="noStrike">
+              <a:defRPr b="0" i="0" sz="2000" u="none" cap="none" strike="noStrike">
                 <a:solidFill>
                   <a:schemeClr val="dk1"/>
                 </a:solidFill>
@@ -13622,7 +13622,7 @@
             </a:lvl6pPr>
             <a:lvl7pPr indent="-323850" lvl="6" marL="3200400" marR="0" rtl="0" algn="l">
               <a:spcBef>
-                <a:spcPts val="300"/>
+                <a:spcPts val="400"/>
               </a:spcBef>
               <a:spcAft>
                 <a:spcPts val="0"/>
@@ -13630,10 +13630,10 @@
               <a:buClr>
                 <a:schemeClr val="dk1"/>
               </a:buClr>
-              <a:buSzPts val="1500"/>
+              <a:buSzPts val="2000"/>
               <a:buFont typeface="Arial"/>
               <a:buChar char="•"/>
-              <a:defRPr b="0" i="0" sz="1500" u="none" cap="none" strike="noStrike">
+              <a:defRPr b="0" i="0" sz="2000" u="none" cap="none" strike="noStrike">
                 <a:solidFill>
                   <a:schemeClr val="dk1"/>
                 </a:solidFill>
@@ -13645,7 +13645,7 @@
             </a:lvl7pPr>
             <a:lvl8pPr indent="-323850" lvl="7" marL="3657600" marR="0" rtl="0" algn="l">
               <a:spcBef>
-                <a:spcPts val="300"/>
+                <a:spcPts val="400"/>
               </a:spcBef>
               <a:spcAft>
                 <a:spcPts val="0"/>
@@ -13653,10 +13653,10 @@
               <a:buClr>
                 <a:schemeClr val="dk1"/>
               </a:buClr>
-              <a:buSzPts val="1500"/>
+              <a:buSzPts val="2000"/>
               <a:buFont typeface="Arial"/>
               <a:buChar char="•"/>
-              <a:defRPr b="0" i="0" sz="1500" u="none" cap="none" strike="noStrike">
+              <a:defRPr b="0" i="0" sz="2000" u="none" cap="none" strike="noStrike">
                 <a:solidFill>
                   <a:schemeClr val="dk1"/>
                 </a:solidFill>
@@ -13668,7 +13668,7 @@
             </a:lvl8pPr>
             <a:lvl9pPr indent="-323850" lvl="8" marL="4114800" marR="0" rtl="0" algn="l">
               <a:spcBef>
-                <a:spcPts val="300"/>
+                <a:spcPts val="400"/>
               </a:spcBef>
               <a:spcAft>
                 <a:spcPts val="0"/>
@@ -13676,10 +13676,10 @@
               <a:buClr>
                 <a:schemeClr val="dk1"/>
               </a:buClr>
-              <a:buSzPts val="1500"/>
+              <a:buSzPts val="2000"/>
               <a:buFont typeface="Arial"/>
               <a:buChar char="•"/>
-              <a:defRPr b="0" i="0" sz="1500" u="none" cap="none" strike="noStrike">
+              <a:defRPr b="0" i="0" sz="2000" u="none" cap="none" strike="noStrike">
                 <a:solidFill>
                   <a:schemeClr val="dk1"/>
                 </a:solidFill>
@@ -13703,8 +13703,8 @@
         </p:nvSpPr>
         <p:spPr>
           <a:xfrm>
-            <a:off x="342900" y="4767263"/>
-            <a:ext cx="1600200" cy="273844"/>
+            <a:off x="457189" y="6356192"/>
+            <a:ext cx="2133547" cy="365116"/>
           </a:xfrm>
           <a:prstGeom prst="rect">
             <a:avLst/>
@@ -13715,7 +13715,7 @@
           </a:ln>
         </p:spPr>
         <p:txBody>
-          <a:bodyPr anchorCtr="0" anchor="ctr" bIns="45700" lIns="91425" spcFirstLastPara="1" rIns="91425" wrap="square" tIns="45700">
+          <a:bodyPr anchorCtr="0" anchor="ctr" bIns="60932" lIns="121897" spcFirstLastPara="1" rIns="121897" wrap="square" tIns="60932">
             <a:noAutofit/>
           </a:bodyPr>
           <a:lstStyle>
@@ -13732,10 +13732,10 @@
               <a:buClr>
                 <a:srgbClr val="888888"/>
               </a:buClr>
-              <a:buSzPts val="900"/>
+              <a:buSzPts val="1200"/>
               <a:buFont typeface="Calibri"/>
               <a:buNone/>
-              <a:defRPr b="0" i="0" sz="900" u="none" cap="none" strike="noStrike">
+              <a:defRPr b="0" i="0" sz="1200" u="none" cap="none" strike="noStrike">
                 <a:solidFill>
                   <a:srgbClr val="888888"/>
                 </a:solidFill>
@@ -13758,10 +13758,10 @@
               <a:buClr>
                 <a:schemeClr val="accent2"/>
               </a:buClr>
-              <a:buSzPts val="1400"/>
+              <a:buSzPts val="1867"/>
               <a:buFont typeface="Calibri"/>
               <a:buNone/>
-              <a:defRPr b="0" i="0" sz="1400" u="none" cap="none" strike="noStrike">
+              <a:defRPr b="0" i="0" sz="1867" u="none" cap="none" strike="noStrike">
                 <a:solidFill>
                   <a:schemeClr val="accent2"/>
                 </a:solidFill>
@@ -13784,10 +13784,10 @@
               <a:buClr>
                 <a:schemeClr val="accent2"/>
               </a:buClr>
-              <a:buSzPts val="1400"/>
+              <a:buSzPts val="1867"/>
               <a:buFont typeface="Calibri"/>
               <a:buNone/>
-              <a:defRPr b="0" i="0" sz="1400" u="none" cap="none" strike="noStrike">
+              <a:defRPr b="0" i="0" sz="1867" u="none" cap="none" strike="noStrike">
                 <a:solidFill>
                   <a:schemeClr val="accent2"/>
                 </a:solidFill>
@@ -13810,10 +13810,10 @@
               <a:buClr>
                 <a:schemeClr val="accent2"/>
               </a:buClr>
-              <a:buSzPts val="1400"/>
+              <a:buSzPts val="1867"/>
               <a:buFont typeface="Calibri"/>
               <a:buNone/>
-              <a:defRPr b="0" i="0" sz="1400" u="none" cap="none" strike="noStrike">
+              <a:defRPr b="0" i="0" sz="1867" u="none" cap="none" strike="noStrike">
                 <a:solidFill>
                   <a:schemeClr val="accent2"/>
                 </a:solidFill>
@@ -13836,10 +13836,10 @@
               <a:buClr>
                 <a:schemeClr val="accent2"/>
               </a:buClr>
-              <a:buSzPts val="1400"/>
+              <a:buSzPts val="1867"/>
               <a:buFont typeface="Calibri"/>
               <a:buNone/>
-              <a:defRPr b="0" i="0" sz="1400" u="none" cap="none" strike="noStrike">
+              <a:defRPr b="0" i="0" sz="1867" u="none" cap="none" strike="noStrike">
                 <a:solidFill>
                   <a:schemeClr val="accent2"/>
                 </a:solidFill>
@@ -13862,10 +13862,10 @@
               <a:buClr>
                 <a:schemeClr val="accent2"/>
               </a:buClr>
-              <a:buSzPts val="1400"/>
+              <a:buSzPts val="1867"/>
               <a:buFont typeface="Calibri"/>
               <a:buNone/>
-              <a:defRPr b="0" i="0" sz="1400" u="none" cap="none" strike="noStrike">
+              <a:defRPr b="0" i="0" sz="1867" u="none" cap="none" strike="noStrike">
                 <a:solidFill>
                   <a:schemeClr val="accent2"/>
                 </a:solidFill>
@@ -13888,10 +13888,10 @@
               <a:buClr>
                 <a:schemeClr val="accent2"/>
               </a:buClr>
-              <a:buSzPts val="1400"/>
+              <a:buSzPts val="1867"/>
               <a:buFont typeface="Calibri"/>
               <a:buNone/>
-              <a:defRPr b="0" i="0" sz="1400" u="none" cap="none" strike="noStrike">
+              <a:defRPr b="0" i="0" sz="1867" u="none" cap="none" strike="noStrike">
                 <a:solidFill>
                   <a:schemeClr val="accent2"/>
                 </a:solidFill>
@@ -13914,10 +13914,10 @@
               <a:buClr>
                 <a:schemeClr val="accent2"/>
               </a:buClr>
-              <a:buSzPts val="1400"/>
+              <a:buSzPts val="1867"/>
               <a:buFont typeface="Calibri"/>
               <a:buNone/>
-              <a:defRPr b="0" i="0" sz="1400" u="none" cap="none" strike="noStrike">
+              <a:defRPr b="0" i="0" sz="1867" u="none" cap="none" strike="noStrike">
                 <a:solidFill>
                   <a:schemeClr val="accent2"/>
                 </a:solidFill>
@@ -13940,10 +13940,10 @@
               <a:buClr>
                 <a:schemeClr val="accent2"/>
               </a:buClr>
-              <a:buSzPts val="1400"/>
+              <a:buSzPts val="1867"/>
               <a:buFont typeface="Calibri"/>
               <a:buNone/>
-              <a:defRPr b="0" i="0" sz="1400" u="none" cap="none" strike="noStrike">
+              <a:defRPr b="0" i="0" sz="1867" u="none" cap="none" strike="noStrike">
                 <a:solidFill>
                   <a:schemeClr val="accent2"/>
                 </a:solidFill>
@@ -13967,8 +13967,8 @@
         </p:nvSpPr>
         <p:spPr>
           <a:xfrm>
-            <a:off x="2343150" y="4767263"/>
-            <a:ext cx="2171700" cy="273844"/>
+            <a:off x="3124122" y="6356192"/>
+            <a:ext cx="2895528" cy="365116"/>
           </a:xfrm>
           <a:prstGeom prst="rect">
             <a:avLst/>
@@ -13979,7 +13979,7 @@
           </a:ln>
         </p:spPr>
         <p:txBody>
-          <a:bodyPr anchorCtr="0" anchor="ctr" bIns="45700" lIns="91425" spcFirstLastPara="1" rIns="91425" wrap="square" tIns="45700">
+          <a:bodyPr anchorCtr="0" anchor="ctr" bIns="60932" lIns="121897" spcFirstLastPara="1" rIns="121897" wrap="square" tIns="60932">
             <a:noAutofit/>
           </a:bodyPr>
           <a:lstStyle>
@@ -13996,10 +13996,10 @@
               <a:buClr>
                 <a:srgbClr val="888888"/>
               </a:buClr>
-              <a:buSzPts val="900"/>
+              <a:buSzPts val="1200"/>
               <a:buFont typeface="Calibri"/>
               <a:buNone/>
-              <a:defRPr b="0" i="0" sz="900" u="none" cap="none" strike="noStrike">
+              <a:defRPr b="0" i="0" sz="1200" u="none" cap="none" strike="noStrike">
                 <a:solidFill>
                   <a:srgbClr val="888888"/>
                 </a:solidFill>
@@ -14022,10 +14022,10 @@
               <a:buClr>
                 <a:schemeClr val="accent2"/>
               </a:buClr>
-              <a:buSzPts val="1400"/>
+              <a:buSzPts val="1867"/>
               <a:buFont typeface="Calibri"/>
               <a:buNone/>
-              <a:defRPr b="0" i="0" sz="1400" u="none" cap="none" strike="noStrike">
+              <a:defRPr b="0" i="0" sz="1867" u="none" cap="none" strike="noStrike">
                 <a:solidFill>
                   <a:schemeClr val="accent2"/>
                 </a:solidFill>
@@ -14048,10 +14048,10 @@
               <a:buClr>
                 <a:schemeClr val="accent2"/>
               </a:buClr>
-              <a:buSzPts val="1400"/>
+              <a:buSzPts val="1867"/>
               <a:buFont typeface="Calibri"/>
               <a:buNone/>
-              <a:defRPr b="0" i="0" sz="1400" u="none" cap="none" strike="noStrike">
+              <a:defRPr b="0" i="0" sz="1867" u="none" cap="none" strike="noStrike">
                 <a:solidFill>
                   <a:schemeClr val="accent2"/>
                 </a:solidFill>
@@ -14074,10 +14074,10 @@
               <a:buClr>
                 <a:schemeClr val="accent2"/>
               </a:buClr>
-              <a:buSzPts val="1400"/>
+              <a:buSzPts val="1867"/>
               <a:buFont typeface="Calibri"/>
               <a:buNone/>
-              <a:defRPr b="0" i="0" sz="1400" u="none" cap="none" strike="noStrike">
+              <a:defRPr b="0" i="0" sz="1867" u="none" cap="none" strike="noStrike">
                 <a:solidFill>
                   <a:schemeClr val="accent2"/>
                 </a:solidFill>
@@ -14100,10 +14100,10 @@
               <a:buClr>
                 <a:schemeClr val="accent2"/>
               </a:buClr>
-              <a:buSzPts val="1400"/>
+              <a:buSzPts val="1867"/>
               <a:buFont typeface="Calibri"/>
               <a:buNone/>
-              <a:defRPr b="0" i="0" sz="1400" u="none" cap="none" strike="noStrike">
+              <a:defRPr b="0" i="0" sz="1867" u="none" cap="none" strike="noStrike">
                 <a:solidFill>
                   <a:schemeClr val="accent2"/>
                 </a:solidFill>
@@ -14126,10 +14126,10 @@
               <a:buClr>
                 <a:schemeClr val="accent2"/>
               </a:buClr>
-              <a:buSzPts val="1400"/>
+              <a:buSzPts val="1867"/>
               <a:buFont typeface="Calibri"/>
               <a:buNone/>
-              <a:defRPr b="0" i="0" sz="1400" u="none" cap="none" strike="noStrike">
+              <a:defRPr b="0" i="0" sz="1867" u="none" cap="none" strike="noStrike">
                 <a:solidFill>
                   <a:schemeClr val="accent2"/>
                 </a:solidFill>
@@ -14152,10 +14152,10 @@
               <a:buClr>
                 <a:schemeClr val="accent2"/>
               </a:buClr>
-              <a:buSzPts val="1400"/>
+              <a:buSzPts val="1867"/>
               <a:buFont typeface="Calibri"/>
               <a:buNone/>
-              <a:defRPr b="0" i="0" sz="1400" u="none" cap="none" strike="noStrike">
+              <a:defRPr b="0" i="0" sz="1867" u="none" cap="none" strike="noStrike">
                 <a:solidFill>
                   <a:schemeClr val="accent2"/>
                 </a:solidFill>
@@ -14178,10 +14178,10 @@
               <a:buClr>
                 <a:schemeClr val="accent2"/>
               </a:buClr>
-              <a:buSzPts val="1400"/>
+              <a:buSzPts val="1867"/>
               <a:buFont typeface="Calibri"/>
               <a:buNone/>
-              <a:defRPr b="0" i="0" sz="1400" u="none" cap="none" strike="noStrike">
+              <a:defRPr b="0" i="0" sz="1867" u="none" cap="none" strike="noStrike">
                 <a:solidFill>
                   <a:schemeClr val="accent2"/>
                 </a:solidFill>
@@ -14204,10 +14204,10 @@
               <a:buClr>
                 <a:schemeClr val="accent2"/>
               </a:buClr>
-              <a:buSzPts val="1400"/>
+              <a:buSzPts val="1867"/>
               <a:buFont typeface="Calibri"/>
               <a:buNone/>
-              <a:defRPr b="0" i="0" sz="1400" u="none" cap="none" strike="noStrike">
+              <a:defRPr b="0" i="0" sz="1867" u="none" cap="none" strike="noStrike">
                 <a:solidFill>
                   <a:schemeClr val="accent2"/>
                 </a:solidFill>
@@ -14231,8 +14231,8 @@
         </p:nvSpPr>
         <p:spPr>
           <a:xfrm>
-            <a:off x="4914900" y="4767263"/>
-            <a:ext cx="1600200" cy="273844"/>
+            <a:off x="6553036" y="6356192"/>
+            <a:ext cx="2133547" cy="365116"/>
           </a:xfrm>
           <a:prstGeom prst="rect">
             <a:avLst/>
@@ -14243,7 +14243,7 @@
           </a:ln>
         </p:spPr>
         <p:txBody>
-          <a:bodyPr anchorCtr="0" anchor="ctr" bIns="45700" lIns="91425" spcFirstLastPara="1" rIns="91425" wrap="square" tIns="45700">
+          <a:bodyPr anchorCtr="0" anchor="ctr" bIns="60932" lIns="121897" spcFirstLastPara="1" rIns="121897" wrap="square" tIns="60932">
             <a:noAutofit/>
           </a:bodyPr>
           <a:lstStyle>
@@ -14260,10 +14260,10 @@
               <a:buClr>
                 <a:srgbClr val="888888"/>
               </a:buClr>
-              <a:buSzPts val="900"/>
+              <a:buSzPts val="1200"/>
               <a:buFont typeface="Calibri"/>
               <a:buNone/>
-              <a:defRPr b="0" i="0" sz="900" u="none" cap="none" strike="noStrike">
+              <a:defRPr b="0" i="0" sz="1200" u="none" cap="none" strike="noStrike">
                 <a:solidFill>
                   <a:srgbClr val="888888"/>
                 </a:solidFill>
@@ -14286,10 +14286,10 @@
               <a:buClr>
                 <a:srgbClr val="888888"/>
               </a:buClr>
-              <a:buSzPts val="900"/>
+              <a:buSzPts val="1200"/>
               <a:buFont typeface="Calibri"/>
               <a:buNone/>
-              <a:defRPr b="0" i="0" sz="900" u="none" cap="none" strike="noStrike">
+              <a:defRPr b="0" i="0" sz="1200" u="none" cap="none" strike="noStrike">
                 <a:solidFill>
                   <a:srgbClr val="888888"/>
                 </a:solidFill>
@@ -14312,10 +14312,10 @@
               <a:buClr>
                 <a:srgbClr val="888888"/>
               </a:buClr>
-              <a:buSzPts val="900"/>
+              <a:buSzPts val="1200"/>
               <a:buFont typeface="Calibri"/>
               <a:buNone/>
-              <a:defRPr b="0" i="0" sz="900" u="none" cap="none" strike="noStrike">
+              <a:defRPr b="0" i="0" sz="1200" u="none" cap="none" strike="noStrike">
                 <a:solidFill>
                   <a:srgbClr val="888888"/>
                 </a:solidFill>
@@ -14338,10 +14338,10 @@
               <a:buClr>
                 <a:srgbClr val="888888"/>
               </a:buClr>
-              <a:buSzPts val="900"/>
+              <a:buSzPts val="1200"/>
               <a:buFont typeface="Calibri"/>
               <a:buNone/>
-              <a:defRPr b="0" i="0" sz="900" u="none" cap="none" strike="noStrike">
+              <a:defRPr b="0" i="0" sz="1200" u="none" cap="none" strike="noStrike">
                 <a:solidFill>
                   <a:srgbClr val="888888"/>
                 </a:solidFill>
@@ -14364,10 +14364,10 @@
               <a:buClr>
                 <a:srgbClr val="888888"/>
               </a:buClr>
-              <a:buSzPts val="900"/>
+              <a:buSzPts val="1200"/>
               <a:buFont typeface="Calibri"/>
               <a:buNone/>
-              <a:defRPr b="0" i="0" sz="900" u="none" cap="none" strike="noStrike">
+              <a:defRPr b="0" i="0" sz="1200" u="none" cap="none" strike="noStrike">
                 <a:solidFill>
                   <a:srgbClr val="888888"/>
                 </a:solidFill>
@@ -14390,10 +14390,10 @@
               <a:buClr>
                 <a:srgbClr val="888888"/>
               </a:buClr>
-              <a:buSzPts val="900"/>
+              <a:buSzPts val="1200"/>
               <a:buFont typeface="Calibri"/>
               <a:buNone/>
-              <a:defRPr b="0" i="0" sz="900" u="none" cap="none" strike="noStrike">
+              <a:defRPr b="0" i="0" sz="1200" u="none" cap="none" strike="noStrike">
                 <a:solidFill>
                   <a:srgbClr val="888888"/>
                 </a:solidFill>
@@ -14416,10 +14416,10 @@
               <a:buClr>
                 <a:srgbClr val="888888"/>
               </a:buClr>
-              <a:buSzPts val="900"/>
+              <a:buSzPts val="1200"/>
               <a:buFont typeface="Calibri"/>
               <a:buNone/>
-              <a:defRPr b="0" i="0" sz="900" u="none" cap="none" strike="noStrike">
+              <a:defRPr b="0" i="0" sz="1200" u="none" cap="none" strike="noStrike">
                 <a:solidFill>
                   <a:srgbClr val="888888"/>
                 </a:solidFill>
@@ -14442,10 +14442,10 @@
               <a:buClr>
                 <a:srgbClr val="888888"/>
               </a:buClr>
-              <a:buSzPts val="900"/>
+              <a:buSzPts val="1200"/>
               <a:buFont typeface="Calibri"/>
               <a:buNone/>
-              <a:defRPr b="0" i="0" sz="900" u="none" cap="none" strike="noStrike">
+              <a:defRPr b="0" i="0" sz="1200" u="none" cap="none" strike="noStrike">
                 <a:solidFill>
                   <a:srgbClr val="888888"/>
                 </a:solidFill>
@@ -14468,10 +14468,10 @@
               <a:buClr>
                 <a:srgbClr val="888888"/>
               </a:buClr>
-              <a:buSzPts val="900"/>
+              <a:buSzPts val="1200"/>
               <a:buFont typeface="Calibri"/>
               <a:buNone/>
-              <a:defRPr b="0" i="0" sz="900" u="none" cap="none" strike="noStrike">
+              <a:defRPr b="0" i="0" sz="1200" u="none" cap="none" strike="noStrike">
                 <a:solidFill>
                   <a:srgbClr val="888888"/>
                 </a:solidFill>
@@ -14545,7 +14545,7 @@
           <a:srgbClr val="000000"/>
         </a:buClr>
         <a:buFont typeface="Arial"/>
-        <a:defRPr b="0" i="0" sz="1400" u="none" cap="none" strike="noStrike">
+        <a:defRPr b="0" i="0" sz="1867" u="none" cap="none" strike="noStrike">
           <a:solidFill>
             <a:srgbClr val="000000"/>
           </a:solidFill>
@@ -14569,7 +14569,7 @@
           <a:srgbClr val="000000"/>
         </a:buClr>
         <a:buFont typeface="Arial"/>
-        <a:defRPr b="0" i="0" sz="1400" u="none" cap="none" strike="noStrike">
+        <a:defRPr b="0" i="0" sz="1867" u="none" cap="none" strike="noStrike">
           <a:solidFill>
             <a:srgbClr val="000000"/>
           </a:solidFill>
@@ -14593,7 +14593,7 @@
           <a:srgbClr val="000000"/>
         </a:buClr>
         <a:buFont typeface="Arial"/>
-        <a:defRPr b="0" i="0" sz="1400" u="none" cap="none" strike="noStrike">
+        <a:defRPr b="0" i="0" sz="1867" u="none" cap="none" strike="noStrike">
           <a:solidFill>
             <a:srgbClr val="000000"/>
           </a:solidFill>
@@ -14617,7 +14617,7 @@
           <a:srgbClr val="000000"/>
         </a:buClr>
         <a:buFont typeface="Arial"/>
-        <a:defRPr b="0" i="0" sz="1400" u="none" cap="none" strike="noStrike">
+        <a:defRPr b="0" i="0" sz="1867" u="none" cap="none" strike="noStrike">
           <a:solidFill>
             <a:srgbClr val="000000"/>
           </a:solidFill>
@@ -14641,7 +14641,7 @@
           <a:srgbClr val="000000"/>
         </a:buClr>
         <a:buFont typeface="Arial"/>
-        <a:defRPr b="0" i="0" sz="1400" u="none" cap="none" strike="noStrike">
+        <a:defRPr b="0" i="0" sz="1867" u="none" cap="none" strike="noStrike">
           <a:solidFill>
             <a:srgbClr val="000000"/>
           </a:solidFill>
@@ -14665,7 +14665,7 @@
           <a:srgbClr val="000000"/>
         </a:buClr>
         <a:buFont typeface="Arial"/>
-        <a:defRPr b="0" i="0" sz="1400" u="none" cap="none" strike="noStrike">
+        <a:defRPr b="0" i="0" sz="1867" u="none" cap="none" strike="noStrike">
           <a:solidFill>
             <a:srgbClr val="000000"/>
           </a:solidFill>
@@ -14689,7 +14689,7 @@
           <a:srgbClr val="000000"/>
         </a:buClr>
         <a:buFont typeface="Arial"/>
-        <a:defRPr b="0" i="0" sz="1400" u="none" cap="none" strike="noStrike">
+        <a:defRPr b="0" i="0" sz="1867" u="none" cap="none" strike="noStrike">
           <a:solidFill>
             <a:srgbClr val="000000"/>
           </a:solidFill>
@@ -14713,7 +14713,7 @@
           <a:srgbClr val="000000"/>
         </a:buClr>
         <a:buFont typeface="Arial"/>
-        <a:defRPr b="0" i="0" sz="1400" u="none" cap="none" strike="noStrike">
+        <a:defRPr b="0" i="0" sz="1867" u="none" cap="none" strike="noStrike">
           <a:solidFill>
             <a:srgbClr val="000000"/>
           </a:solidFill>
@@ -14737,7 +14737,7 @@
           <a:srgbClr val="000000"/>
         </a:buClr>
         <a:buFont typeface="Arial"/>
-        <a:defRPr b="0" i="0" sz="1400" u="none" cap="none" strike="noStrike">
+        <a:defRPr b="0" i="0" sz="1867" u="none" cap="none" strike="noStrike">
           <a:solidFill>
             <a:srgbClr val="000000"/>
           </a:solidFill>
@@ -14774,7 +14774,7 @@
           <a:srgbClr val="000000"/>
         </a:buClr>
         <a:buFont typeface="Arial"/>
-        <a:defRPr b="0" i="0" sz="1400" u="none" cap="none" strike="noStrike">
+        <a:defRPr b="0" i="0" sz="1867" u="none" cap="none" strike="noStrike">
           <a:solidFill>
             <a:srgbClr val="000000"/>
           </a:solidFill>
@@ -14798,7 +14798,7 @@
           <a:srgbClr val="000000"/>
         </a:buClr>
         <a:buFont typeface="Arial"/>
-        <a:defRPr b="0" i="0" sz="1400" u="none" cap="none" strike="noStrike">
+        <a:defRPr b="0" i="0" sz="1867" u="none" cap="none" strike="noStrike">
           <a:solidFill>
             <a:srgbClr val="000000"/>
           </a:solidFill>
@@ -14822,7 +14822,7 @@
           <a:srgbClr val="000000"/>
         </a:buClr>
         <a:buFont typeface="Arial"/>
-        <a:defRPr b="0" i="0" sz="1400" u="none" cap="none" strike="noStrike">
+        <a:defRPr b="0" i="0" sz="1867" u="none" cap="none" strike="noStrike">
           <a:solidFill>
             <a:srgbClr val="000000"/>
           </a:solidFill>
@@ -14846,7 +14846,7 @@
           <a:srgbClr val="000000"/>
         </a:buClr>
         <a:buFont typeface="Arial"/>
-        <a:defRPr b="0" i="0" sz="1400" u="none" cap="none" strike="noStrike">
+        <a:defRPr b="0" i="0" sz="1867" u="none" cap="none" strike="noStrike">
           <a:solidFill>
             <a:srgbClr val="000000"/>
           </a:solidFill>
@@ -14870,7 +14870,7 @@
           <a:srgbClr val="000000"/>
         </a:buClr>
         <a:buFont typeface="Arial"/>
-        <a:defRPr b="0" i="0" sz="1400" u="none" cap="none" strike="noStrike">
+        <a:defRPr b="0" i="0" sz="1867" u="none" cap="none" strike="noStrike">
           <a:solidFill>
             <a:srgbClr val="000000"/>
           </a:solidFill>
@@ -14894,7 +14894,7 @@
           <a:srgbClr val="000000"/>
         </a:buClr>
         <a:buFont typeface="Arial"/>
-        <a:defRPr b="0" i="0" sz="1400" u="none" cap="none" strike="noStrike">
+        <a:defRPr b="0" i="0" sz="1867" u="none" cap="none" strike="noStrike">
           <a:solidFill>
             <a:srgbClr val="000000"/>
           </a:solidFill>
@@ -14918,7 +14918,7 @@
           <a:srgbClr val="000000"/>
         </a:buClr>
         <a:buFont typeface="Arial"/>
-        <a:defRPr b="0" i="0" sz="1400" u="none" cap="none" strike="noStrike">
+        <a:defRPr b="0" i="0" sz="1867" u="none" cap="none" strike="noStrike">
           <a:solidFill>
             <a:srgbClr val="000000"/>
           </a:solidFill>
@@ -14942,7 +14942,7 @@
           <a:srgbClr val="000000"/>
         </a:buClr>
         <a:buFont typeface="Arial"/>
-        <a:defRPr b="0" i="0" sz="1400" u="none" cap="none" strike="noStrike">
+        <a:defRPr b="0" i="0" sz="1867" u="none" cap="none" strike="noStrike">
           <a:solidFill>
             <a:srgbClr val="000000"/>
           </a:solidFill>
@@ -14966,7 +14966,7 @@
           <a:srgbClr val="000000"/>
         </a:buClr>
         <a:buFont typeface="Arial"/>
-        <a:defRPr b="0" i="0" sz="1400" u="none" cap="none" strike="noStrike">
+        <a:defRPr b="0" i="0" sz="1867" u="none" cap="none" strike="noStrike">
           <a:solidFill>
             <a:srgbClr val="000000"/>
           </a:solidFill>
@@ -15003,7 +15003,7 @@
           <a:srgbClr val="000000"/>
         </a:buClr>
         <a:buFont typeface="Arial"/>
-        <a:defRPr b="0" i="0" sz="1400" u="none" cap="none" strike="noStrike">
+        <a:defRPr b="0" i="0" sz="1867" u="none" cap="none" strike="noStrike">
           <a:solidFill>
             <a:srgbClr val="000000"/>
           </a:solidFill>
@@ -15027,7 +15027,7 @@
           <a:srgbClr val="000000"/>
         </a:buClr>
         <a:buFont typeface="Arial"/>
-        <a:defRPr b="0" i="0" sz="1400" u="none" cap="none" strike="noStrike">
+        <a:defRPr b="0" i="0" sz="1867" u="none" cap="none" strike="noStrike">
           <a:solidFill>
             <a:srgbClr val="000000"/>
           </a:solidFill>
@@ -15051,7 +15051,7 @@
           <a:srgbClr val="000000"/>
         </a:buClr>
         <a:buFont typeface="Arial"/>
-        <a:defRPr b="0" i="0" sz="1400" u="none" cap="none" strike="noStrike">
+        <a:defRPr b="0" i="0" sz="1867" u="none" cap="none" strike="noStrike">
           <a:solidFill>
             <a:srgbClr val="000000"/>
           </a:solidFill>
@@ -15075,7 +15075,7 @@
           <a:srgbClr val="000000"/>
         </a:buClr>
         <a:buFont typeface="Arial"/>
-        <a:defRPr b="0" i="0" sz="1400" u="none" cap="none" strike="noStrike">
+        <a:defRPr b="0" i="0" sz="1867" u="none" cap="none" strike="noStrike">
           <a:solidFill>
             <a:srgbClr val="000000"/>
           </a:solidFill>
@@ -15099,7 +15099,7 @@
           <a:srgbClr val="000000"/>
         </a:buClr>
         <a:buFont typeface="Arial"/>
-        <a:defRPr b="0" i="0" sz="1400" u="none" cap="none" strike="noStrike">
+        <a:defRPr b="0" i="0" sz="1867" u="none" cap="none" strike="noStrike">
           <a:solidFill>
             <a:srgbClr val="000000"/>
           </a:solidFill>
@@ -15123,7 +15123,7 @@
           <a:srgbClr val="000000"/>
         </a:buClr>
         <a:buFont typeface="Arial"/>
-        <a:defRPr b="0" i="0" sz="1400" u="none" cap="none" strike="noStrike">
+        <a:defRPr b="0" i="0" sz="1867" u="none" cap="none" strike="noStrike">
           <a:solidFill>
             <a:srgbClr val="000000"/>
           </a:solidFill>
@@ -15147,7 +15147,7 @@
           <a:srgbClr val="000000"/>
         </a:buClr>
         <a:buFont typeface="Arial"/>
-        <a:defRPr b="0" i="0" sz="1400" u="none" cap="none" strike="noStrike">
+        <a:defRPr b="0" i="0" sz="1867" u="none" cap="none" strike="noStrike">
           <a:solidFill>
             <a:srgbClr val="000000"/>
           </a:solidFill>
@@ -15171,7 +15171,7 @@
           <a:srgbClr val="000000"/>
         </a:buClr>
         <a:buFont typeface="Arial"/>
-        <a:defRPr b="0" i="0" sz="1400" u="none" cap="none" strike="noStrike">
+        <a:defRPr b="0" i="0" sz="1867" u="none" cap="none" strike="noStrike">
           <a:solidFill>
             <a:srgbClr val="000000"/>
           </a:solidFill>
@@ -15195,7 +15195,7 @@
           <a:srgbClr val="000000"/>
         </a:buClr>
         <a:buFont typeface="Arial"/>
-        <a:defRPr b="0" i="0" sz="1400" u="none" cap="none" strike="noStrike">
+        <a:defRPr b="0" i="0" sz="1867" u="none" cap="none" strike="noStrike">
           <a:solidFill>
             <a:srgbClr val="000000"/>
           </a:solidFill>
@@ -15235,8 +15235,8 @@
         </p:nvSpPr>
         <p:spPr>
           <a:xfrm>
-            <a:off x="8113014" y="4834890"/>
-            <a:ext cx="685800" cy="205740"/>
+            <a:off x="10817081" y="6446359"/>
+            <a:ext cx="914377" cy="274313"/>
           </a:xfrm>
           <a:prstGeom prst="rect">
             <a:avLst/>
@@ -15247,7 +15247,7 @@
           </a:ln>
         </p:spPr>
         <p:txBody>
-          <a:bodyPr anchorCtr="0" anchor="ctr" bIns="45700" lIns="91425" spcFirstLastPara="1" rIns="91425" wrap="square" tIns="45700">
+          <a:bodyPr anchorCtr="0" anchor="ctr" bIns="60932" lIns="121897" spcFirstLastPara="1" rIns="121897" wrap="square" tIns="60932">
             <a:noAutofit/>
           </a:bodyPr>
           <a:lstStyle/>
@@ -15265,12 +15265,12 @@
               <a:buClr>
                 <a:srgbClr val="8A8895"/>
               </a:buClr>
-              <a:buSzPts val="675"/>
+              <a:buSzPts val="900"/>
               <a:buFont typeface="Proxima Nova"/>
               <a:buNone/>
             </a:pPr>
             <a:r>
-              <a:rPr b="0" i="0" lang="en" sz="675" u="none" cap="none" strike="noStrike">
+              <a:rPr b="0" i="0" lang="en" sz="900" u="none" cap="none" strike="noStrike">
                 <a:solidFill>
                   <a:srgbClr val="8A8895"/>
                 </a:solidFill>
@@ -15281,7 +15281,7 @@
               </a:rPr>
               <a:t>12</a:t>
             </a:r>
-            <a:endParaRPr b="0" i="0" sz="675" u="none" cap="none" strike="noStrike">
+            <a:endParaRPr b="0" i="0" sz="900" u="none" cap="none" strike="noStrike">
               <a:solidFill>
                 <a:srgbClr val="C0504D"/>
               </a:solidFill>
@@ -15301,8 +15301,8 @@
         </p:nvSpPr>
         <p:spPr>
           <a:xfrm>
-            <a:off x="342900" y="774954"/>
-            <a:ext cx="7886700" cy="377190"/>
+            <a:off x="457189" y="1033246"/>
+            <a:ext cx="10515337" cy="502907"/>
           </a:xfrm>
           <a:prstGeom prst="rect">
             <a:avLst/>
@@ -15331,12 +15331,12 @@
               <a:buClr>
                 <a:srgbClr val="1A1428"/>
               </a:buClr>
-              <a:buSzPts val="2100"/>
+              <a:buSzPts val="2800"/>
               <a:buFont typeface="Proxima Nova"/>
               <a:buNone/>
             </a:pPr>
             <a:r>
-              <a:rPr b="1" i="0" lang="en" sz="2100" u="none" cap="none" strike="noStrike">
+              <a:rPr b="1" i="0" lang="en" sz="2800" u="none" cap="none" strike="noStrike">
                 <a:solidFill>
                   <a:srgbClr val="1A1428"/>
                 </a:solidFill>
@@ -15347,7 +15347,7 @@
               </a:rPr>
               <a:t>Integration built for everyone.</a:t>
             </a:r>
-            <a:endParaRPr b="0" i="0" sz="2100" u="none" cap="none" strike="noStrike">
+            <a:endParaRPr b="0" i="0" sz="2800" u="none" cap="none" strike="noStrike">
               <a:solidFill>
                 <a:srgbClr val="C0504D"/>
               </a:solidFill>
@@ -15367,8 +15367,8 @@
         </p:nvSpPr>
         <p:spPr>
           <a:xfrm>
-            <a:off x="342900" y="1165860"/>
-            <a:ext cx="7886700" cy="288036"/>
+            <a:off x="457189" y="1554441"/>
+            <a:ext cx="10515337" cy="384038"/>
           </a:xfrm>
           <a:prstGeom prst="rect">
             <a:avLst/>
@@ -15397,12 +15397,12 @@
               <a:buClr>
                 <a:srgbClr val="4A4A55"/>
               </a:buClr>
-              <a:buSzPts val="900"/>
+              <a:buSzPts val="1200"/>
               <a:buFont typeface="Proxima Nova"/>
               <a:buNone/>
             </a:pPr>
             <a:r>
-              <a:rPr b="0" i="0" lang="en" sz="900" u="none" cap="none" strike="noStrike">
+              <a:rPr b="0" i="0" lang="en" sz="1200" u="none" cap="none" strike="noStrike">
                 <a:solidFill>
                   <a:srgbClr val="4A4A55"/>
                 </a:solidFill>
@@ -15413,7 +15413,7 @@
               </a:rPr>
               <a:t>Controls engineers are some of the busiest people in the factory. Customize what works best for them, no code required.</a:t>
             </a:r>
-            <a:endParaRPr b="0" i="0" sz="900" u="none" cap="none" strike="noStrike">
+            <a:endParaRPr b="0" i="0" sz="1200" u="none" cap="none" strike="noStrike">
               <a:solidFill>
                 <a:srgbClr val="C0504D"/>
               </a:solidFill>
@@ -15433,8 +15433,8 @@
         </p:nvSpPr>
         <p:spPr>
           <a:xfrm>
-            <a:off x="342900" y="1690050"/>
-            <a:ext cx="123444" cy="123444"/>
+            <a:off x="457189" y="2253344"/>
+            <a:ext cx="164588" cy="164588"/>
           </a:xfrm>
           <a:prstGeom prst="ellipse">
             <a:avLst/>
@@ -15442,7 +15442,7 @@
           <a:solidFill>
             <a:srgbClr val="8B6FE8"/>
           </a:solidFill>
-          <a:ln cap="flat" cmpd="sng" w="12700">
+          <a:ln cap="flat" cmpd="sng" w="16933">
             <a:solidFill>
               <a:srgbClr val="8B6FE8"/>
             </a:solidFill>
@@ -15453,7 +15453,7 @@
           </a:ln>
         </p:spPr>
         <p:txBody>
-          <a:bodyPr anchorCtr="0" anchor="t" bIns="45700" lIns="91425" spcFirstLastPara="1" rIns="91425" wrap="square" tIns="45700">
+          <a:bodyPr anchorCtr="0" anchor="t" bIns="60932" lIns="121897" spcFirstLastPara="1" rIns="121897" wrap="square" tIns="60932">
             <a:noAutofit/>
           </a:bodyPr>
           <a:lstStyle/>
@@ -15471,14 +15471,14 @@
               <a:buClr>
                 <a:srgbClr val="C0504D"/>
               </a:buClr>
-              <a:buSzPts val="1050"/>
+              <a:buSzPts val="1400"/>
               <a:buFont typeface="Calibri"/>
               <a:buNone/>
             </a:pPr>
             <a:r>
               <a:t/>
             </a:r>
-            <a:endParaRPr b="0" i="0" sz="1050" u="none" cap="none" strike="noStrike">
+            <a:endParaRPr b="0" i="0" sz="1400" u="none" cap="none" strike="noStrike">
               <a:solidFill>
                 <a:srgbClr val="C0504D"/>
               </a:solidFill>
@@ -15498,8 +15498,8 @@
         </p:nvSpPr>
         <p:spPr>
           <a:xfrm>
-            <a:off x="562356" y="1648902"/>
-            <a:ext cx="2180844" cy="205740"/>
+            <a:off x="749789" y="2198481"/>
+            <a:ext cx="2907719" cy="274313"/>
           </a:xfrm>
           <a:prstGeom prst="rect">
             <a:avLst/>
@@ -15528,12 +15528,12 @@
               <a:buClr>
                 <a:srgbClr val="1A1428"/>
               </a:buClr>
-              <a:buSzPts val="1050"/>
+              <a:buSzPts val="1400"/>
               <a:buFont typeface="Proxima Nova"/>
               <a:buNone/>
             </a:pPr>
             <a:r>
-              <a:rPr b="1" i="0" lang="en" sz="1050" u="none" cap="none" strike="noStrike">
+              <a:rPr b="1" i="0" lang="en" sz="1400" u="none" cap="none" strike="noStrike">
                 <a:solidFill>
                   <a:srgbClr val="1A1428"/>
                 </a:solidFill>
@@ -15544,7 +15544,7 @@
               </a:rPr>
               <a:t>Drag-and-drop logic</a:t>
             </a:r>
-            <a:endParaRPr b="0" i="0" sz="1050" u="none" cap="none" strike="noStrike">
+            <a:endParaRPr b="0" i="0" sz="1400" u="none" cap="none" strike="noStrike">
               <a:solidFill>
                 <a:srgbClr val="C0504D"/>
               </a:solidFill>
@@ -15564,8 +15564,8 @@
         </p:nvSpPr>
         <p:spPr>
           <a:xfrm>
-            <a:off x="562356" y="1882074"/>
-            <a:ext cx="2180844" cy="514350"/>
+            <a:off x="749789" y="2509369"/>
+            <a:ext cx="2907719" cy="685783"/>
           </a:xfrm>
           <a:prstGeom prst="rect">
             <a:avLst/>
@@ -15594,12 +15594,12 @@
               <a:buClr>
                 <a:srgbClr val="4A4A55"/>
               </a:buClr>
-              <a:buSzPts val="825"/>
+              <a:buSzPts val="1100"/>
               <a:buFont typeface="Proxima Nova"/>
               <a:buNone/>
             </a:pPr>
             <a:r>
-              <a:rPr b="0" i="0" lang="en" sz="825" u="none" cap="none" strike="noStrike">
+              <a:rPr b="0" i="0" lang="en" sz="1100" u="none" cap="none" strike="noStrike">
                 <a:solidFill>
                   <a:srgbClr val="4A4A55"/>
                 </a:solidFill>
@@ -15610,7 +15610,7 @@
               </a:rPr>
               <a:t>Anyone can author inspection logic without writing code.</a:t>
             </a:r>
-            <a:endParaRPr b="0" i="0" sz="825" u="none" cap="none" strike="noStrike">
+            <a:endParaRPr b="0" i="0" sz="1100" u="none" cap="none" strike="noStrike">
               <a:solidFill>
                 <a:srgbClr val="C0504D"/>
               </a:solidFill>
@@ -15630,8 +15630,8 @@
         </p:nvSpPr>
         <p:spPr>
           <a:xfrm>
-            <a:off x="342900" y="2492436"/>
-            <a:ext cx="123444" cy="123444"/>
+            <a:off x="457189" y="3323165"/>
+            <a:ext cx="164588" cy="164588"/>
           </a:xfrm>
           <a:prstGeom prst="ellipse">
             <a:avLst/>
@@ -15639,7 +15639,7 @@
           <a:solidFill>
             <a:srgbClr val="8B6FE8"/>
           </a:solidFill>
-          <a:ln cap="flat" cmpd="sng" w="12700">
+          <a:ln cap="flat" cmpd="sng" w="16933">
             <a:solidFill>
               <a:srgbClr val="8B6FE8"/>
             </a:solidFill>
@@ -15650,7 +15650,7 @@
           </a:ln>
         </p:spPr>
         <p:txBody>
-          <a:bodyPr anchorCtr="0" anchor="t" bIns="45700" lIns="91425" spcFirstLastPara="1" rIns="91425" wrap="square" tIns="45700">
+          <a:bodyPr anchorCtr="0" anchor="t" bIns="60932" lIns="121897" spcFirstLastPara="1" rIns="121897" wrap="square" tIns="60932">
             <a:noAutofit/>
           </a:bodyPr>
           <a:lstStyle/>
@@ -15668,14 +15668,14 @@
               <a:buClr>
                 <a:srgbClr val="C0504D"/>
               </a:buClr>
-              <a:buSzPts val="1050"/>
+              <a:buSzPts val="1400"/>
               <a:buFont typeface="Calibri"/>
               <a:buNone/>
             </a:pPr>
             <a:r>
               <a:t/>
             </a:r>
-            <a:endParaRPr b="0" i="0" sz="1050" u="none" cap="none" strike="noStrike">
+            <a:endParaRPr b="0" i="0" sz="1400" u="none" cap="none" strike="noStrike">
               <a:solidFill>
                 <a:srgbClr val="C0504D"/>
               </a:solidFill>
@@ -15695,8 +15695,8 @@
         </p:nvSpPr>
         <p:spPr>
           <a:xfrm>
-            <a:off x="562356" y="2451288"/>
-            <a:ext cx="2180844" cy="205740"/>
+            <a:off x="749789" y="3268302"/>
+            <a:ext cx="2907719" cy="274313"/>
           </a:xfrm>
           <a:prstGeom prst="rect">
             <a:avLst/>
@@ -15725,12 +15725,12 @@
               <a:buClr>
                 <a:srgbClr val="1A1428"/>
               </a:buClr>
-              <a:buSzPts val="1050"/>
+              <a:buSzPts val="1400"/>
               <a:buFont typeface="Proxima Nova"/>
               <a:buNone/>
             </a:pPr>
             <a:r>
-              <a:rPr b="1" i="0" lang="en" sz="1050" u="none" cap="none" strike="noStrike">
+              <a:rPr b="1" i="0" lang="en" sz="1400" u="none" cap="none" strike="noStrike">
                 <a:solidFill>
                   <a:srgbClr val="1A1428"/>
                 </a:solidFill>
@@ -15741,7 +15741,7 @@
               </a:rPr>
               <a:t>PLC, MES, HMI</a:t>
             </a:r>
-            <a:endParaRPr b="0" i="0" sz="1050" u="none" cap="none" strike="noStrike">
+            <a:endParaRPr b="0" i="0" sz="1400" u="none" cap="none" strike="noStrike">
               <a:solidFill>
                 <a:srgbClr val="C0504D"/>
               </a:solidFill>
@@ -15761,8 +15761,8 @@
         </p:nvSpPr>
         <p:spPr>
           <a:xfrm>
-            <a:off x="562356" y="2684460"/>
-            <a:ext cx="2180844" cy="514350"/>
+            <a:off x="749789" y="3579190"/>
+            <a:ext cx="2907719" cy="685783"/>
           </a:xfrm>
           <a:prstGeom prst="rect">
             <a:avLst/>
@@ -15791,12 +15791,12 @@
               <a:buClr>
                 <a:srgbClr val="4A4A55"/>
               </a:buClr>
-              <a:buSzPts val="825"/>
+              <a:buSzPts val="1100"/>
               <a:buFont typeface="Proxima Nova"/>
               <a:buNone/>
             </a:pPr>
             <a:r>
-              <a:rPr b="0" i="0" lang="en" sz="825" u="none" cap="none" strike="noStrike">
+              <a:rPr b="0" i="0" lang="en" sz="1100" u="none" cap="none" strike="noStrike">
                 <a:solidFill>
                   <a:srgbClr val="4A4A55"/>
                 </a:solidFill>
@@ -15807,7 +15807,7 @@
               </a:rPr>
               <a:t>Bring real factory data into the camera and push results back out.</a:t>
             </a:r>
-            <a:endParaRPr b="0" i="0" sz="825" u="none" cap="none" strike="noStrike">
+            <a:endParaRPr b="0" i="0" sz="1100" u="none" cap="none" strike="noStrike">
               <a:solidFill>
                 <a:srgbClr val="C0504D"/>
               </a:solidFill>
@@ -15827,8 +15827,8 @@
         </p:nvSpPr>
         <p:spPr>
           <a:xfrm>
-            <a:off x="342900" y="3294822"/>
-            <a:ext cx="123444" cy="123444"/>
+            <a:off x="457189" y="4392986"/>
+            <a:ext cx="164588" cy="164588"/>
           </a:xfrm>
           <a:prstGeom prst="ellipse">
             <a:avLst/>
@@ -15836,7 +15836,7 @@
           <a:solidFill>
             <a:srgbClr val="8B6FE8"/>
           </a:solidFill>
-          <a:ln cap="flat" cmpd="sng" w="12700">
+          <a:ln cap="flat" cmpd="sng" w="16933">
             <a:solidFill>
               <a:srgbClr val="8B6FE8"/>
             </a:solidFill>
@@ -15847,7 +15847,7 @@
           </a:ln>
         </p:spPr>
         <p:txBody>
-          <a:bodyPr anchorCtr="0" anchor="t" bIns="45700" lIns="91425" spcFirstLastPara="1" rIns="91425" wrap="square" tIns="45700">
+          <a:bodyPr anchorCtr="0" anchor="t" bIns="60932" lIns="121897" spcFirstLastPara="1" rIns="121897" wrap="square" tIns="60932">
             <a:noAutofit/>
           </a:bodyPr>
           <a:lstStyle/>
@@ -15865,14 +15865,14 @@
               <a:buClr>
                 <a:srgbClr val="C0504D"/>
               </a:buClr>
-              <a:buSzPts val="1050"/>
+              <a:buSzPts val="1400"/>
               <a:buFont typeface="Calibri"/>
               <a:buNone/>
             </a:pPr>
             <a:r>
               <a:t/>
             </a:r>
-            <a:endParaRPr b="0" i="0" sz="1050" u="none" cap="none" strike="noStrike">
+            <a:endParaRPr b="0" i="0" sz="1400" u="none" cap="none" strike="noStrike">
               <a:solidFill>
                 <a:srgbClr val="C0504D"/>
               </a:solidFill>
@@ -15892,8 +15892,8 @@
         </p:nvSpPr>
         <p:spPr>
           <a:xfrm>
-            <a:off x="562356" y="3253674"/>
-            <a:ext cx="2180844" cy="205740"/>
+            <a:off x="749789" y="4338123"/>
+            <a:ext cx="2907719" cy="274313"/>
           </a:xfrm>
           <a:prstGeom prst="rect">
             <a:avLst/>
@@ -15922,12 +15922,12 @@
               <a:buClr>
                 <a:srgbClr val="1A1428"/>
               </a:buClr>
-              <a:buSzPts val="1050"/>
+              <a:buSzPts val="1400"/>
               <a:buFont typeface="Proxima Nova"/>
               <a:buNone/>
             </a:pPr>
             <a:r>
-              <a:rPr b="1" i="0" lang="en" sz="1050" u="none" cap="none" strike="noStrike">
+              <a:rPr b="1" i="0" lang="en" sz="1400" u="none" cap="none" strike="noStrike">
                 <a:solidFill>
                   <a:srgbClr val="1A1428"/>
                 </a:solidFill>
@@ -15938,7 +15938,7 @@
               </a:rPr>
               <a:t>Custom dashboards</a:t>
             </a:r>
-            <a:endParaRPr b="0" i="0" sz="1050" u="none" cap="none" strike="noStrike">
+            <a:endParaRPr b="0" i="0" sz="1400" u="none" cap="none" strike="noStrike">
               <a:solidFill>
                 <a:srgbClr val="C0504D"/>
               </a:solidFill>
@@ -15958,8 +15958,8 @@
         </p:nvSpPr>
         <p:spPr>
           <a:xfrm>
-            <a:off x="562356" y="3486846"/>
-            <a:ext cx="2180844" cy="514350"/>
+            <a:off x="749789" y="4649012"/>
+            <a:ext cx="2907719" cy="685783"/>
           </a:xfrm>
           <a:prstGeom prst="rect">
             <a:avLst/>
@@ -15988,12 +15988,12 @@
               <a:buClr>
                 <a:srgbClr val="4A4A55"/>
               </a:buClr>
-              <a:buSzPts val="825"/>
+              <a:buSzPts val="1100"/>
               <a:buFont typeface="Proxima Nova"/>
               <a:buNone/>
             </a:pPr>
             <a:r>
-              <a:rPr b="0" i="0" lang="en" sz="825" u="none" cap="none" strike="noStrike">
+              <a:rPr b="0" i="0" lang="en" sz="1100" u="none" cap="none" strike="noStrike">
                 <a:solidFill>
                   <a:srgbClr val="4A4A55"/>
                 </a:solidFill>
@@ -16004,7 +16004,7 @@
               </a:rPr>
               <a:t>Generate the views and reports each engineer actually needs.</a:t>
             </a:r>
-            <a:endParaRPr b="0" i="0" sz="825" u="none" cap="none" strike="noStrike">
+            <a:endParaRPr b="0" i="0" sz="1100" u="none" cap="none" strike="noStrike">
               <a:solidFill>
                 <a:srgbClr val="C0504D"/>
               </a:solidFill>
@@ -16031,8 +16031,8 @@
         </p:blipFill>
         <p:spPr>
           <a:xfrm>
-            <a:off x="2854121" y="1477899"/>
-            <a:ext cx="6149303" cy="3082671"/>
+            <a:off x="3805399" y="1970483"/>
+            <a:ext cx="8198866" cy="4110125"/>
           </a:xfrm>
           <a:prstGeom prst="rect">
             <a:avLst/>
@@ -16058,8 +16058,8 @@
         </p:blipFill>
         <p:spPr>
           <a:xfrm>
-            <a:off x="7955280" y="240030"/>
-            <a:ext cx="960120" cy="203093"/>
+            <a:off x="10606775" y="320032"/>
+            <a:ext cx="1280128" cy="270784"/>
           </a:xfrm>
           <a:prstGeom prst="rect">
             <a:avLst/>

--- a/skills/overview-deck/assets/skeletons/integration.pptx
+++ b/skills/overview-deck/assets/skeletons/integration.pptx
@@ -15229,72 +15229,6 @@
       </p:grpSpPr>
       <p:sp>
         <p:nvSpPr>
-          <p:cNvPr id="483" name="Google Shape;483;p58"/>
-          <p:cNvSpPr/>
-          <p:nvPr/>
-        </p:nvSpPr>
-        <p:spPr>
-          <a:xfrm>
-            <a:off x="10817081" y="6446359"/>
-            <a:ext cx="914377" cy="274313"/>
-          </a:xfrm>
-          <a:prstGeom prst="rect">
-            <a:avLst/>
-          </a:prstGeom>
-          <a:noFill/>
-          <a:ln>
-            <a:noFill/>
-          </a:ln>
-        </p:spPr>
-        <p:txBody>
-          <a:bodyPr anchorCtr="0" anchor="ctr" bIns="60932" lIns="121897" spcFirstLastPara="1" rIns="121897" wrap="square" tIns="60932">
-            <a:noAutofit/>
-          </a:bodyPr>
-          <a:lstStyle/>
-          <a:p>
-            <a:pPr indent="0" lvl="0" marL="0" marR="0" rtl="0" algn="r">
-              <a:lnSpc>
-                <a:spcPct val="100000"/>
-              </a:lnSpc>
-              <a:spcBef>
-                <a:spcPts val="0"/>
-              </a:spcBef>
-              <a:spcAft>
-                <a:spcPts val="0"/>
-              </a:spcAft>
-              <a:buClr>
-                <a:srgbClr val="8A8895"/>
-              </a:buClr>
-              <a:buSzPts val="900"/>
-              <a:buFont typeface="Proxima Nova"/>
-              <a:buNone/>
-            </a:pPr>
-            <a:r>
-              <a:rPr b="0" i="0" lang="en" sz="900" u="none" cap="none" strike="noStrike">
-                <a:solidFill>
-                  <a:srgbClr val="8A8895"/>
-                </a:solidFill>
-                <a:latin typeface="Proxima Nova"/>
-                <a:ea typeface="Proxima Nova"/>
-                <a:cs typeface="Proxima Nova"/>
-                <a:sym typeface="Proxima Nova"/>
-              </a:rPr>
-              <a:t>12</a:t>
-            </a:r>
-            <a:endParaRPr b="0" i="0" sz="900" u="none" cap="none" strike="noStrike">
-              <a:solidFill>
-                <a:srgbClr val="C0504D"/>
-              </a:solidFill>
-              <a:latin typeface="Calibri"/>
-              <a:ea typeface="Calibri"/>
-              <a:cs typeface="Calibri"/>
-              <a:sym typeface="Calibri"/>
-            </a:endParaRPr>
-          </a:p>
-        </p:txBody>
-      </p:sp>
-      <p:sp>
-        <p:nvSpPr>
           <p:cNvPr id="484" name="Google Shape;484;p58"/>
           <p:cNvSpPr/>
           <p:nvPr/>
